--- a/docs/KD_pool_source_ablation_20260703.pptx
+++ b/docs/KD_pool_source_ablation_20260703.pptx
@@ -3283,7 +3283,7 @@
                 </a:solidFill>
                 <a:latin typeface="Segoe UI"/>
               </a:rPr>
-              <a:t>Closing the evidence gap behind “Real &gt; Translated &gt; Generated”</a:t>
+              <a:t>rus_restaurant · size-matched · single-variable ablation</a:t>
             </a:r>
           </a:p>
         </p:txBody>
@@ -3462,7 +3462,7 @@
         <p:spPr>
           <a:xfrm>
             <a:off x="6995160" y="4434840"/>
-            <a:ext cx="2043684" cy="457200"/>
+            <a:ext cx="2235708" cy="457200"/>
           </a:xfrm>
           <a:prstGeom prst="roundRect">
             <a:avLst>
@@ -3503,7 +3503,7 @@
                 </a:solidFill>
                 <a:latin typeface="Consolas"/>
               </a:rPr>
-              <a:t>size-matched (4k)</a:t>
+              <a:t>silver capped @3000</a:t>
             </a:r>
           </a:p>
         </p:txBody>
@@ -3657,13 +3657,13 @@
           <a:p>
             <a:pPr algn="l"/>
             <a:r>
-              <a:rPr sz="1450" b="1" i="0">
+              <a:rPr sz="1500" b="1" i="0">
                 <a:solidFill>
                   <a:srgbClr val="0F172A"/>
                 </a:solidFill>
                 <a:latin typeface="Segoe UI"/>
               </a:rPr>
-              <a:t>Experiment in progress — real arm complete, translated/generated arms running</a:t>
+              <a:t>REAL ✅ done   ·   TRANSLATED 🔄 running   ·   GENERATED ⏳ pending</a:t>
             </a:r>
           </a:p>
         </p:txBody>
@@ -3759,7 +3759,7 @@
                 </a:solidFill>
                 <a:latin typeface="Segoe UI"/>
               </a:rPr>
-              <a:t>V23 Knowledge Distillation, in One Slide</a:t>
+              <a:t>V23 KD — Three Steps</a:t>
             </a:r>
           </a:p>
         </p:txBody>
@@ -3772,8 +3772,8 @@
         </p:nvSpPr>
         <p:spPr>
           <a:xfrm>
-            <a:off x="502920" y="1508760"/>
-            <a:ext cx="11155680" cy="457200"/>
+            <a:off x="502920" y="1481328"/>
+            <a:ext cx="11155680" cy="365760"/>
           </a:xfrm>
           <a:prstGeom prst="rect">
             <a:avLst/>
@@ -3788,13 +3788,13 @@
           <a:p>
             <a:pPr algn="l"/>
             <a:r>
-              <a:rPr sz="1700" b="1" i="0">
-                <a:solidFill>
-                  <a:srgbClr val="334155"/>
-                </a:solidFill>
-                <a:latin typeface="Segoe UI"/>
-              </a:rPr>
-              <a:t>Small ABSA-QUAD encoders underfit long-tail (entity#attribute) classes on scarce gold data.</a:t>
+              <a:rPr sz="1500" b="0" i="1">
+                <a:solidFill>
+                  <a:srgbClr val="64748B"/>
+                </a:solidFill>
+                <a:latin typeface="Segoe UI"/>
+              </a:rPr>
+              <a:t>Problem: gold scarce → long-tail classes underfit</a:t>
             </a:r>
           </a:p>
         </p:txBody>
@@ -3807,16 +3807,16 @@
         </p:nvSpPr>
         <p:spPr>
           <a:xfrm>
-            <a:off x="502920" y="2148840"/>
-            <a:ext cx="3584448" cy="2834640"/>
+            <a:off x="502920" y="2011680"/>
+            <a:ext cx="11247119" cy="420624"/>
           </a:xfrm>
           <a:prstGeom prst="roundRect">
             <a:avLst>
-              <a:gd name="adj" fmla="val 6000"/>
+              <a:gd name="adj" fmla="val 8000"/>
             </a:avLst>
           </a:prstGeom>
           <a:solidFill>
-            <a:srgbClr val="DEEAFB"/>
+            <a:srgbClr val="F1F5F9"/>
           </a:solidFill>
           <a:ln>
             <a:noFill/>
@@ -3847,25 +3847,132 @@
       </p:sp>
       <p:sp>
         <p:nvSpPr>
-          <p:cNvPr id="6" name="Rounded Rectangle 5"/>
+          <p:cNvPr id="6" name="TextBox 5"/>
+          <p:cNvSpPr txBox="1"/>
+          <p:nvPr/>
+        </p:nvSpPr>
+        <p:spPr>
+          <a:xfrm>
+            <a:off x="576072" y="2066544"/>
+            <a:ext cx="1316736" cy="310896"/>
+          </a:xfrm>
+          <a:prstGeom prst="rect">
+            <a:avLst/>
+          </a:prstGeom>
+          <a:noFill/>
+        </p:spPr>
+        <p:txBody>
+          <a:bodyPr wrap="square" lIns="0" rIns="0" tIns="25400" bIns="25400">
+            <a:spAutoFit/>
+          </a:bodyPr>
+          <a:lstStyle/>
+          <a:p>
+            <a:pPr algn="ctr"/>
+            <a:r>
+              <a:rPr sz="1200" b="1" i="0" spc="40">
+                <a:solidFill>
+                  <a:srgbClr val="64748B"/>
+                </a:solidFill>
+                <a:latin typeface="Segoe UI"/>
+              </a:rPr>
+              <a:t>STEP</a:t>
+            </a:r>
+          </a:p>
+        </p:txBody>
+      </p:sp>
+      <p:sp>
+        <p:nvSpPr>
+          <p:cNvPr id="7" name="TextBox 6"/>
+          <p:cNvSpPr txBox="1"/>
+          <p:nvPr/>
+        </p:nvSpPr>
+        <p:spPr>
+          <a:xfrm>
+            <a:off x="2039112" y="2066544"/>
+            <a:ext cx="4059935" cy="310896"/>
+          </a:xfrm>
+          <a:prstGeom prst="rect">
+            <a:avLst/>
+          </a:prstGeom>
+          <a:noFill/>
+        </p:spPr>
+        <p:txBody>
+          <a:bodyPr wrap="square" lIns="0" rIns="0" tIns="25400" bIns="25400">
+            <a:spAutoFit/>
+          </a:bodyPr>
+          <a:lstStyle/>
+          <a:p>
+            <a:pPr algn="ctr"/>
+            <a:r>
+              <a:rPr sz="1200" b="1" i="0" spc="40">
+                <a:solidFill>
+                  <a:srgbClr val="64748B"/>
+                </a:solidFill>
+                <a:latin typeface="Segoe UI"/>
+              </a:rPr>
+              <a:t>ACTION</a:t>
+            </a:r>
+          </a:p>
+        </p:txBody>
+      </p:sp>
+      <p:sp>
+        <p:nvSpPr>
+          <p:cNvPr id="8" name="TextBox 7"/>
+          <p:cNvSpPr txBox="1"/>
+          <p:nvPr/>
+        </p:nvSpPr>
+        <p:spPr>
+          <a:xfrm>
+            <a:off x="6245352" y="2066544"/>
+            <a:ext cx="5431536" cy="310896"/>
+          </a:xfrm>
+          <a:prstGeom prst="rect">
+            <a:avLst/>
+          </a:prstGeom>
+          <a:noFill/>
+        </p:spPr>
+        <p:txBody>
+          <a:bodyPr wrap="square" lIns="0" rIns="0" tIns="25400" bIns="25400">
+            <a:spAutoFit/>
+          </a:bodyPr>
+          <a:lstStyle/>
+          <a:p>
+            <a:pPr algn="ctr"/>
+            <a:r>
+              <a:rPr sz="1200" b="1" i="0" spc="40">
+                <a:solidFill>
+                  <a:srgbClr val="64748B"/>
+                </a:solidFill>
+                <a:latin typeface="Segoe UI"/>
+              </a:rPr>
+              <a:t>KEY POINT</a:t>
+            </a:r>
+          </a:p>
+        </p:txBody>
+      </p:sp>
+      <p:sp>
+        <p:nvSpPr>
+          <p:cNvPr id="9" name="Rounded Rectangle 8"/>
           <p:cNvSpPr/>
           <p:nvPr/>
         </p:nvSpPr>
         <p:spPr>
           <a:xfrm>
-            <a:off x="731520" y="2377440"/>
-            <a:ext cx="548640" cy="548640"/>
+            <a:off x="502920" y="2432304"/>
+            <a:ext cx="11247119" cy="566928"/>
           </a:xfrm>
           <a:prstGeom prst="roundRect">
             <a:avLst>
-              <a:gd name="adj" fmla="val 50000"/>
+              <a:gd name="adj" fmla="val 3000"/>
             </a:avLst>
           </a:prstGeom>
           <a:solidFill>
             <a:srgbClr val="FFFFFF"/>
           </a:solidFill>
-          <a:ln>
-            <a:noFill/>
+          <a:ln w="12700">
+            <a:solidFill>
+              <a:srgbClr val="E2E8F0"/>
+            </a:solidFill>
           </a:ln>
           <a:effectLst/>
         </p:spPr>
@@ -3893,14 +4000,14 @@
       </p:sp>
       <p:sp>
         <p:nvSpPr>
-          <p:cNvPr id="7" name="TextBox 6"/>
-          <p:cNvSpPr txBox="1"/>
-          <p:nvPr/>
-        </p:nvSpPr>
-        <p:spPr>
-          <a:xfrm>
-            <a:off x="731520" y="2377440"/>
-            <a:ext cx="548640" cy="548640"/>
+          <p:cNvPr id="10" name="TextBox 9"/>
+          <p:cNvSpPr txBox="1"/>
+          <p:nvPr/>
+        </p:nvSpPr>
+        <p:spPr>
+          <a:xfrm>
+            <a:off x="576072" y="2432304"/>
+            <a:ext cx="1316736" cy="566928"/>
           </a:xfrm>
           <a:prstGeom prst="rect">
             <a:avLst/>
@@ -3915,108 +4022,110 @@
           <a:p>
             <a:pPr algn="ctr"/>
             <a:r>
-              <a:rPr sz="2000" b="1" i="0">
-                <a:solidFill>
-                  <a:srgbClr val="1D4ED8"/>
-                </a:solidFill>
-                <a:latin typeface="Segoe UI"/>
-              </a:rPr>
-              <a:t>1</a:t>
-            </a:r>
-          </a:p>
-        </p:txBody>
-      </p:sp>
-      <p:sp>
-        <p:nvSpPr>
-          <p:cNvPr id="8" name="TextBox 7"/>
-          <p:cNvSpPr txBox="1"/>
-          <p:nvPr/>
-        </p:nvSpPr>
-        <p:spPr>
-          <a:xfrm>
-            <a:off x="731520" y="3063240"/>
-            <a:ext cx="3154680" cy="685800"/>
-          </a:xfrm>
-          <a:prstGeom prst="rect">
-            <a:avLst/>
-          </a:prstGeom>
-          <a:noFill/>
-        </p:spPr>
-        <p:txBody>
-          <a:bodyPr wrap="square" lIns="0" rIns="0" tIns="25400" bIns="25400">
-            <a:spAutoFit/>
-          </a:bodyPr>
-          <a:lstStyle/>
-          <a:p>
-            <a:pPr algn="l"/>
-            <a:r>
-              <a:rPr sz="1650" b="1" i="0">
-                <a:solidFill>
-                  <a:srgbClr val="1D4ED8"/>
-                </a:solidFill>
-                <a:latin typeface="Segoe UI"/>
-              </a:rPr>
-              <a:t>LLM silver-labels</a:t>
-            </a:r>
-          </a:p>
-        </p:txBody>
-      </p:sp>
-      <p:sp>
-        <p:nvSpPr>
-          <p:cNvPr id="9" name="TextBox 8"/>
-          <p:cNvSpPr txBox="1"/>
-          <p:nvPr/>
-        </p:nvSpPr>
-        <p:spPr>
-          <a:xfrm>
-            <a:off x="731520" y="3749039"/>
-            <a:ext cx="3154680" cy="1143000"/>
-          </a:xfrm>
-          <a:prstGeom prst="rect">
-            <a:avLst/>
-          </a:prstGeom>
-          <a:noFill/>
-        </p:spPr>
-        <p:txBody>
-          <a:bodyPr wrap="square" lIns="0" rIns="0" tIns="25400" bIns="25400">
-            <a:spAutoFit/>
-          </a:bodyPr>
-          <a:lstStyle/>
-          <a:p>
-            <a:pPr algn="l"/>
-            <a:r>
-              <a:rPr sz="1300" b="0" i="0">
+              <a:rPr sz="1400" b="1" i="0">
+                <a:solidFill>
+                  <a:srgbClr val="0F172A"/>
+                </a:solidFill>
+                <a:latin typeface="Segoe UI"/>
+              </a:rPr>
+              <a:t>1 · Silver label</a:t>
+            </a:r>
+          </a:p>
+        </p:txBody>
+      </p:sp>
+      <p:sp>
+        <p:nvSpPr>
+          <p:cNvPr id="11" name="TextBox 10"/>
+          <p:cNvSpPr txBox="1"/>
+          <p:nvPr/>
+        </p:nvSpPr>
+        <p:spPr>
+          <a:xfrm>
+            <a:off x="2039112" y="2432304"/>
+            <a:ext cx="4059935" cy="566928"/>
+          </a:xfrm>
+          <a:prstGeom prst="rect">
+            <a:avLst/>
+          </a:prstGeom>
+          <a:noFill/>
+        </p:spPr>
+        <p:txBody>
+          <a:bodyPr wrap="square" anchor="ctr" lIns="0" rIns="0" tIns="25400" bIns="25400">
+            <a:spAutoFit/>
+          </a:bodyPr>
+          <a:lstStyle/>
+          <a:p>
+            <a:pPr algn="ctr"/>
+            <a:r>
+              <a:rPr sz="1400" b="0" i="0">
                 <a:solidFill>
                   <a:srgbClr val="334155"/>
                 </a:solidFill>
                 <a:latin typeface="Segoe UI"/>
               </a:rPr>
-              <a:t>A teacher LLM (DeepSeek / local qwen) annotates unlabeled in-domain text with full ABSA-QUAD quads.</a:t>
-            </a:r>
-          </a:p>
-        </p:txBody>
-      </p:sp>
-      <p:sp>
-        <p:nvSpPr>
-          <p:cNvPr id="10" name="Rounded Rectangle 9"/>
+              <a:t>LLM labels unlabeled text</a:t>
+            </a:r>
+          </a:p>
+        </p:txBody>
+      </p:sp>
+      <p:sp>
+        <p:nvSpPr>
+          <p:cNvPr id="12" name="TextBox 11"/>
+          <p:cNvSpPr txBox="1"/>
+          <p:nvPr/>
+        </p:nvSpPr>
+        <p:spPr>
+          <a:xfrm>
+            <a:off x="6245352" y="2432304"/>
+            <a:ext cx="5431536" cy="566928"/>
+          </a:xfrm>
+          <a:prstGeom prst="rect">
+            <a:avLst/>
+          </a:prstGeom>
+          <a:noFill/>
+        </p:spPr>
+        <p:txBody>
+          <a:bodyPr wrap="square" anchor="ctr" lIns="0" rIns="0" tIns="25400" bIns="25400">
+            <a:spAutoFit/>
+          </a:bodyPr>
+          <a:lstStyle/>
+          <a:p>
+            <a:pPr algn="ctr"/>
+            <a:r>
+              <a:rPr sz="1400" b="0" i="0">
+                <a:solidFill>
+                  <a:srgbClr val="334155"/>
+                </a:solidFill>
+                <a:latin typeface="Segoe UI"/>
+              </a:rPr>
+              <a:t>DeepSeek / local qwen</a:t>
+            </a:r>
+          </a:p>
+        </p:txBody>
+      </p:sp>
+      <p:sp>
+        <p:nvSpPr>
+          <p:cNvPr id="13" name="Rounded Rectangle 12"/>
           <p:cNvSpPr/>
           <p:nvPr/>
         </p:nvSpPr>
         <p:spPr>
           <a:xfrm>
-            <a:off x="4288536" y="2148840"/>
-            <a:ext cx="3584448" cy="2834640"/>
+            <a:off x="502920" y="2999232"/>
+            <a:ext cx="11247119" cy="566928"/>
           </a:xfrm>
           <a:prstGeom prst="roundRect">
             <a:avLst>
-              <a:gd name="adj" fmla="val 6000"/>
+              <a:gd name="adj" fmla="val 3000"/>
             </a:avLst>
           </a:prstGeom>
           <a:solidFill>
-            <a:srgbClr val="ECE6FB"/>
+            <a:srgbClr val="FFFFFF"/>
           </a:solidFill>
-          <a:ln>
-            <a:noFill/>
+          <a:ln w="12700">
+            <a:solidFill>
+              <a:srgbClr val="E2E8F0"/>
+            </a:solidFill>
           </a:ln>
           <a:effectLst/>
         </p:spPr>
@@ -4044,25 +4153,132 @@
       </p:sp>
       <p:sp>
         <p:nvSpPr>
-          <p:cNvPr id="11" name="Rounded Rectangle 10"/>
+          <p:cNvPr id="14" name="TextBox 13"/>
+          <p:cNvSpPr txBox="1"/>
+          <p:nvPr/>
+        </p:nvSpPr>
+        <p:spPr>
+          <a:xfrm>
+            <a:off x="576072" y="2999232"/>
+            <a:ext cx="1316736" cy="566928"/>
+          </a:xfrm>
+          <a:prstGeom prst="rect">
+            <a:avLst/>
+          </a:prstGeom>
+          <a:noFill/>
+        </p:spPr>
+        <p:txBody>
+          <a:bodyPr wrap="square" anchor="ctr" lIns="0" rIns="0" tIns="25400" bIns="25400">
+            <a:spAutoFit/>
+          </a:bodyPr>
+          <a:lstStyle/>
+          <a:p>
+            <a:pPr algn="ctr"/>
+            <a:r>
+              <a:rPr sz="1400" b="1" i="0">
+                <a:solidFill>
+                  <a:srgbClr val="0F172A"/>
+                </a:solidFill>
+                <a:latin typeface="Segoe UI"/>
+              </a:rPr>
+              <a:t>2 · Joint train</a:t>
+            </a:r>
+          </a:p>
+        </p:txBody>
+      </p:sp>
+      <p:sp>
+        <p:nvSpPr>
+          <p:cNvPr id="15" name="TextBox 14"/>
+          <p:cNvSpPr txBox="1"/>
+          <p:nvPr/>
+        </p:nvSpPr>
+        <p:spPr>
+          <a:xfrm>
+            <a:off x="2039112" y="2999232"/>
+            <a:ext cx="4059935" cy="566928"/>
+          </a:xfrm>
+          <a:prstGeom prst="rect">
+            <a:avLst/>
+          </a:prstGeom>
+          <a:noFill/>
+        </p:spPr>
+        <p:txBody>
+          <a:bodyPr wrap="square" anchor="ctr" lIns="0" rIns="0" tIns="25400" bIns="25400">
+            <a:spAutoFit/>
+          </a:bodyPr>
+          <a:lstStyle/>
+          <a:p>
+            <a:pPr algn="ctr"/>
+            <a:r>
+              <a:rPr sz="1400" b="0" i="0">
+                <a:solidFill>
+                  <a:srgbClr val="334155"/>
+                </a:solidFill>
+                <a:latin typeface="Segoe UI"/>
+              </a:rPr>
+              <a:t>encoder on gold + silver</a:t>
+            </a:r>
+          </a:p>
+        </p:txBody>
+      </p:sp>
+      <p:sp>
+        <p:nvSpPr>
+          <p:cNvPr id="16" name="TextBox 15"/>
+          <p:cNvSpPr txBox="1"/>
+          <p:nvPr/>
+        </p:nvSpPr>
+        <p:spPr>
+          <a:xfrm>
+            <a:off x="6245352" y="2999232"/>
+            <a:ext cx="5431536" cy="566928"/>
+          </a:xfrm>
+          <a:prstGeom prst="rect">
+            <a:avLst/>
+          </a:prstGeom>
+          <a:noFill/>
+        </p:spPr>
+        <p:txBody>
+          <a:bodyPr wrap="square" anchor="ctr" lIns="0" rIns="0" tIns="25400" bIns="25400">
+            <a:spAutoFit/>
+          </a:bodyPr>
+          <a:lstStyle/>
+          <a:p>
+            <a:pPr algn="ctr"/>
+            <a:r>
+              <a:rPr sz="1400" b="0" i="0">
+                <a:solidFill>
+                  <a:srgbClr val="334155"/>
+                </a:solidFill>
+                <a:latin typeface="Segoe UI"/>
+              </a:rPr>
+              <a:t>silver injects class priors</a:t>
+            </a:r>
+          </a:p>
+        </p:txBody>
+      </p:sp>
+      <p:sp>
+        <p:nvSpPr>
+          <p:cNvPr id="17" name="Rounded Rectangle 16"/>
           <p:cNvSpPr/>
           <p:nvPr/>
         </p:nvSpPr>
         <p:spPr>
           <a:xfrm>
-            <a:off x="4517136" y="2377440"/>
-            <a:ext cx="548640" cy="548640"/>
+            <a:off x="502920" y="3566160"/>
+            <a:ext cx="11247119" cy="566928"/>
           </a:xfrm>
           <a:prstGeom prst="roundRect">
             <a:avLst>
-              <a:gd name="adj" fmla="val 50000"/>
+              <a:gd name="adj" fmla="val 3000"/>
             </a:avLst>
           </a:prstGeom>
           <a:solidFill>
             <a:srgbClr val="FFFFFF"/>
           </a:solidFill>
-          <a:ln>
-            <a:noFill/>
+          <a:ln w="12700">
+            <a:solidFill>
+              <a:srgbClr val="E2E8F0"/>
+            </a:solidFill>
           </a:ln>
           <a:effectLst/>
         </p:spPr>
@@ -4090,14 +4306,14 @@
       </p:sp>
       <p:sp>
         <p:nvSpPr>
-          <p:cNvPr id="12" name="TextBox 11"/>
-          <p:cNvSpPr txBox="1"/>
-          <p:nvPr/>
-        </p:nvSpPr>
-        <p:spPr>
-          <a:xfrm>
-            <a:off x="4517136" y="2377440"/>
-            <a:ext cx="548640" cy="548640"/>
+          <p:cNvPr id="18" name="TextBox 17"/>
+          <p:cNvSpPr txBox="1"/>
+          <p:nvPr/>
+        </p:nvSpPr>
+        <p:spPr>
+          <a:xfrm>
+            <a:off x="576072" y="3566160"/>
+            <a:ext cx="1316736" cy="566928"/>
           </a:xfrm>
           <a:prstGeom prst="rect">
             <a:avLst/>
@@ -4112,294 +4328,97 @@
           <a:p>
             <a:pPr algn="ctr"/>
             <a:r>
-              <a:rPr sz="2000" b="1" i="0">
-                <a:solidFill>
-                  <a:srgbClr val="6D28D9"/>
-                </a:solidFill>
-                <a:latin typeface="Segoe UI"/>
-              </a:rPr>
-              <a:t>2</a:t>
-            </a:r>
-          </a:p>
-        </p:txBody>
-      </p:sp>
-      <p:sp>
-        <p:nvSpPr>
-          <p:cNvPr id="13" name="TextBox 12"/>
-          <p:cNvSpPr txBox="1"/>
-          <p:nvPr/>
-        </p:nvSpPr>
-        <p:spPr>
-          <a:xfrm>
-            <a:off x="4517136" y="3063240"/>
-            <a:ext cx="3154680" cy="685800"/>
-          </a:xfrm>
-          <a:prstGeom prst="rect">
-            <a:avLst/>
-          </a:prstGeom>
-          <a:noFill/>
-        </p:spPr>
-        <p:txBody>
-          <a:bodyPr wrap="square" lIns="0" rIns="0" tIns="25400" bIns="25400">
-            <a:spAutoFit/>
-          </a:bodyPr>
-          <a:lstStyle/>
-          <a:p>
-            <a:pPr algn="l"/>
-            <a:r>
-              <a:rPr sz="1650" b="1" i="0">
-                <a:solidFill>
-                  <a:srgbClr val="6D28D9"/>
-                </a:solidFill>
-                <a:latin typeface="Segoe UI"/>
-              </a:rPr>
-              <a:t>Small model trains on gold + silver</a:t>
-            </a:r>
-          </a:p>
-        </p:txBody>
-      </p:sp>
-      <p:sp>
-        <p:nvSpPr>
-          <p:cNvPr id="14" name="TextBox 13"/>
-          <p:cNvSpPr txBox="1"/>
-          <p:nvPr/>
-        </p:nvSpPr>
-        <p:spPr>
-          <a:xfrm>
-            <a:off x="4517136" y="3749039"/>
-            <a:ext cx="3154680" cy="1143000"/>
-          </a:xfrm>
-          <a:prstGeom prst="rect">
-            <a:avLst/>
-          </a:prstGeom>
-          <a:noFill/>
-        </p:spPr>
-        <p:txBody>
-          <a:bodyPr wrap="square" lIns="0" rIns="0" tIns="25400" bIns="25400">
-            <a:spAutoFit/>
-          </a:bodyPr>
-          <a:lstStyle/>
-          <a:p>
-            <a:pPr algn="l"/>
-            <a:r>
-              <a:rPr sz="1300" b="0" i="0">
+              <a:rPr sz="1400" b="1" i="0">
+                <a:solidFill>
+                  <a:srgbClr val="0F172A"/>
+                </a:solidFill>
+                <a:latin typeface="Segoe UI"/>
+              </a:rPr>
+              <a:t>3 · Inference</a:t>
+            </a:r>
+          </a:p>
+        </p:txBody>
+      </p:sp>
+      <p:sp>
+        <p:nvSpPr>
+          <p:cNvPr id="19" name="TextBox 18"/>
+          <p:cNvSpPr txBox="1"/>
+          <p:nvPr/>
+        </p:nvSpPr>
+        <p:spPr>
+          <a:xfrm>
+            <a:off x="2039112" y="3566160"/>
+            <a:ext cx="4059935" cy="566928"/>
+          </a:xfrm>
+          <a:prstGeom prst="rect">
+            <a:avLst/>
+          </a:prstGeom>
+          <a:noFill/>
+        </p:spPr>
+        <p:txBody>
+          <a:bodyPr wrap="square" anchor="ctr" lIns="0" rIns="0" tIns="25400" bIns="25400">
+            <a:spAutoFit/>
+          </a:bodyPr>
+          <a:lstStyle/>
+          <a:p>
+            <a:pPr algn="ctr"/>
+            <a:r>
+              <a:rPr sz="1400" b="0" i="0">
                 <a:solidFill>
                   <a:srgbClr val="334155"/>
                 </a:solidFill>
                 <a:latin typeface="Segoe UI"/>
               </a:rPr>
-              <a:t>encoder (mDeBERTa / XLM-R) trains on the union; silver injects class priors gold alone can't supply.</a:t>
-            </a:r>
-          </a:p>
-        </p:txBody>
-      </p:sp>
-      <p:sp>
-        <p:nvSpPr>
-          <p:cNvPr id="15" name="Rounded Rectangle 14"/>
+              <a:t>small-model ensemble only</a:t>
+            </a:r>
+          </a:p>
+        </p:txBody>
+      </p:sp>
+      <p:sp>
+        <p:nvSpPr>
+          <p:cNvPr id="20" name="TextBox 19"/>
+          <p:cNvSpPr txBox="1"/>
+          <p:nvPr/>
+        </p:nvSpPr>
+        <p:spPr>
+          <a:xfrm>
+            <a:off x="6245352" y="3566160"/>
+            <a:ext cx="5431536" cy="566928"/>
+          </a:xfrm>
+          <a:prstGeom prst="rect">
+            <a:avLst/>
+          </a:prstGeom>
+          <a:noFill/>
+        </p:spPr>
+        <p:txBody>
+          <a:bodyPr wrap="square" anchor="ctr" lIns="0" rIns="0" tIns="25400" bIns="25400">
+            <a:spAutoFit/>
+          </a:bodyPr>
+          <a:lstStyle/>
+          <a:p>
+            <a:pPr algn="ctr"/>
+            <a:r>
+              <a:rPr sz="1400" b="0" i="0">
+                <a:solidFill>
+                  <a:srgbClr val="334155"/>
+                </a:solidFill>
+                <a:latin typeface="Segoe UI"/>
+              </a:rPr>
+              <a:t>no LLM cost / latency / variance</a:t>
+            </a:r>
+          </a:p>
+        </p:txBody>
+      </p:sp>
+      <p:sp>
+        <p:nvSpPr>
+          <p:cNvPr id="21" name="Rounded Rectangle 20"/>
           <p:cNvSpPr/>
           <p:nvPr/>
         </p:nvSpPr>
         <p:spPr>
           <a:xfrm>
-            <a:off x="8074152" y="2148840"/>
-            <a:ext cx="3584448" cy="2834640"/>
-          </a:xfrm>
-          <a:prstGeom prst="roundRect">
-            <a:avLst>
-              <a:gd name="adj" fmla="val 6000"/>
-            </a:avLst>
-          </a:prstGeom>
-          <a:solidFill>
-            <a:srgbClr val="D6F2E4"/>
-          </a:solidFill>
-          <a:ln>
-            <a:noFill/>
-          </a:ln>
-          <a:effectLst/>
-        </p:spPr>
-        <p:style>
-          <a:lnRef idx="1">
-            <a:schemeClr val="accent1"/>
-          </a:lnRef>
-          <a:fillRef idx="3">
-            <a:schemeClr val="accent1"/>
-          </a:fillRef>
-          <a:effectRef idx="2">
-            <a:schemeClr val="accent1"/>
-          </a:effectRef>
-          <a:fontRef idx="minor">
-            <a:schemeClr val="lt1"/>
-          </a:fontRef>
-        </p:style>
-        <p:txBody>
-          <a:bodyPr rtlCol="0" anchor="ctr"/>
-          <a:lstStyle/>
-          <a:p>
-            <a:pPr algn="ctr"/>
-          </a:p>
-        </p:txBody>
-      </p:sp>
-      <p:sp>
-        <p:nvSpPr>
-          <p:cNvPr id="16" name="Rounded Rectangle 15"/>
-          <p:cNvSpPr/>
-          <p:nvPr/>
-        </p:nvSpPr>
-        <p:spPr>
-          <a:xfrm>
-            <a:off x="8302752" y="2377440"/>
-            <a:ext cx="548640" cy="548640"/>
-          </a:xfrm>
-          <a:prstGeom prst="roundRect">
-            <a:avLst>
-              <a:gd name="adj" fmla="val 50000"/>
-            </a:avLst>
-          </a:prstGeom>
-          <a:solidFill>
-            <a:srgbClr val="FFFFFF"/>
-          </a:solidFill>
-          <a:ln>
-            <a:noFill/>
-          </a:ln>
-          <a:effectLst/>
-        </p:spPr>
-        <p:style>
-          <a:lnRef idx="1">
-            <a:schemeClr val="accent1"/>
-          </a:lnRef>
-          <a:fillRef idx="3">
-            <a:schemeClr val="accent1"/>
-          </a:fillRef>
-          <a:effectRef idx="2">
-            <a:schemeClr val="accent1"/>
-          </a:effectRef>
-          <a:fontRef idx="minor">
-            <a:schemeClr val="lt1"/>
-          </a:fontRef>
-        </p:style>
-        <p:txBody>
-          <a:bodyPr rtlCol="0" anchor="ctr"/>
-          <a:lstStyle/>
-          <a:p>
-            <a:pPr algn="ctr"/>
-          </a:p>
-        </p:txBody>
-      </p:sp>
-      <p:sp>
-        <p:nvSpPr>
-          <p:cNvPr id="17" name="TextBox 16"/>
-          <p:cNvSpPr txBox="1"/>
-          <p:nvPr/>
-        </p:nvSpPr>
-        <p:spPr>
-          <a:xfrm>
-            <a:off x="8302752" y="2377440"/>
-            <a:ext cx="548640" cy="548640"/>
-          </a:xfrm>
-          <a:prstGeom prst="rect">
-            <a:avLst/>
-          </a:prstGeom>
-          <a:noFill/>
-        </p:spPr>
-        <p:txBody>
-          <a:bodyPr wrap="square" anchor="ctr" lIns="0" rIns="0" tIns="25400" bIns="25400">
-            <a:spAutoFit/>
-          </a:bodyPr>
-          <a:lstStyle/>
-          <a:p>
-            <a:pPr algn="ctr"/>
-            <a:r>
-              <a:rPr sz="2000" b="1" i="0">
-                <a:solidFill>
-                  <a:srgbClr val="047857"/>
-                </a:solidFill>
-                <a:latin typeface="Segoe UI"/>
-              </a:rPr>
-              <a:t>3</a:t>
-            </a:r>
-          </a:p>
-        </p:txBody>
-      </p:sp>
-      <p:sp>
-        <p:nvSpPr>
-          <p:cNvPr id="18" name="TextBox 17"/>
-          <p:cNvSpPr txBox="1"/>
-          <p:nvPr/>
-        </p:nvSpPr>
-        <p:spPr>
-          <a:xfrm>
-            <a:off x="8302752" y="3063240"/>
-            <a:ext cx="3154680" cy="685800"/>
-          </a:xfrm>
-          <a:prstGeom prst="rect">
-            <a:avLst/>
-          </a:prstGeom>
-          <a:noFill/>
-        </p:spPr>
-        <p:txBody>
-          <a:bodyPr wrap="square" lIns="0" rIns="0" tIns="25400" bIns="25400">
-            <a:spAutoFit/>
-          </a:bodyPr>
-          <a:lstStyle/>
-          <a:p>
-            <a:pPr algn="l"/>
-            <a:r>
-              <a:rPr sz="1650" b="1" i="0">
-                <a:solidFill>
-                  <a:srgbClr val="047857"/>
-                </a:solidFill>
-                <a:latin typeface="Segoe UI"/>
-              </a:rPr>
-              <a:t>LLM dropped at inference</a:t>
-            </a:r>
-          </a:p>
-        </p:txBody>
-      </p:sp>
-      <p:sp>
-        <p:nvSpPr>
-          <p:cNvPr id="19" name="TextBox 18"/>
-          <p:cNvSpPr txBox="1"/>
-          <p:nvPr/>
-        </p:nvSpPr>
-        <p:spPr>
-          <a:xfrm>
-            <a:off x="8302752" y="3749039"/>
-            <a:ext cx="3154680" cy="1143000"/>
-          </a:xfrm>
-          <a:prstGeom prst="rect">
-            <a:avLst/>
-          </a:prstGeom>
-          <a:noFill/>
-        </p:spPr>
-        <p:txBody>
-          <a:bodyPr wrap="square" lIns="0" rIns="0" tIns="25400" bIns="25400">
-            <a:spAutoFit/>
-          </a:bodyPr>
-          <a:lstStyle/>
-          <a:p>
-            <a:pPr algn="l"/>
-            <a:r>
-              <a:rPr sz="1300" b="0" i="0">
-                <a:solidFill>
-                  <a:srgbClr val="334155"/>
-                </a:solidFill>
-                <a:latin typeface="Segoe UI"/>
-              </a:rPr>
-              <a:t>Final inference is a pure 5-seed small-model ensemble — no LLM cost, no LLM latency, no LLM variance.</a:t>
-            </a:r>
-          </a:p>
-        </p:txBody>
-      </p:sp>
-      <p:sp>
-        <p:nvSpPr>
-          <p:cNvPr id="20" name="Rounded Rectangle 19"/>
-          <p:cNvSpPr/>
-          <p:nvPr/>
-        </p:nvSpPr>
-        <p:spPr>
-          <a:xfrm>
-            <a:off x="502920" y="5257800"/>
-            <a:ext cx="11201400" cy="868680"/>
+            <a:off x="502920" y="3977639"/>
+            <a:ext cx="11201400" cy="777240"/>
           </a:xfrm>
           <a:prstGeom prst="roundRect">
             <a:avLst>
@@ -4438,14 +4457,14 @@
       </p:sp>
       <p:sp>
         <p:nvSpPr>
-          <p:cNvPr id="21" name="Rectangle 20"/>
+          <p:cNvPr id="22" name="Rectangle 21"/>
           <p:cNvSpPr/>
           <p:nvPr/>
         </p:nvSpPr>
         <p:spPr>
           <a:xfrm>
-            <a:off x="502920" y="5257800"/>
-            <a:ext cx="91440" cy="868680"/>
+            <a:off x="502920" y="3977639"/>
+            <a:ext cx="91440" cy="777240"/>
           </a:xfrm>
           <a:prstGeom prst="rect">
             <a:avLst/>
@@ -4482,13 +4501,13 @@
       </p:sp>
       <p:sp>
         <p:nvSpPr>
-          <p:cNvPr id="22" name="TextBox 21"/>
-          <p:cNvSpPr txBox="1"/>
-          <p:nvPr/>
-        </p:nvSpPr>
-        <p:spPr>
-          <a:xfrm>
-            <a:off x="713232" y="5376672"/>
+          <p:cNvPr id="23" name="TextBox 22"/>
+          <p:cNvSpPr txBox="1"/>
+          <p:nvPr/>
+        </p:nvSpPr>
+        <p:spPr>
+          <a:xfrm>
+            <a:off x="713232" y="4096512"/>
             <a:ext cx="2743200" cy="292608"/>
           </a:xfrm>
           <a:prstGeom prst="rect">
@@ -4510,21 +4529,21 @@
                 </a:solidFill>
                 <a:latin typeface="Segoe UI"/>
               </a:rPr>
-              <a:t>Established result</a:t>
-            </a:r>
-          </a:p>
-        </p:txBody>
-      </p:sp>
-      <p:sp>
-        <p:nvSpPr>
-          <p:cNvPr id="23" name="TextBox 22"/>
-          <p:cNvSpPr txBox="1"/>
-          <p:nvPr/>
-        </p:nvSpPr>
-        <p:spPr>
-          <a:xfrm>
-            <a:off x="713232" y="5650992"/>
-            <a:ext cx="10698480" cy="384048"/>
+              <a:t>Result</a:t>
+            </a:r>
+          </a:p>
+        </p:txBody>
+      </p:sp>
+      <p:sp>
+        <p:nvSpPr>
+          <p:cNvPr id="24" name="TextBox 23"/>
+          <p:cNvSpPr txBox="1"/>
+          <p:nvPr/>
+        </p:nvSpPr>
+        <p:spPr>
+          <a:xfrm>
+            <a:off x="713232" y="4343400"/>
+            <a:ext cx="10698480" cy="365760"/>
           </a:xfrm>
           <a:prstGeom prst="rect">
             <a:avLst/>
@@ -4539,13 +4558,13 @@
           <a:p>
             <a:pPr algn="l"/>
             <a:r>
-              <a:rPr sz="1500" b="1" i="0">
+              <a:rPr sz="1700" b="1" i="0">
                 <a:solidFill>
                   <a:srgbClr val="0F172A"/>
                 </a:solidFill>
                 <a:latin typeface="Segoe UI"/>
               </a:rPr>
-              <a:t>KD beats prior test SOTA on 5/8 datasets (+1.2 to +5.9 pp); helps most where gold is scarcest.</a:t>
+              <a:t>5 / 8 datasets beat prior SOTA  (+1.2 ~ +5.9 pp)</a:t>
             </a:r>
           </a:p>
         </p:txBody>
@@ -4641,7 +4660,7 @@
                 </a:solidFill>
                 <a:latin typeface="Segoe UI"/>
               </a:rPr>
-              <a:t>rus_restaurant Is a Proven KD-Positive Dataset</a:t>
+              <a:t>A Proven KD-Positive Dataset</a:t>
             </a:r>
           </a:p>
         </p:txBody>
@@ -4654,8 +4673,8 @@
         </p:nvSpPr>
         <p:spPr>
           <a:xfrm>
-            <a:off x="475488" y="1536192"/>
-            <a:ext cx="11064240" cy="457200"/>
+            <a:off x="475488" y="1600200"/>
+            <a:ext cx="11064240" cy="420624"/>
           </a:xfrm>
           <a:prstGeom prst="roundRect">
             <a:avLst>
@@ -4700,8 +4719,8 @@
         </p:nvSpPr>
         <p:spPr>
           <a:xfrm>
-            <a:off x="548640" y="1600200"/>
-            <a:ext cx="2596896" cy="347472"/>
+            <a:off x="548640" y="1655064"/>
+            <a:ext cx="2596896" cy="310896"/>
           </a:xfrm>
           <a:prstGeom prst="rect">
             <a:avLst/>
@@ -4716,7 +4735,7 @@
           <a:p>
             <a:pPr algn="ctr"/>
             <a:r>
-              <a:rPr sz="1200" b="1" i="0" spc="50">
+              <a:rPr sz="1200" b="1" i="0" spc="40">
                 <a:solidFill>
                   <a:srgbClr val="64748B"/>
                 </a:solidFill>
@@ -4735,8 +4754,8 @@
         </p:nvSpPr>
         <p:spPr>
           <a:xfrm>
-            <a:off x="3291840" y="1600200"/>
-            <a:ext cx="1865376" cy="347472"/>
+            <a:off x="3291840" y="1655064"/>
+            <a:ext cx="1865376" cy="310896"/>
           </a:xfrm>
           <a:prstGeom prst="rect">
             <a:avLst/>
@@ -4751,7 +4770,7 @@
           <a:p>
             <a:pPr algn="ctr"/>
             <a:r>
-              <a:rPr sz="1200" b="1" i="0" spc="50">
+              <a:rPr sz="1200" b="1" i="0" spc="40">
                 <a:solidFill>
                   <a:srgbClr val="64748B"/>
                 </a:solidFill>
@@ -4770,8 +4789,8 @@
         </p:nvSpPr>
         <p:spPr>
           <a:xfrm>
-            <a:off x="5303520" y="1600200"/>
-            <a:ext cx="2048255" cy="347472"/>
+            <a:off x="5303520" y="1655064"/>
+            <a:ext cx="2048255" cy="310896"/>
           </a:xfrm>
           <a:prstGeom prst="rect">
             <a:avLst/>
@@ -4786,7 +4805,7 @@
           <a:p>
             <a:pPr algn="ctr"/>
             <a:r>
-              <a:rPr sz="1200" b="1" i="0" spc="50">
+              <a:rPr sz="1200" b="1" i="0" spc="40">
                 <a:solidFill>
                   <a:srgbClr val="64748B"/>
                 </a:solidFill>
@@ -4805,8 +4824,8 @@
         </p:nvSpPr>
         <p:spPr>
           <a:xfrm>
-            <a:off x="7498080" y="1600200"/>
-            <a:ext cx="2048255" cy="347472"/>
+            <a:off x="7498080" y="1655064"/>
+            <a:ext cx="2048255" cy="310896"/>
           </a:xfrm>
           <a:prstGeom prst="rect">
             <a:avLst/>
@@ -4821,13 +4840,13 @@
           <a:p>
             <a:pPr algn="ctr"/>
             <a:r>
-              <a:rPr sz="1200" b="1" i="0" spc="50">
+              <a:rPr sz="1200" b="1" i="0" spc="40">
                 <a:solidFill>
                   <a:srgbClr val="64748B"/>
                 </a:solidFill>
                 <a:latin typeface="Segoe UI"/>
               </a:rPr>
-              <a:t>Δ vs BASELINE</a:t>
+              <a:t>Δ</a:t>
             </a:r>
           </a:p>
         </p:txBody>
@@ -4840,8 +4859,8 @@
         </p:nvSpPr>
         <p:spPr>
           <a:xfrm>
-            <a:off x="9692640" y="1600200"/>
-            <a:ext cx="1773936" cy="347472"/>
+            <a:off x="9692640" y="1655064"/>
+            <a:ext cx="1773936" cy="310896"/>
           </a:xfrm>
           <a:prstGeom prst="rect">
             <a:avLst/>
@@ -4856,7 +4875,7 @@
           <a:p>
             <a:pPr algn="ctr"/>
             <a:r>
-              <a:rPr sz="1200" b="1" i="0" spc="50">
+              <a:rPr sz="1200" b="1" i="0" spc="40">
                 <a:solidFill>
                   <a:srgbClr val="64748B"/>
                 </a:solidFill>
@@ -4875,12 +4894,12 @@
         </p:nvSpPr>
         <p:spPr>
           <a:xfrm>
-            <a:off x="475488" y="2029968"/>
-            <a:ext cx="11064240" cy="457200"/>
+            <a:off x="475488" y="2020824"/>
+            <a:ext cx="11064240" cy="512064"/>
           </a:xfrm>
           <a:prstGeom prst="roundRect">
             <a:avLst>
-              <a:gd name="adj" fmla="val 4000"/>
+              <a:gd name="adj" fmla="val 3000"/>
             </a:avLst>
           </a:prstGeom>
           <a:solidFill>
@@ -4923,8 +4942,8 @@
         </p:nvSpPr>
         <p:spPr>
           <a:xfrm>
-            <a:off x="548640" y="2029968"/>
-            <a:ext cx="2596896" cy="457200"/>
+            <a:off x="548640" y="2020824"/>
+            <a:ext cx="2596896" cy="512064"/>
           </a:xfrm>
           <a:prstGeom prst="rect">
             <a:avLst/>
@@ -4939,27 +4958,62 @@
           <a:p>
             <a:pPr algn="ctr"/>
             <a:r>
-              <a:rPr sz="1350" b="0" i="0">
+              <a:rPr sz="1400" b="1" i="0">
+                <a:solidFill>
+                  <a:srgbClr val="0F172A"/>
+                </a:solidFill>
+                <a:latin typeface="Segoe UI"/>
+              </a:rPr>
+              <a:t>eng_laptop</a:t>
+            </a:r>
+          </a:p>
+        </p:txBody>
+      </p:sp>
+      <p:sp>
+        <p:nvSpPr>
+          <p:cNvPr id="12" name="TextBox 11"/>
+          <p:cNvSpPr txBox="1"/>
+          <p:nvPr/>
+        </p:nvSpPr>
+        <p:spPr>
+          <a:xfrm>
+            <a:off x="3291840" y="2020824"/>
+            <a:ext cx="1865376" cy="512064"/>
+          </a:xfrm>
+          <a:prstGeom prst="rect">
+            <a:avLst/>
+          </a:prstGeom>
+          <a:noFill/>
+        </p:spPr>
+        <p:txBody>
+          <a:bodyPr wrap="square" anchor="ctr" lIns="0" rIns="0" tIns="25400" bIns="25400">
+            <a:spAutoFit/>
+          </a:bodyPr>
+          <a:lstStyle/>
+          <a:p>
+            <a:pPr algn="ctr"/>
+            <a:r>
+              <a:rPr sz="1400" b="0" i="0">
                 <a:solidFill>
                   <a:srgbClr val="334155"/>
                 </a:solidFill>
-                <a:latin typeface="Consolas"/>
-              </a:rPr>
-              <a:t>eng_laptop</a:t>
-            </a:r>
-          </a:p>
-        </p:txBody>
-      </p:sp>
-      <p:sp>
-        <p:nvSpPr>
-          <p:cNvPr id="12" name="TextBox 11"/>
-          <p:cNvSpPr txBox="1"/>
-          <p:nvPr/>
-        </p:nvSpPr>
-        <p:spPr>
-          <a:xfrm>
-            <a:off x="3291840" y="2029968"/>
-            <a:ext cx="1865376" cy="457200"/>
+                <a:latin typeface="Segoe UI"/>
+              </a:rPr>
+              <a:t>0.3254</a:t>
+            </a:r>
+          </a:p>
+        </p:txBody>
+      </p:sp>
+      <p:sp>
+        <p:nvSpPr>
+          <p:cNvPr id="13" name="TextBox 12"/>
+          <p:cNvSpPr txBox="1"/>
+          <p:nvPr/>
+        </p:nvSpPr>
+        <p:spPr>
+          <a:xfrm>
+            <a:off x="5303520" y="2020824"/>
+            <a:ext cx="2048255" cy="512064"/>
           </a:xfrm>
           <a:prstGeom prst="rect">
             <a:avLst/>
@@ -4974,27 +5028,27 @@
           <a:p>
             <a:pPr algn="ctr"/>
             <a:r>
-              <a:rPr sz="1350" b="0" i="0">
+              <a:rPr sz="1400" b="0" i="0">
                 <a:solidFill>
                   <a:srgbClr val="334155"/>
                 </a:solidFill>
                 <a:latin typeface="Segoe UI"/>
               </a:rPr>
-              <a:t>0.3254</a:t>
-            </a:r>
-          </a:p>
-        </p:txBody>
-      </p:sp>
-      <p:sp>
-        <p:nvSpPr>
-          <p:cNvPr id="13" name="TextBox 12"/>
-          <p:cNvSpPr txBox="1"/>
-          <p:nvPr/>
-        </p:nvSpPr>
-        <p:spPr>
-          <a:xfrm>
-            <a:off x="5303520" y="2029968"/>
-            <a:ext cx="2048255" cy="457200"/>
+              <a:t>0.4141</a:t>
+            </a:r>
+          </a:p>
+        </p:txBody>
+      </p:sp>
+      <p:sp>
+        <p:nvSpPr>
+          <p:cNvPr id="14" name="TextBox 13"/>
+          <p:cNvSpPr txBox="1"/>
+          <p:nvPr/>
+        </p:nvSpPr>
+        <p:spPr>
+          <a:xfrm>
+            <a:off x="7498080" y="2020824"/>
+            <a:ext cx="2048255" cy="512064"/>
           </a:xfrm>
           <a:prstGeom prst="rect">
             <a:avLst/>
@@ -5009,27 +5063,27 @@
           <a:p>
             <a:pPr algn="ctr"/>
             <a:r>
-              <a:rPr sz="1350" b="0" i="0">
+              <a:rPr sz="1400" b="0" i="0">
                 <a:solidFill>
                   <a:srgbClr val="334155"/>
                 </a:solidFill>
                 <a:latin typeface="Segoe UI"/>
               </a:rPr>
-              <a:t>0.4141</a:t>
-            </a:r>
-          </a:p>
-        </p:txBody>
-      </p:sp>
-      <p:sp>
-        <p:nvSpPr>
-          <p:cNvPr id="14" name="TextBox 13"/>
-          <p:cNvSpPr txBox="1"/>
-          <p:nvPr/>
-        </p:nvSpPr>
-        <p:spPr>
-          <a:xfrm>
-            <a:off x="7498080" y="2029968"/>
-            <a:ext cx="2048255" cy="457200"/>
+              <a:t>+8.9 pp</a:t>
+            </a:r>
+          </a:p>
+        </p:txBody>
+      </p:sp>
+      <p:sp>
+        <p:nvSpPr>
+          <p:cNvPr id="15" name="TextBox 14"/>
+          <p:cNvSpPr txBox="1"/>
+          <p:nvPr/>
+        </p:nvSpPr>
+        <p:spPr>
+          <a:xfrm>
+            <a:off x="9692640" y="2020824"/>
+            <a:ext cx="1773936" cy="512064"/>
           </a:xfrm>
           <a:prstGeom prst="rect">
             <a:avLst/>
@@ -5044,48 +5098,13 @@
           <a:p>
             <a:pPr algn="ctr"/>
             <a:r>
-              <a:rPr sz="1350" b="0" i="0">
+              <a:rPr sz="1400" b="0" i="0">
                 <a:solidFill>
                   <a:srgbClr val="334155"/>
                 </a:solidFill>
                 <a:latin typeface="Segoe UI"/>
               </a:rPr>
-              <a:t>+8.9 pp</a:t>
-            </a:r>
-          </a:p>
-        </p:txBody>
-      </p:sp>
-      <p:sp>
-        <p:nvSpPr>
-          <p:cNvPr id="15" name="TextBox 14"/>
-          <p:cNvSpPr txBox="1"/>
-          <p:nvPr/>
-        </p:nvSpPr>
-        <p:spPr>
-          <a:xfrm>
-            <a:off x="9692640" y="2029968"/>
-            <a:ext cx="1773936" cy="457200"/>
-          </a:xfrm>
-          <a:prstGeom prst="rect">
-            <a:avLst/>
-          </a:prstGeom>
-          <a:noFill/>
-        </p:spPr>
-        <p:txBody>
-          <a:bodyPr wrap="square" anchor="ctr" lIns="0" rIns="0" tIns="25400" bIns="25400">
-            <a:spAutoFit/>
-          </a:bodyPr>
-          <a:lstStyle/>
-          <a:p>
-            <a:pPr algn="ctr"/>
-            <a:r>
-              <a:rPr sz="1350" b="0" i="0">
-                <a:solidFill>
-                  <a:srgbClr val="334155"/>
-                </a:solidFill>
-                <a:latin typeface="Segoe UI"/>
-              </a:rPr>
-              <a:t>+1.35 pp ✅</a:t>
+              <a:t>+1.35 ✅</a:t>
             </a:r>
           </a:p>
         </p:txBody>
@@ -5098,12 +5117,12 @@
         </p:nvSpPr>
         <p:spPr>
           <a:xfrm>
-            <a:off x="475488" y="2542032"/>
-            <a:ext cx="11064240" cy="457200"/>
+            <a:off x="475488" y="2532888"/>
+            <a:ext cx="11064240" cy="512064"/>
           </a:xfrm>
           <a:prstGeom prst="roundRect">
             <a:avLst>
-              <a:gd name="adj" fmla="val 4000"/>
+              <a:gd name="adj" fmla="val 3000"/>
             </a:avLst>
           </a:prstGeom>
           <a:solidFill>
@@ -5146,8 +5165,8 @@
         </p:nvSpPr>
         <p:spPr>
           <a:xfrm>
-            <a:off x="548640" y="2542032"/>
-            <a:ext cx="2596896" cy="457200"/>
+            <a:off x="548640" y="2532888"/>
+            <a:ext cx="2596896" cy="512064"/>
           </a:xfrm>
           <a:prstGeom prst="rect">
             <a:avLst/>
@@ -5162,11 +5181,11 @@
           <a:p>
             <a:pPr algn="ctr"/>
             <a:r>
-              <a:rPr sz="1350" b="1" i="0">
-                <a:solidFill>
-                  <a:srgbClr val="047857"/>
-                </a:solidFill>
-                <a:latin typeface="Consolas"/>
+              <a:rPr sz="1400" b="1" i="0">
+                <a:solidFill>
+                  <a:srgbClr val="0F172A"/>
+                </a:solidFill>
+                <a:latin typeface="Segoe UI"/>
               </a:rPr>
               <a:t>rus_restaurant</a:t>
             </a:r>
@@ -5181,8 +5200,8 @@
         </p:nvSpPr>
         <p:spPr>
           <a:xfrm>
-            <a:off x="3291840" y="2542032"/>
-            <a:ext cx="1865376" cy="457200"/>
+            <a:off x="3291840" y="2532888"/>
+            <a:ext cx="1865376" cy="512064"/>
           </a:xfrm>
           <a:prstGeom prst="rect">
             <a:avLst/>
@@ -5197,7 +5216,7 @@
           <a:p>
             <a:pPr algn="ctr"/>
             <a:r>
-              <a:rPr sz="1350" b="0" i="0">
+              <a:rPr sz="1400" b="0" i="0">
                 <a:solidFill>
                   <a:srgbClr val="334155"/>
                 </a:solidFill>
@@ -5216,8 +5235,8 @@
         </p:nvSpPr>
         <p:spPr>
           <a:xfrm>
-            <a:off x="5303520" y="2542032"/>
-            <a:ext cx="2048255" cy="457200"/>
+            <a:off x="5303520" y="2532888"/>
+            <a:ext cx="2048255" cy="512064"/>
           </a:xfrm>
           <a:prstGeom prst="rect">
             <a:avLst/>
@@ -5232,7 +5251,7 @@
           <a:p>
             <a:pPr algn="ctr"/>
             <a:r>
-              <a:rPr sz="1350" b="0" i="0">
+              <a:rPr sz="1400" b="0" i="0">
                 <a:solidFill>
                   <a:srgbClr val="334155"/>
                 </a:solidFill>
@@ -5251,8 +5270,8 @@
         </p:nvSpPr>
         <p:spPr>
           <a:xfrm>
-            <a:off x="7498080" y="2542032"/>
-            <a:ext cx="2048255" cy="457200"/>
+            <a:off x="7498080" y="2532888"/>
+            <a:ext cx="2048255" cy="512064"/>
           </a:xfrm>
           <a:prstGeom prst="rect">
             <a:avLst/>
@@ -5267,7 +5286,7 @@
           <a:p>
             <a:pPr algn="ctr"/>
             <a:r>
-              <a:rPr sz="1350" b="0" i="0">
+              <a:rPr sz="1400" b="0" i="0">
                 <a:solidFill>
                   <a:srgbClr val="334155"/>
                 </a:solidFill>
@@ -5286,8 +5305,8 @@
         </p:nvSpPr>
         <p:spPr>
           <a:xfrm>
-            <a:off x="9692640" y="2542032"/>
-            <a:ext cx="1773936" cy="457200"/>
+            <a:off x="9692640" y="2532888"/>
+            <a:ext cx="1773936" cy="512064"/>
           </a:xfrm>
           <a:prstGeom prst="rect">
             <a:avLst/>
@@ -5302,13 +5321,13 @@
           <a:p>
             <a:pPr algn="ctr"/>
             <a:r>
-              <a:rPr sz="1350" b="0" i="0">
+              <a:rPr sz="1400" b="0" i="0">
                 <a:solidFill>
                   <a:srgbClr val="334155"/>
                 </a:solidFill>
                 <a:latin typeface="Segoe UI"/>
               </a:rPr>
-              <a:t>+1.54 pp ✅</a:t>
+              <a:t>+1.54 ✅</a:t>
             </a:r>
           </a:p>
         </p:txBody>
@@ -5321,67 +5340,12 @@
         </p:nvSpPr>
         <p:spPr>
           <a:xfrm>
-            <a:off x="10378440" y="2624328"/>
-            <a:ext cx="1234440" cy="292608"/>
+            <a:off x="475488" y="3044952"/>
+            <a:ext cx="11064240" cy="512064"/>
           </a:xfrm>
           <a:prstGeom prst="roundRect">
             <a:avLst>
-              <a:gd name="adj" fmla="val 50000"/>
-            </a:avLst>
-          </a:prstGeom>
-          <a:solidFill>
-            <a:srgbClr val="10B981"/>
-          </a:solidFill>
-          <a:ln>
-            <a:noFill/>
-          </a:ln>
-          <a:effectLst/>
-        </p:spPr>
-        <p:style>
-          <a:lnRef idx="1">
-            <a:schemeClr val="accent1"/>
-          </a:lnRef>
-          <a:fillRef idx="3">
-            <a:schemeClr val="accent1"/>
-          </a:fillRef>
-          <a:effectRef idx="2">
-            <a:schemeClr val="accent1"/>
-          </a:effectRef>
-          <a:fontRef idx="minor">
-            <a:schemeClr val="lt1"/>
-          </a:fontRef>
-        </p:style>
-        <p:txBody>
-          <a:bodyPr rtlCol="0" anchor="ctr" wrap="none" lIns="0" rIns="0" tIns="0" bIns="0"/>
-          <a:lstStyle/>
-          <a:p>
-            <a:pPr algn="ctr"/>
-            <a:r>
-              <a:rPr sz="900" b="1" spc="80">
-                <a:solidFill>
-                  <a:srgbClr val="FFFFFF"/>
-                </a:solidFill>
-                <a:latin typeface="Segoe UI"/>
-              </a:rPr>
-              <a:t>THIS ABLATION</a:t>
-            </a:r>
-          </a:p>
-        </p:txBody>
-      </p:sp>
-      <p:sp>
-        <p:nvSpPr>
-          <p:cNvPr id="23" name="Rounded Rectangle 22"/>
-          <p:cNvSpPr/>
-          <p:nvPr/>
-        </p:nvSpPr>
-        <p:spPr>
-          <a:xfrm>
-            <a:off x="475488" y="3054096"/>
-            <a:ext cx="11064240" cy="457200"/>
-          </a:xfrm>
-          <a:prstGeom prst="roundRect">
-            <a:avLst>
-              <a:gd name="adj" fmla="val 4000"/>
+              <a:gd name="adj" fmla="val 3000"/>
             </a:avLst>
           </a:prstGeom>
           <a:solidFill>
@@ -5418,14 +5382,49 @@
       </p:sp>
       <p:sp>
         <p:nvSpPr>
+          <p:cNvPr id="23" name="TextBox 22"/>
+          <p:cNvSpPr txBox="1"/>
+          <p:nvPr/>
+        </p:nvSpPr>
+        <p:spPr>
+          <a:xfrm>
+            <a:off x="548640" y="3044952"/>
+            <a:ext cx="2596896" cy="512064"/>
+          </a:xfrm>
+          <a:prstGeom prst="rect">
+            <a:avLst/>
+          </a:prstGeom>
+          <a:noFill/>
+        </p:spPr>
+        <p:txBody>
+          <a:bodyPr wrap="square" anchor="ctr" lIns="0" rIns="0" tIns="25400" bIns="25400">
+            <a:spAutoFit/>
+          </a:bodyPr>
+          <a:lstStyle/>
+          <a:p>
+            <a:pPr algn="ctr"/>
+            <a:r>
+              <a:rPr sz="1400" b="1" i="0">
+                <a:solidFill>
+                  <a:srgbClr val="0F172A"/>
+                </a:solidFill>
+                <a:latin typeface="Segoe UI"/>
+              </a:rPr>
+              <a:t>ukr_restaurant</a:t>
+            </a:r>
+          </a:p>
+        </p:txBody>
+      </p:sp>
+      <p:sp>
+        <p:nvSpPr>
           <p:cNvPr id="24" name="TextBox 23"/>
           <p:cNvSpPr txBox="1"/>
           <p:nvPr/>
         </p:nvSpPr>
         <p:spPr>
           <a:xfrm>
-            <a:off x="548640" y="3054096"/>
-            <a:ext cx="2596896" cy="457200"/>
+            <a:off x="3291840" y="3044952"/>
+            <a:ext cx="1865376" cy="512064"/>
           </a:xfrm>
           <a:prstGeom prst="rect">
             <a:avLst/>
@@ -5440,13 +5439,13 @@
           <a:p>
             <a:pPr algn="ctr"/>
             <a:r>
-              <a:rPr sz="1350" b="0" i="0">
+              <a:rPr sz="1400" b="0" i="0">
                 <a:solidFill>
                   <a:srgbClr val="334155"/>
                 </a:solidFill>
-                <a:latin typeface="Consolas"/>
-              </a:rPr>
-              <a:t>ukr_restaurant</a:t>
+                <a:latin typeface="Segoe UI"/>
+              </a:rPr>
+              <a:t>0.5068</a:t>
             </a:r>
           </a:p>
         </p:txBody>
@@ -5459,8 +5458,8 @@
         </p:nvSpPr>
         <p:spPr>
           <a:xfrm>
-            <a:off x="3291840" y="3054096"/>
-            <a:ext cx="1865376" cy="457200"/>
+            <a:off x="5303520" y="3044952"/>
+            <a:ext cx="2048255" cy="512064"/>
           </a:xfrm>
           <a:prstGeom prst="rect">
             <a:avLst/>
@@ -5475,13 +5474,13 @@
           <a:p>
             <a:pPr algn="ctr"/>
             <a:r>
-              <a:rPr sz="1350" b="0" i="0">
+              <a:rPr sz="1400" b="0" i="0">
                 <a:solidFill>
                   <a:srgbClr val="334155"/>
                 </a:solidFill>
                 <a:latin typeface="Segoe UI"/>
               </a:rPr>
-              <a:t>0.5068</a:t>
+              <a:t>0.5560</a:t>
             </a:r>
           </a:p>
         </p:txBody>
@@ -5494,8 +5493,8 @@
         </p:nvSpPr>
         <p:spPr>
           <a:xfrm>
-            <a:off x="5303520" y="3054096"/>
-            <a:ext cx="2048255" cy="457200"/>
+            <a:off x="7498080" y="3044952"/>
+            <a:ext cx="2048255" cy="512064"/>
           </a:xfrm>
           <a:prstGeom prst="rect">
             <a:avLst/>
@@ -5510,13 +5509,13 @@
           <a:p>
             <a:pPr algn="ctr"/>
             <a:r>
-              <a:rPr sz="1350" b="0" i="0">
+              <a:rPr sz="1400" b="0" i="0">
                 <a:solidFill>
                   <a:srgbClr val="334155"/>
                 </a:solidFill>
                 <a:latin typeface="Segoe UI"/>
               </a:rPr>
-              <a:t>0.5560</a:t>
+              <a:t>+4.9 pp</a:t>
             </a:r>
           </a:p>
         </p:txBody>
@@ -5529,8 +5528,8 @@
         </p:nvSpPr>
         <p:spPr>
           <a:xfrm>
-            <a:off x="7498080" y="3054096"/>
-            <a:ext cx="2048255" cy="457200"/>
+            <a:off x="9692640" y="3044952"/>
+            <a:ext cx="1773936" cy="512064"/>
           </a:xfrm>
           <a:prstGeom prst="rect">
             <a:avLst/>
@@ -5545,66 +5544,31 @@
           <a:p>
             <a:pPr algn="ctr"/>
             <a:r>
-              <a:rPr sz="1350" b="0" i="0">
+              <a:rPr sz="1400" b="0" i="0">
                 <a:solidFill>
                   <a:srgbClr val="334155"/>
                 </a:solidFill>
                 <a:latin typeface="Segoe UI"/>
               </a:rPr>
-              <a:t>+4.9 pp</a:t>
-            </a:r>
-          </a:p>
-        </p:txBody>
-      </p:sp>
-      <p:sp>
-        <p:nvSpPr>
-          <p:cNvPr id="28" name="TextBox 27"/>
-          <p:cNvSpPr txBox="1"/>
-          <p:nvPr/>
-        </p:nvSpPr>
-        <p:spPr>
-          <a:xfrm>
-            <a:off x="9692640" y="3054096"/>
-            <a:ext cx="1773936" cy="457200"/>
-          </a:xfrm>
-          <a:prstGeom prst="rect">
-            <a:avLst/>
-          </a:prstGeom>
-          <a:noFill/>
-        </p:spPr>
-        <p:txBody>
-          <a:bodyPr wrap="square" anchor="ctr" lIns="0" rIns="0" tIns="25400" bIns="25400">
-            <a:spAutoFit/>
-          </a:bodyPr>
-          <a:lstStyle/>
-          <a:p>
-            <a:pPr algn="ctr"/>
-            <a:r>
-              <a:rPr sz="1350" b="0" i="0">
-                <a:solidFill>
-                  <a:srgbClr val="334155"/>
-                </a:solidFill>
-                <a:latin typeface="Segoe UI"/>
-              </a:rPr>
-              <a:t>+1.23 pp ✅</a:t>
-            </a:r>
-          </a:p>
-        </p:txBody>
-      </p:sp>
-      <p:sp>
-        <p:nvSpPr>
-          <p:cNvPr id="29" name="Rounded Rectangle 28"/>
+              <a:t>+1.23 ✅</a:t>
+            </a:r>
+          </a:p>
+        </p:txBody>
+      </p:sp>
+      <p:sp>
+        <p:nvSpPr>
+          <p:cNvPr id="28" name="Rounded Rectangle 27"/>
           <p:cNvSpPr/>
           <p:nvPr/>
         </p:nvSpPr>
         <p:spPr>
           <a:xfrm>
-            <a:off x="475488" y="3566160"/>
-            <a:ext cx="11064240" cy="457200"/>
+            <a:off x="475488" y="3557016"/>
+            <a:ext cx="11064240" cy="512064"/>
           </a:xfrm>
           <a:prstGeom prst="roundRect">
             <a:avLst>
-              <a:gd name="adj" fmla="val 4000"/>
+              <a:gd name="adj" fmla="val 3000"/>
             </a:avLst>
           </a:prstGeom>
           <a:solidFill>
@@ -5641,14 +5605,49 @@
       </p:sp>
       <p:sp>
         <p:nvSpPr>
+          <p:cNvPr id="29" name="TextBox 28"/>
+          <p:cNvSpPr txBox="1"/>
+          <p:nvPr/>
+        </p:nvSpPr>
+        <p:spPr>
+          <a:xfrm>
+            <a:off x="548640" y="3557016"/>
+            <a:ext cx="2596896" cy="512064"/>
+          </a:xfrm>
+          <a:prstGeom prst="rect">
+            <a:avLst/>
+          </a:prstGeom>
+          <a:noFill/>
+        </p:spPr>
+        <p:txBody>
+          <a:bodyPr wrap="square" anchor="ctr" lIns="0" rIns="0" tIns="25400" bIns="25400">
+            <a:spAutoFit/>
+          </a:bodyPr>
+          <a:lstStyle/>
+          <a:p>
+            <a:pPr algn="ctr"/>
+            <a:r>
+              <a:rPr sz="1400" b="1" i="0">
+                <a:solidFill>
+                  <a:srgbClr val="0F172A"/>
+                </a:solidFill>
+                <a:latin typeface="Segoe UI"/>
+              </a:rPr>
+              <a:t>zho_restaurant</a:t>
+            </a:r>
+          </a:p>
+        </p:txBody>
+      </p:sp>
+      <p:sp>
+        <p:nvSpPr>
           <p:cNvPr id="30" name="TextBox 29"/>
           <p:cNvSpPr txBox="1"/>
           <p:nvPr/>
         </p:nvSpPr>
         <p:spPr>
           <a:xfrm>
-            <a:off x="548640" y="3566160"/>
-            <a:ext cx="2596896" cy="457200"/>
+            <a:off x="3291840" y="3557016"/>
+            <a:ext cx="1865376" cy="512064"/>
           </a:xfrm>
           <a:prstGeom prst="rect">
             <a:avLst/>
@@ -5663,13 +5662,13 @@
           <a:p>
             <a:pPr algn="ctr"/>
             <a:r>
-              <a:rPr sz="1350" b="0" i="0">
+              <a:rPr sz="1400" b="0" i="0">
                 <a:solidFill>
                   <a:srgbClr val="334155"/>
                 </a:solidFill>
-                <a:latin typeface="Consolas"/>
-              </a:rPr>
-              <a:t>zho_restaurant</a:t>
+                <a:latin typeface="Segoe UI"/>
+              </a:rPr>
+              <a:t>0.4745</a:t>
             </a:r>
           </a:p>
         </p:txBody>
@@ -5682,8 +5681,8 @@
         </p:nvSpPr>
         <p:spPr>
           <a:xfrm>
-            <a:off x="3291840" y="3566160"/>
-            <a:ext cx="1865376" cy="457200"/>
+            <a:off x="5303520" y="3557016"/>
+            <a:ext cx="2048255" cy="512064"/>
           </a:xfrm>
           <a:prstGeom prst="rect">
             <a:avLst/>
@@ -5698,13 +5697,13 @@
           <a:p>
             <a:pPr algn="ctr"/>
             <a:r>
-              <a:rPr sz="1350" b="0" i="0">
+              <a:rPr sz="1400" b="0" i="0">
                 <a:solidFill>
                   <a:srgbClr val="334155"/>
                 </a:solidFill>
                 <a:latin typeface="Segoe UI"/>
               </a:rPr>
-              <a:t>0.4745</a:t>
+              <a:t>0.5351</a:t>
             </a:r>
           </a:p>
         </p:txBody>
@@ -5717,8 +5716,8 @@
         </p:nvSpPr>
         <p:spPr>
           <a:xfrm>
-            <a:off x="5303520" y="3566160"/>
-            <a:ext cx="2048255" cy="457200"/>
+            <a:off x="7498080" y="3557016"/>
+            <a:ext cx="2048255" cy="512064"/>
           </a:xfrm>
           <a:prstGeom prst="rect">
             <a:avLst/>
@@ -5733,13 +5732,13 @@
           <a:p>
             <a:pPr algn="ctr"/>
             <a:r>
-              <a:rPr sz="1350" b="0" i="0">
+              <a:rPr sz="1400" b="0" i="0">
                 <a:solidFill>
                   <a:srgbClr val="334155"/>
                 </a:solidFill>
                 <a:latin typeface="Segoe UI"/>
               </a:rPr>
-              <a:t>0.5351</a:t>
+              <a:t>+6.1 pp</a:t>
             </a:r>
           </a:p>
         </p:txBody>
@@ -5752,8 +5751,8 @@
         </p:nvSpPr>
         <p:spPr>
           <a:xfrm>
-            <a:off x="7498080" y="3566160"/>
-            <a:ext cx="2048255" cy="457200"/>
+            <a:off x="9692640" y="3557016"/>
+            <a:ext cx="1773936" cy="512064"/>
           </a:xfrm>
           <a:prstGeom prst="rect">
             <a:avLst/>
@@ -5768,47 +5767,12 @@
           <a:p>
             <a:pPr algn="ctr"/>
             <a:r>
-              <a:rPr sz="1350" b="0" i="0">
+              <a:rPr sz="1400" b="0" i="0">
                 <a:solidFill>
                   <a:srgbClr val="334155"/>
                 </a:solidFill>
                 <a:latin typeface="Segoe UI"/>
               </a:rPr>
-              <a:t>+6.1 pp</a:t>
-            </a:r>
-          </a:p>
-        </p:txBody>
-      </p:sp>
-      <p:sp>
-        <p:nvSpPr>
-          <p:cNvPr id="34" name="TextBox 33"/>
-          <p:cNvSpPr txBox="1"/>
-          <p:nvPr/>
-        </p:nvSpPr>
-        <p:spPr>
-          <a:xfrm>
-            <a:off x="9692640" y="3566160"/>
-            <a:ext cx="1773936" cy="457200"/>
-          </a:xfrm>
-          <a:prstGeom prst="rect">
-            <a:avLst/>
-          </a:prstGeom>
-          <a:noFill/>
-        </p:spPr>
-        <p:txBody>
-          <a:bodyPr wrap="square" anchor="ctr" lIns="0" rIns="0" tIns="25400" bIns="25400">
-            <a:spAutoFit/>
-          </a:bodyPr>
-          <a:lstStyle/>
-          <a:p>
-            <a:pPr algn="ctr"/>
-            <a:r>
-              <a:rPr sz="1350" b="0" i="0">
-                <a:solidFill>
-                  <a:srgbClr val="334155"/>
-                </a:solidFill>
-                <a:latin typeface="Segoe UI"/>
-              </a:rPr>
               <a:t>n/a</a:t>
             </a:r>
           </a:p>
@@ -5816,18 +5780,18 @@
       </p:sp>
       <p:sp>
         <p:nvSpPr>
-          <p:cNvPr id="35" name="Rounded Rectangle 34"/>
+          <p:cNvPr id="34" name="Rounded Rectangle 33"/>
           <p:cNvSpPr/>
           <p:nvPr/>
         </p:nvSpPr>
         <p:spPr>
           <a:xfrm>
-            <a:off x="475488" y="4078224"/>
-            <a:ext cx="11064240" cy="457200"/>
+            <a:off x="475488" y="4069080"/>
+            <a:ext cx="11064240" cy="512064"/>
           </a:xfrm>
           <a:prstGeom prst="roundRect">
             <a:avLst>
-              <a:gd name="adj" fmla="val 4000"/>
+              <a:gd name="adj" fmla="val 3000"/>
             </a:avLst>
           </a:prstGeom>
           <a:solidFill>
@@ -5864,14 +5828,49 @@
       </p:sp>
       <p:sp>
         <p:nvSpPr>
+          <p:cNvPr id="35" name="TextBox 34"/>
+          <p:cNvSpPr txBox="1"/>
+          <p:nvPr/>
+        </p:nvSpPr>
+        <p:spPr>
+          <a:xfrm>
+            <a:off x="548640" y="4069080"/>
+            <a:ext cx="2596896" cy="512064"/>
+          </a:xfrm>
+          <a:prstGeom prst="rect">
+            <a:avLst/>
+          </a:prstGeom>
+          <a:noFill/>
+        </p:spPr>
+        <p:txBody>
+          <a:bodyPr wrap="square" anchor="ctr" lIns="0" rIns="0" tIns="25400" bIns="25400">
+            <a:spAutoFit/>
+          </a:bodyPr>
+          <a:lstStyle/>
+          <a:p>
+            <a:pPr algn="ctr"/>
+            <a:r>
+              <a:rPr sz="1400" b="1" i="0">
+                <a:solidFill>
+                  <a:srgbClr val="0F172A"/>
+                </a:solidFill>
+                <a:latin typeface="Segoe UI"/>
+              </a:rPr>
+              <a:t>tat_restaurant</a:t>
+            </a:r>
+          </a:p>
+        </p:txBody>
+      </p:sp>
+      <p:sp>
+        <p:nvSpPr>
           <p:cNvPr id="36" name="TextBox 35"/>
           <p:cNvSpPr txBox="1"/>
           <p:nvPr/>
         </p:nvSpPr>
         <p:spPr>
           <a:xfrm>
-            <a:off x="548640" y="4078224"/>
-            <a:ext cx="2596896" cy="457200"/>
+            <a:off x="3291840" y="4069080"/>
+            <a:ext cx="1865376" cy="512064"/>
           </a:xfrm>
           <a:prstGeom prst="rect">
             <a:avLst/>
@@ -5886,13 +5885,13 @@
           <a:p>
             <a:pPr algn="ctr"/>
             <a:r>
-              <a:rPr sz="1350" b="0" i="0">
+              <a:rPr sz="1400" b="0" i="0">
                 <a:solidFill>
                   <a:srgbClr val="334155"/>
                 </a:solidFill>
-                <a:latin typeface="Consolas"/>
-              </a:rPr>
-              <a:t>tat_restaurant</a:t>
+                <a:latin typeface="Segoe UI"/>
+              </a:rPr>
+              <a:t>0.4821</a:t>
             </a:r>
           </a:p>
         </p:txBody>
@@ -5905,8 +5904,8 @@
         </p:nvSpPr>
         <p:spPr>
           <a:xfrm>
-            <a:off x="3291840" y="4078224"/>
-            <a:ext cx="1865376" cy="457200"/>
+            <a:off x="5303520" y="4069080"/>
+            <a:ext cx="2048255" cy="512064"/>
           </a:xfrm>
           <a:prstGeom prst="rect">
             <a:avLst/>
@@ -5921,13 +5920,13 @@
           <a:p>
             <a:pPr algn="ctr"/>
             <a:r>
-              <a:rPr sz="1350" b="0" i="0">
+              <a:rPr sz="1400" b="0" i="0">
                 <a:solidFill>
                   <a:srgbClr val="334155"/>
                 </a:solidFill>
                 <a:latin typeface="Segoe UI"/>
               </a:rPr>
-              <a:t>0.4821</a:t>
+              <a:t>0.5327*</a:t>
             </a:r>
           </a:p>
         </p:txBody>
@@ -5940,8 +5939,8 @@
         </p:nvSpPr>
         <p:spPr>
           <a:xfrm>
-            <a:off x="5303520" y="4078224"/>
-            <a:ext cx="2048255" cy="457200"/>
+            <a:off x="7498080" y="4069080"/>
+            <a:ext cx="2048255" cy="512064"/>
           </a:xfrm>
           <a:prstGeom prst="rect">
             <a:avLst/>
@@ -5956,13 +5955,13 @@
           <a:p>
             <a:pPr algn="ctr"/>
             <a:r>
-              <a:rPr sz="1350" b="0" i="0">
+              <a:rPr sz="1400" b="0" i="0">
                 <a:solidFill>
                   <a:srgbClr val="334155"/>
                 </a:solidFill>
                 <a:latin typeface="Segoe UI"/>
               </a:rPr>
-              <a:t>0.5327*</a:t>
+              <a:t>+5.1 pp</a:t>
             </a:r>
           </a:p>
         </p:txBody>
@@ -5975,8 +5974,8 @@
         </p:nvSpPr>
         <p:spPr>
           <a:xfrm>
-            <a:off x="7498080" y="4078224"/>
-            <a:ext cx="2048255" cy="457200"/>
+            <a:off x="9692640" y="4069080"/>
+            <a:ext cx="1773936" cy="512064"/>
           </a:xfrm>
           <a:prstGeom prst="rect">
             <a:avLst/>
@@ -5991,47 +5990,12 @@
           <a:p>
             <a:pPr algn="ctr"/>
             <a:r>
-              <a:rPr sz="1350" b="0" i="0">
+              <a:rPr sz="1400" b="0" i="0">
                 <a:solidFill>
                   <a:srgbClr val="334155"/>
                 </a:solidFill>
                 <a:latin typeface="Segoe UI"/>
               </a:rPr>
-              <a:t>+5.1 pp</a:t>
-            </a:r>
-          </a:p>
-        </p:txBody>
-      </p:sp>
-      <p:sp>
-        <p:nvSpPr>
-          <p:cNvPr id="40" name="TextBox 39"/>
-          <p:cNvSpPr txBox="1"/>
-          <p:nvPr/>
-        </p:nvSpPr>
-        <p:spPr>
-          <a:xfrm>
-            <a:off x="9692640" y="4078224"/>
-            <a:ext cx="1773936" cy="457200"/>
-          </a:xfrm>
-          <a:prstGeom prst="rect">
-            <a:avLst/>
-          </a:prstGeom>
-          <a:noFill/>
-        </p:spPr>
-        <p:txBody>
-          <a:bodyPr wrap="square" anchor="ctr" lIns="0" rIns="0" tIns="25400" bIns="25400">
-            <a:spAutoFit/>
-          </a:bodyPr>
-          <a:lstStyle/>
-          <a:p>
-            <a:pPr algn="ctr"/>
-            <a:r>
-              <a:rPr sz="1350" b="0" i="0">
-                <a:solidFill>
-                  <a:srgbClr val="334155"/>
-                </a:solidFill>
-                <a:latin typeface="Segoe UI"/>
-              </a:rPr>
               <a:t>n/a</a:t>
             </a:r>
           </a:p>
@@ -6039,22 +6003,22 @@
       </p:sp>
       <p:sp>
         <p:nvSpPr>
-          <p:cNvPr id="41" name="Rounded Rectangle 40"/>
+          <p:cNvPr id="40" name="Rounded Rectangle 39"/>
           <p:cNvSpPr/>
           <p:nvPr/>
         </p:nvSpPr>
         <p:spPr>
           <a:xfrm>
-            <a:off x="475488" y="4892040"/>
-            <a:ext cx="11064240" cy="1234440"/>
+            <a:off x="10424160" y="2633472"/>
+            <a:ext cx="1234440" cy="310896"/>
           </a:xfrm>
           <a:prstGeom prst="roundRect">
             <a:avLst>
-              <a:gd name="adj" fmla="val 6000"/>
+              <a:gd name="adj" fmla="val 50000"/>
             </a:avLst>
           </a:prstGeom>
           <a:solidFill>
-            <a:srgbClr val="DEEAFB"/>
+            <a:srgbClr val="10B981"/>
           </a:solidFill>
           <a:ln>
             <a:noFill/>
@@ -6076,67 +6040,32 @@
           </a:fontRef>
         </p:style>
         <p:txBody>
-          <a:bodyPr rtlCol="0" anchor="ctr"/>
-          <a:lstStyle/>
-          <a:p>
-            <a:pPr algn="ctr"/>
-          </a:p>
-        </p:txBody>
-      </p:sp>
-      <p:sp>
-        <p:nvSpPr>
-          <p:cNvPr id="42" name="Rectangle 41"/>
-          <p:cNvSpPr/>
-          <p:nvPr/>
-        </p:nvSpPr>
-        <p:spPr>
-          <a:xfrm>
-            <a:off x="475488" y="4892040"/>
-            <a:ext cx="91440" cy="1234440"/>
-          </a:xfrm>
-          <a:prstGeom prst="rect">
-            <a:avLst/>
-          </a:prstGeom>
-          <a:solidFill>
-            <a:srgbClr val="3B82F6"/>
-          </a:solidFill>
-          <a:ln>
-            <a:noFill/>
-          </a:ln>
-          <a:effectLst/>
-        </p:spPr>
-        <p:style>
-          <a:lnRef idx="1">
-            <a:schemeClr val="accent1"/>
-          </a:lnRef>
-          <a:fillRef idx="3">
-            <a:schemeClr val="accent1"/>
-          </a:fillRef>
-          <a:effectRef idx="2">
-            <a:schemeClr val="accent1"/>
-          </a:effectRef>
-          <a:fontRef idx="minor">
-            <a:schemeClr val="lt1"/>
-          </a:fontRef>
-        </p:style>
-        <p:txBody>
-          <a:bodyPr rtlCol="0" anchor="ctr"/>
-          <a:lstStyle/>
-          <a:p>
-            <a:pPr algn="ctr"/>
-          </a:p>
-        </p:txBody>
-      </p:sp>
-      <p:sp>
-        <p:nvSpPr>
-          <p:cNvPr id="43" name="TextBox 42"/>
-          <p:cNvSpPr txBox="1"/>
-          <p:nvPr/>
-        </p:nvSpPr>
-        <p:spPr>
-          <a:xfrm>
-            <a:off x="676656" y="5010912"/>
-            <a:ext cx="2743200" cy="292608"/>
+          <a:bodyPr rtlCol="0" anchor="ctr" wrap="none" lIns="0" rIns="0" tIns="0" bIns="0"/>
+          <a:lstStyle/>
+          <a:p>
+            <a:pPr algn="ctr"/>
+            <a:r>
+              <a:rPr sz="900" b="1" spc="80">
+                <a:solidFill>
+                  <a:srgbClr val="FFFFFF"/>
+                </a:solidFill>
+                <a:latin typeface="Segoe UI"/>
+              </a:rPr>
+              <a:t>THIS ABLATION</a:t>
+            </a:r>
+          </a:p>
+        </p:txBody>
+      </p:sp>
+      <p:sp>
+        <p:nvSpPr>
+          <p:cNvPr id="41" name="TextBox 40"/>
+          <p:cNvSpPr txBox="1"/>
+          <p:nvPr/>
+        </p:nvSpPr>
+        <p:spPr>
+          <a:xfrm>
+            <a:off x="502920" y="4901183"/>
+            <a:ext cx="5486400" cy="411480"/>
           </a:xfrm>
           <a:prstGeom prst="rect">
             <a:avLst/>
@@ -6151,7 +6080,7 @@
           <a:p>
             <a:pPr algn="l"/>
             <a:r>
-              <a:rPr sz="1200" b="1" i="0" spc="100">
+              <a:rPr sz="1600" b="1" i="0">
                 <a:solidFill>
                   <a:srgbClr val="1D4ED8"/>
                 </a:solidFill>
@@ -6164,35 +6093,85 @@
       </p:sp>
       <p:sp>
         <p:nvSpPr>
-          <p:cNvPr id="44" name="TextBox 43"/>
-          <p:cNvSpPr txBox="1"/>
-          <p:nvPr/>
-        </p:nvSpPr>
-        <p:spPr>
-          <a:xfrm>
-            <a:off x="676656" y="5321808"/>
-            <a:ext cx="10881360" cy="731520"/>
-          </a:xfrm>
-          <a:prstGeom prst="rect">
-            <a:avLst/>
-          </a:prstGeom>
-          <a:noFill/>
-        </p:spPr>
-        <p:txBody>
-          <a:bodyPr wrap="square" lIns="0" rIns="0" tIns="25400" bIns="25400">
-            <a:spAutoFit/>
-          </a:bodyPr>
-          <a:lstStyle/>
-          <a:p>
-            <a:pPr algn="l"/>
-            <a:r>
-              <a:rPr sz="1400" b="0" i="0">
+          <p:cNvPr id="42" name="TextBox 41"/>
+          <p:cNvSpPr txBox="1"/>
+          <p:nvPr/>
+        </p:nvSpPr>
+        <p:spPr>
+          <a:xfrm>
+            <a:off x="502920" y="5358383"/>
+            <a:ext cx="10972800" cy="2743200"/>
+          </a:xfrm>
+          <a:prstGeom prst="rect">
+            <a:avLst/>
+          </a:prstGeom>
+          <a:noFill/>
+        </p:spPr>
+        <p:txBody>
+          <a:bodyPr wrap="square" lIns="0" rIns="0" tIns="0" bIns="0">
+            <a:spAutoFit/>
+          </a:bodyPr>
+          <a:lstStyle/>
+          <a:p>
+            <a:pPr>
+              <a:lnSpc>
+                <a:spcPct val="104000"/>
+              </a:lnSpc>
+              <a:spcBef>
+                <a:spcPts val="0"/>
+              </a:spcBef>
+              <a:spcAft>
+                <a:spcPts val="1000"/>
+              </a:spcAft>
+            </a:pPr>
+            <a:r>
+              <a:rPr sz="1600" b="1">
+                <a:solidFill>
+                  <a:srgbClr val="3B82F6"/>
+                </a:solidFill>
+                <a:latin typeface="Segoe UI"/>
+              </a:rPr>
+              <a:t>•  </a:t>
+            </a:r>
+            <a:r>
+              <a:rPr sz="1600" i="0" b="1">
                 <a:solidFill>
                   <a:srgbClr val="334155"/>
                 </a:solidFill>
                 <a:latin typeface="Segoe UI"/>
               </a:rPr>
-              <a:t>rus_restaurant is (1) confirmed KD-positive, so a pool-source effect is measurable against a real signal — not noise on a failed arm — and (2) high-resource enough that all three pool sources (real corpus, translation source, LLM generation) are simultaneously constructible.</a:t>
+              <a:t>KD confirmed positive (+4.9pp)</a:t>
+            </a:r>
+          </a:p>
+          <a:p>
+            <a:pPr>
+              <a:lnSpc>
+                <a:spcPct val="104000"/>
+              </a:lnSpc>
+              <a:spcBef>
+                <a:spcPts val="0"/>
+              </a:spcBef>
+              <a:spcAft>
+                <a:spcPts val="1000"/>
+              </a:spcAft>
+            </a:pPr>
+            <a:r>
+              <a:rPr sz="1600" b="1">
+                <a:solidFill>
+                  <a:srgbClr val="3B82F6"/>
+                </a:solidFill>
+                <a:latin typeface="Segoe UI"/>
+              </a:rPr>
+              <a:t>•  </a:t>
+            </a:r>
+            <a:r>
+              <a:rPr sz="1600" i="0" b="1">
+                <a:solidFill>
+                  <a:srgbClr val="334155"/>
+                </a:solidFill>
+                <a:latin typeface="Segoe UI"/>
+              </a:rPr>
+              <a:t>All 3 pool sources buildable (real / trans / gen)</a:t>
             </a:r>
           </a:p>
         </p:txBody>
@@ -6282,13 +6261,13 @@
           <a:p>
             <a:pPr algn="l"/>
             <a:r>
-              <a:rPr sz="2700" b="1" i="0">
+              <a:rPr sz="2600" b="1" i="0">
                 <a:solidFill>
                   <a:srgbClr val="0F172A"/>
                 </a:solidFill>
                 <a:latin typeface="Segoe UI"/>
               </a:rPr>
-              <a:t>“Real &gt; Translated &gt; Generated” — Evidence So Far Is Weak</a:t>
+              <a:t>“Real &gt; Translated &gt; Generated” — Evidence Is Weak</a:t>
             </a:r>
           </a:p>
         </p:txBody>
@@ -6301,8 +6280,8 @@
         </p:nvSpPr>
         <p:spPr>
           <a:xfrm>
-            <a:off x="475488" y="1481328"/>
-            <a:ext cx="11064240" cy="438912"/>
+            <a:off x="475488" y="1554480"/>
+            <a:ext cx="11064240" cy="420624"/>
           </a:xfrm>
           <a:prstGeom prst="roundRect">
             <a:avLst>
@@ -6347,8 +6326,8 @@
         </p:nvSpPr>
         <p:spPr>
           <a:xfrm>
-            <a:off x="566928" y="1536192"/>
-            <a:ext cx="2651760" cy="329184"/>
+            <a:off x="548640" y="1609344"/>
+            <a:ext cx="2688336" cy="310896"/>
           </a:xfrm>
           <a:prstGeom prst="rect">
             <a:avLst/>
@@ -6361,9 +6340,9 @@
           </a:bodyPr>
           <a:lstStyle/>
           <a:p>
-            <a:pPr algn="l"/>
-            <a:r>
-              <a:rPr sz="1200" b="1" i="0" spc="50">
+            <a:pPr algn="ctr"/>
+            <a:r>
+              <a:rPr sz="1200" b="1" i="0" spc="40">
                 <a:solidFill>
                   <a:srgbClr val="64748B"/>
                 </a:solidFill>
@@ -6382,8 +6361,8 @@
         </p:nvSpPr>
         <p:spPr>
           <a:xfrm>
-            <a:off x="3401568" y="1536192"/>
-            <a:ext cx="4023359" cy="329184"/>
+            <a:off x="3383280" y="1609344"/>
+            <a:ext cx="4059935" cy="310896"/>
           </a:xfrm>
           <a:prstGeom prst="rect">
             <a:avLst/>
@@ -6396,9 +6375,9 @@
           </a:bodyPr>
           <a:lstStyle/>
           <a:p>
-            <a:pPr algn="l"/>
-            <a:r>
-              <a:rPr sz="1200" b="1" i="0" spc="50">
+            <a:pPr algn="ctr"/>
+            <a:r>
+              <a:rPr sz="1200" b="1" i="0" spc="40">
                 <a:solidFill>
                   <a:srgbClr val="64748B"/>
                 </a:solidFill>
@@ -6417,8 +6396,8 @@
         </p:nvSpPr>
         <p:spPr>
           <a:xfrm>
-            <a:off x="7607807" y="1536192"/>
-            <a:ext cx="3840480" cy="329184"/>
+            <a:off x="7589519" y="1609344"/>
+            <a:ext cx="3877056" cy="310896"/>
           </a:xfrm>
           <a:prstGeom prst="rect">
             <a:avLst/>
@@ -6431,15 +6410,15 @@
           </a:bodyPr>
           <a:lstStyle/>
           <a:p>
-            <a:pPr algn="l"/>
-            <a:r>
-              <a:rPr sz="1200" b="1" i="0" spc="50">
+            <a:pPr algn="ctr"/>
+            <a:r>
+              <a:rPr sz="1200" b="1" i="0" spc="40">
                 <a:solidFill>
                   <a:srgbClr val="64748B"/>
                 </a:solidFill>
                 <a:latin typeface="Segoe UI"/>
               </a:rPr>
-              <a:t>PROBLEM</a:t>
+              <a:t>GAP</a:t>
             </a:r>
           </a:p>
         </p:txBody>
@@ -6452,16 +6431,16 @@
         </p:nvSpPr>
         <p:spPr>
           <a:xfrm>
-            <a:off x="475488" y="1993392"/>
+            <a:off x="475488" y="1975104"/>
             <a:ext cx="11064240" cy="822960"/>
           </a:xfrm>
           <a:prstGeom prst="roundRect">
             <a:avLst>
-              <a:gd name="adj" fmla="val 5000"/>
+              <a:gd name="adj" fmla="val 3000"/>
             </a:avLst>
           </a:prstGeom>
           <a:solidFill>
-            <a:srgbClr val="FEF3C7"/>
+            <a:srgbClr val="FFFFFF"/>
           </a:solidFill>
           <a:ln w="12700">
             <a:solidFill>
@@ -6500,8 +6479,8 @@
         </p:nvSpPr>
         <p:spPr>
           <a:xfrm>
-            <a:off x="585216" y="1993392"/>
-            <a:ext cx="2651760" cy="822960"/>
+            <a:off x="548640" y="1975104"/>
+            <a:ext cx="2688336" cy="822960"/>
           </a:xfrm>
           <a:prstGeom prst="rect">
             <a:avLst/>
@@ -6514,11 +6493,11 @@
           </a:bodyPr>
           <a:lstStyle/>
           <a:p>
-            <a:pPr algn="l"/>
-            <a:r>
-              <a:rPr sz="1400" b="1" i="0">
-                <a:solidFill>
-                  <a:srgbClr val="B45A09"/>
+            <a:pPr algn="ctr"/>
+            <a:r>
+              <a:rPr sz="1350" b="1" i="0">
+                <a:solidFill>
+                  <a:srgbClr val="0F172A"/>
                 </a:solidFill>
                 <a:latin typeface="Segoe UI"/>
               </a:rPr>
@@ -6535,8 +6514,8 @@
         </p:nvSpPr>
         <p:spPr>
           <a:xfrm>
-            <a:off x="3419856" y="1993392"/>
-            <a:ext cx="4023359" cy="822960"/>
+            <a:off x="3383280" y="1975104"/>
+            <a:ext cx="4059935" cy="822960"/>
           </a:xfrm>
           <a:prstGeom prst="rect">
             <a:avLst/>
@@ -6549,15 +6528,15 @@
           </a:bodyPr>
           <a:lstStyle/>
           <a:p>
-            <a:pPr algn="l"/>
-            <a:r>
-              <a:rPr sz="1250" b="0" i="0">
+            <a:pPr algn="ctr"/>
+            <a:r>
+              <a:rPr sz="1350" b="0" i="0">
                 <a:solidFill>
                   <a:srgbClr val="334155"/>
                 </a:solidFill>
                 <a:latin typeface="Segoe UI"/>
               </a:rPr>
-              <a:t>zho_restaurant: 0.5579 vs 0.5351 (+2.3 pp)</a:t>
+              <a:t>zho_restaurant: 0.5579 vs 0.5351</a:t>
             </a:r>
           </a:p>
         </p:txBody>
@@ -6570,8 +6549,8 @@
         </p:nvSpPr>
         <p:spPr>
           <a:xfrm>
-            <a:off x="7626095" y="1993392"/>
-            <a:ext cx="3840480" cy="822960"/>
+            <a:off x="7589519" y="1975104"/>
+            <a:ext cx="3877056" cy="822960"/>
           </a:xfrm>
           <a:prstGeom prst="rect">
             <a:avLst/>
@@ -6584,15 +6563,15 @@
           </a:bodyPr>
           <a:lstStyle/>
           <a:p>
-            <a:pPr algn="l"/>
-            <a:r>
-              <a:rPr sz="1250" b="0" i="1">
-                <a:solidFill>
-                  <a:srgbClr val="B45A09"/>
-                </a:solidFill>
-                <a:latin typeface="Segoe UI"/>
-              </a:rPr>
-              <a:t>n = 1, single dataset</a:t>
+            <a:pPr algn="ctr"/>
+            <a:r>
+              <a:rPr sz="1350" b="0" i="0">
+                <a:solidFill>
+                  <a:srgbClr val="334155"/>
+                </a:solidFill>
+                <a:latin typeface="Segoe UI"/>
+              </a:rPr>
+              <a:t>n = 1</a:t>
             </a:r>
           </a:p>
         </p:txBody>
@@ -6605,16 +6584,16 @@
         </p:nvSpPr>
         <p:spPr>
           <a:xfrm>
-            <a:off x="475488" y="2907792"/>
+            <a:off x="475488" y="2798064"/>
             <a:ext cx="11064240" cy="822960"/>
           </a:xfrm>
           <a:prstGeom prst="roundRect">
             <a:avLst>
-              <a:gd name="adj" fmla="val 5000"/>
+              <a:gd name="adj" fmla="val 3000"/>
             </a:avLst>
           </a:prstGeom>
           <a:solidFill>
-            <a:srgbClr val="FDE4E4"/>
+            <a:srgbClr val="FFFFFF"/>
           </a:solidFill>
           <a:ln w="12700">
             <a:solidFill>
@@ -6653,8 +6632,8 @@
         </p:nvSpPr>
         <p:spPr>
           <a:xfrm>
-            <a:off x="585216" y="2907792"/>
-            <a:ext cx="2651760" cy="822960"/>
+            <a:off x="548640" y="2798064"/>
+            <a:ext cx="2688336" cy="822960"/>
           </a:xfrm>
           <a:prstGeom prst="rect">
             <a:avLst/>
@@ -6667,11 +6646,11 @@
           </a:bodyPr>
           <a:lstStyle/>
           <a:p>
-            <a:pPr algn="l"/>
-            <a:r>
-              <a:rPr sz="1400" b="1" i="0">
-                <a:solidFill>
-                  <a:srgbClr val="DC2626"/>
+            <a:pPr algn="ctr"/>
+            <a:r>
+              <a:rPr sz="1350" b="1" i="0">
+                <a:solidFill>
+                  <a:srgbClr val="0F172A"/>
                 </a:solidFill>
                 <a:latin typeface="Segoe UI"/>
               </a:rPr>
@@ -6688,8 +6667,8 @@
         </p:nvSpPr>
         <p:spPr>
           <a:xfrm>
-            <a:off x="3419856" y="2907792"/>
-            <a:ext cx="4023359" cy="822960"/>
+            <a:off x="3383280" y="2798064"/>
+            <a:ext cx="4059935" cy="822960"/>
           </a:xfrm>
           <a:prstGeom prst="rect">
             <a:avLst/>
@@ -6702,15 +6681,15 @@
           </a:bodyPr>
           <a:lstStyle/>
           <a:p>
-            <a:pPr algn="l"/>
-            <a:r>
-              <a:rPr sz="1250" b="0" i="0">
+            <a:pPr algn="ctr"/>
+            <a:r>
+              <a:rPr sz="1350" b="0" i="0">
                 <a:solidFill>
                   <a:srgbClr val="334155"/>
                 </a:solidFill>
                 <a:latin typeface="Segoe UI"/>
               </a:rPr>
-              <a:t>ukr §5.29.1: 0.5560 vs 0.5446 (+1.1 pp)</a:t>
+              <a:t>ukr: 0.5560 vs 0.5446</a:t>
             </a:r>
           </a:p>
         </p:txBody>
@@ -6723,8 +6702,8 @@
         </p:nvSpPr>
         <p:spPr>
           <a:xfrm>
-            <a:off x="7626095" y="2907792"/>
-            <a:ext cx="3840480" cy="822960"/>
+            <a:off x="7589519" y="2798064"/>
+            <a:ext cx="3877056" cy="822960"/>
           </a:xfrm>
           <a:prstGeom prst="rect">
             <a:avLst/>
@@ -6737,15 +6716,15 @@
           </a:bodyPr>
           <a:lstStyle/>
           <a:p>
-            <a:pPr algn="l"/>
-            <a:r>
-              <a:rPr sz="1250" b="0" i="1">
-                <a:solidFill>
-                  <a:srgbClr val="DC2626"/>
-                </a:solidFill>
-                <a:latin typeface="Segoe UI"/>
-              </a:rPr>
-              <a:t>n = 1, AND pool size confound (6138 vs 3991 silver)</a:t>
+            <a:pPr algn="ctr"/>
+            <a:r>
+              <a:rPr sz="1350" b="0" i="0">
+                <a:solidFill>
+                  <a:srgbClr val="334155"/>
+                </a:solidFill>
+                <a:latin typeface="Segoe UI"/>
+              </a:rPr>
+              <a:t>n = 1 + size confound (6138 vs 3991)</a:t>
             </a:r>
           </a:p>
         </p:txBody>
@@ -6758,16 +6737,16 @@
         </p:nvSpPr>
         <p:spPr>
           <a:xfrm>
-            <a:off x="475488" y="3822191"/>
+            <a:off x="475488" y="3621024"/>
             <a:ext cx="11064240" cy="822960"/>
           </a:xfrm>
           <a:prstGeom prst="roundRect">
             <a:avLst>
-              <a:gd name="adj" fmla="val 5000"/>
+              <a:gd name="adj" fmla="val 3000"/>
             </a:avLst>
           </a:prstGeom>
           <a:solidFill>
-            <a:srgbClr val="FDE4E4"/>
+            <a:srgbClr val="FFFFFF"/>
           </a:solidFill>
           <a:ln w="12700">
             <a:solidFill>
@@ -6806,8 +6785,8 @@
         </p:nvSpPr>
         <p:spPr>
           <a:xfrm>
-            <a:off x="585216" y="3822191"/>
-            <a:ext cx="2651760" cy="822960"/>
+            <a:off x="548640" y="3621024"/>
+            <a:ext cx="2688336" cy="822960"/>
           </a:xfrm>
           <a:prstGeom prst="rect">
             <a:avLst/>
@@ -6820,245 +6799,236 @@
           </a:bodyPr>
           <a:lstStyle/>
           <a:p>
+            <a:pPr algn="ctr"/>
+            <a:r>
+              <a:rPr sz="1350" b="1" i="0">
+                <a:solidFill>
+                  <a:srgbClr val="0F172A"/>
+                </a:solidFill>
+                <a:latin typeface="Segoe UI"/>
+              </a:rPr>
+              <a:t>Real &gt; Translated</a:t>
+            </a:r>
+          </a:p>
+        </p:txBody>
+      </p:sp>
+      <p:sp>
+        <p:nvSpPr>
+          <p:cNvPr id="18" name="TextBox 17"/>
+          <p:cNvSpPr txBox="1"/>
+          <p:nvPr/>
+        </p:nvSpPr>
+        <p:spPr>
+          <a:xfrm>
+            <a:off x="3383280" y="3621024"/>
+            <a:ext cx="4059935" cy="822960"/>
+          </a:xfrm>
+          <a:prstGeom prst="rect">
+            <a:avLst/>
+          </a:prstGeom>
+          <a:noFill/>
+        </p:spPr>
+        <p:txBody>
+          <a:bodyPr wrap="square" anchor="ctr" lIns="0" rIns="0" tIns="25400" bIns="25400">
+            <a:spAutoFit/>
+          </a:bodyPr>
+          <a:lstStyle/>
+          <a:p>
+            <a:pPr algn="ctr"/>
+            <a:r>
+              <a:rPr sz="1350" b="0" i="0">
+                <a:solidFill>
+                  <a:srgbClr val="334155"/>
+                </a:solidFill>
+                <a:latin typeface="Segoe UI"/>
+              </a:rPr>
+              <a:t>never tested</a:t>
+            </a:r>
+          </a:p>
+        </p:txBody>
+      </p:sp>
+      <p:sp>
+        <p:nvSpPr>
+          <p:cNvPr id="19" name="TextBox 18"/>
+          <p:cNvSpPr txBox="1"/>
+          <p:nvPr/>
+        </p:nvSpPr>
+        <p:spPr>
+          <a:xfrm>
+            <a:off x="7589519" y="3621024"/>
+            <a:ext cx="3877056" cy="822960"/>
+          </a:xfrm>
+          <a:prstGeom prst="rect">
+            <a:avLst/>
+          </a:prstGeom>
+          <a:noFill/>
+        </p:spPr>
+        <p:txBody>
+          <a:bodyPr wrap="square" anchor="ctr" lIns="0" rIns="0" tIns="25400" bIns="25400">
+            <a:spAutoFit/>
+          </a:bodyPr>
+          <a:lstStyle/>
+          <a:p>
+            <a:pPr algn="ctr"/>
+            <a:r>
+              <a:rPr sz="1350" b="0" i="0">
+                <a:solidFill>
+                  <a:srgbClr val="334155"/>
+                </a:solidFill>
+                <a:latin typeface="Segoe UI"/>
+              </a:rPr>
+              <a:t>middle link missing</a:t>
+            </a:r>
+          </a:p>
+        </p:txBody>
+      </p:sp>
+      <p:sp>
+        <p:nvSpPr>
+          <p:cNvPr id="20" name="TextBox 19"/>
+          <p:cNvSpPr txBox="1"/>
+          <p:nvPr/>
+        </p:nvSpPr>
+        <p:spPr>
+          <a:xfrm>
+            <a:off x="502920" y="4764024"/>
+            <a:ext cx="10972800" cy="411480"/>
+          </a:xfrm>
+          <a:prstGeom prst="rect">
+            <a:avLst/>
+          </a:prstGeom>
+          <a:noFill/>
+        </p:spPr>
+        <p:txBody>
+          <a:bodyPr wrap="square" lIns="0" rIns="0" tIns="25400" bIns="25400">
+            <a:spAutoFit/>
+          </a:bodyPr>
+          <a:lstStyle/>
+          <a:p>
             <a:pPr algn="l"/>
             <a:r>
-              <a:rPr sz="1400" b="1" i="0">
+              <a:rPr sz="1600" b="1" i="0">
                 <a:solidFill>
                   <a:srgbClr val="DC2626"/>
                 </a:solidFill>
                 <a:latin typeface="Segoe UI"/>
               </a:rPr>
-              <a:t>Real &gt; Translated</a:t>
-            </a:r>
-          </a:p>
-        </p:txBody>
-      </p:sp>
-      <p:sp>
-        <p:nvSpPr>
-          <p:cNvPr id="18" name="TextBox 17"/>
-          <p:cNvSpPr txBox="1"/>
-          <p:nvPr/>
-        </p:nvSpPr>
-        <p:spPr>
-          <a:xfrm>
-            <a:off x="3419856" y="3822191"/>
-            <a:ext cx="4023359" cy="822960"/>
-          </a:xfrm>
-          <a:prstGeom prst="rect">
-            <a:avLst/>
-          </a:prstGeom>
-          <a:noFill/>
-        </p:spPr>
-        <p:txBody>
-          <a:bodyPr wrap="square" anchor="ctr" lIns="0" rIns="0" tIns="25400" bIns="25400">
-            <a:spAutoFit/>
-          </a:bodyPr>
-          <a:lstStyle/>
-          <a:p>
-            <a:pPr algn="l"/>
-            <a:r>
-              <a:rPr sz="1250" b="0" i="0">
+              <a:t>Needed</a:t>
+            </a:r>
+          </a:p>
+        </p:txBody>
+      </p:sp>
+      <p:sp>
+        <p:nvSpPr>
+          <p:cNvPr id="21" name="TextBox 20"/>
+          <p:cNvSpPr txBox="1"/>
+          <p:nvPr/>
+        </p:nvSpPr>
+        <p:spPr>
+          <a:xfrm>
+            <a:off x="502920" y="5221224"/>
+            <a:ext cx="10972800" cy="2743200"/>
+          </a:xfrm>
+          <a:prstGeom prst="rect">
+            <a:avLst/>
+          </a:prstGeom>
+          <a:noFill/>
+        </p:spPr>
+        <p:txBody>
+          <a:bodyPr wrap="square" lIns="0" rIns="0" tIns="0" bIns="0">
+            <a:spAutoFit/>
+          </a:bodyPr>
+          <a:lstStyle/>
+          <a:p>
+            <a:pPr>
+              <a:lnSpc>
+                <a:spcPct val="104000"/>
+              </a:lnSpc>
+              <a:spcBef>
+                <a:spcPts val="0"/>
+              </a:spcBef>
+              <a:spcAft>
+                <a:spcPts val="1000"/>
+              </a:spcAft>
+            </a:pPr>
+            <a:r>
+              <a:rPr sz="1600" b="1">
+                <a:solidFill>
+                  <a:srgbClr val="EF4444"/>
+                </a:solidFill>
+                <a:latin typeface="Segoe UI"/>
+              </a:rPr>
+              <a:t>•  </a:t>
+            </a:r>
+            <a:r>
+              <a:rPr sz="1600" i="0" b="1">
                 <a:solidFill>
                   <a:srgbClr val="334155"/>
                 </a:solidFill>
                 <a:latin typeface="Segoe UI"/>
               </a:rPr>
-              <a:t>never tested directly</a:t>
-            </a:r>
-          </a:p>
-        </p:txBody>
-      </p:sp>
-      <p:sp>
-        <p:nvSpPr>
-          <p:cNvPr id="19" name="TextBox 18"/>
-          <p:cNvSpPr txBox="1"/>
-          <p:nvPr/>
-        </p:nvSpPr>
-        <p:spPr>
-          <a:xfrm>
-            <a:off x="7626095" y="3822191"/>
-            <a:ext cx="3840480" cy="822960"/>
-          </a:xfrm>
-          <a:prstGeom prst="rect">
-            <a:avLst/>
-          </a:prstGeom>
-          <a:noFill/>
-        </p:spPr>
-        <p:txBody>
-          <a:bodyPr wrap="square" anchor="ctr" lIns="0" rIns="0" tIns="25400" bIns="25400">
-            <a:spAutoFit/>
-          </a:bodyPr>
-          <a:lstStyle/>
-          <a:p>
-            <a:pPr algn="l"/>
-            <a:r>
-              <a:rPr sz="1250" b="0" i="1">
-                <a:solidFill>
-                  <a:srgbClr val="DC2626"/>
-                </a:solidFill>
-                <a:latin typeface="Segoe UI"/>
-              </a:rPr>
-              <a:t>the middle link of the hierarchy is missing entirely</a:t>
-            </a:r>
-          </a:p>
-        </p:txBody>
-      </p:sp>
-      <p:sp>
-        <p:nvSpPr>
-          <p:cNvPr id="20" name="Rounded Rectangle 19"/>
-          <p:cNvSpPr/>
-          <p:nvPr/>
-        </p:nvSpPr>
-        <p:spPr>
-          <a:xfrm>
-            <a:off x="475488" y="4892040"/>
-            <a:ext cx="11064240" cy="1234440"/>
-          </a:xfrm>
-          <a:prstGeom prst="roundRect">
-            <a:avLst>
-              <a:gd name="adj" fmla="val 6000"/>
-            </a:avLst>
-          </a:prstGeom>
-          <a:solidFill>
-            <a:srgbClr val="EEF2F7"/>
-          </a:solidFill>
-          <a:ln>
-            <a:noFill/>
-          </a:ln>
-          <a:effectLst/>
-        </p:spPr>
-        <p:style>
-          <a:lnRef idx="1">
-            <a:schemeClr val="accent1"/>
-          </a:lnRef>
-          <a:fillRef idx="3">
-            <a:schemeClr val="accent1"/>
-          </a:fillRef>
-          <a:effectRef idx="2">
-            <a:schemeClr val="accent1"/>
-          </a:effectRef>
-          <a:fontRef idx="minor">
-            <a:schemeClr val="lt1"/>
-          </a:fontRef>
-        </p:style>
-        <p:txBody>
-          <a:bodyPr rtlCol="0" anchor="ctr"/>
-          <a:lstStyle/>
-          <a:p>
-            <a:pPr algn="ctr"/>
-          </a:p>
-        </p:txBody>
-      </p:sp>
-      <p:sp>
-        <p:nvSpPr>
-          <p:cNvPr id="21" name="Rectangle 20"/>
-          <p:cNvSpPr/>
-          <p:nvPr/>
-        </p:nvSpPr>
-        <p:spPr>
-          <a:xfrm>
-            <a:off x="475488" y="4892040"/>
-            <a:ext cx="91440" cy="1234440"/>
-          </a:xfrm>
-          <a:prstGeom prst="rect">
-            <a:avLst/>
-          </a:prstGeom>
-          <a:solidFill>
-            <a:srgbClr val="64748B"/>
-          </a:solidFill>
-          <a:ln>
-            <a:noFill/>
-          </a:ln>
-          <a:effectLst/>
-        </p:spPr>
-        <p:style>
-          <a:lnRef idx="1">
-            <a:schemeClr val="accent1"/>
-          </a:lnRef>
-          <a:fillRef idx="3">
-            <a:schemeClr val="accent1"/>
-          </a:fillRef>
-          <a:effectRef idx="2">
-            <a:schemeClr val="accent1"/>
-          </a:effectRef>
-          <a:fontRef idx="minor">
-            <a:schemeClr val="lt1"/>
-          </a:fontRef>
-        </p:style>
-        <p:txBody>
-          <a:bodyPr rtlCol="0" anchor="ctr"/>
-          <a:lstStyle/>
-          <a:p>
-            <a:pPr algn="ctr"/>
-          </a:p>
-        </p:txBody>
-      </p:sp>
-      <p:sp>
-        <p:nvSpPr>
-          <p:cNvPr id="22" name="TextBox 21"/>
-          <p:cNvSpPr txBox="1"/>
-          <p:nvPr/>
-        </p:nvSpPr>
-        <p:spPr>
-          <a:xfrm>
-            <a:off x="676656" y="5010912"/>
-            <a:ext cx="2743200" cy="292608"/>
-          </a:xfrm>
-          <a:prstGeom prst="rect">
-            <a:avLst/>
-          </a:prstGeom>
-          <a:noFill/>
-        </p:spPr>
-        <p:txBody>
-          <a:bodyPr wrap="square" lIns="0" rIns="0" tIns="25400" bIns="25400">
-            <a:spAutoFit/>
-          </a:bodyPr>
-          <a:lstStyle/>
-          <a:p>
-            <a:pPr algn="l"/>
-            <a:r>
-              <a:rPr sz="1200" b="1" i="0" spc="100">
-                <a:solidFill>
-                  <a:srgbClr val="1E293B"/>
-                </a:solidFill>
-                <a:latin typeface="Segoe UI"/>
-              </a:rPr>
-              <a:t>Bottom line</a:t>
-            </a:r>
-          </a:p>
-        </p:txBody>
-      </p:sp>
-      <p:sp>
-        <p:nvSpPr>
-          <p:cNvPr id="23" name="TextBox 22"/>
-          <p:cNvSpPr txBox="1"/>
-          <p:nvPr/>
-        </p:nvSpPr>
-        <p:spPr>
-          <a:xfrm>
-            <a:off x="676656" y="5321808"/>
-            <a:ext cx="10881360" cy="731520"/>
-          </a:xfrm>
-          <a:prstGeom prst="rect">
-            <a:avLst/>
-          </a:prstGeom>
-          <a:noFill/>
-        </p:spPr>
-        <p:txBody>
-          <a:bodyPr wrap="square" lIns="0" rIns="0" tIns="25400" bIns="25400">
-            <a:spAutoFit/>
-          </a:bodyPr>
-          <a:lstStyle/>
-          <a:p>
-            <a:pPr algn="l"/>
-            <a:r>
-              <a:rPr sz="1450" b="1" i="0">
-                <a:solidFill>
-                  <a:srgbClr val="0F172A"/>
-                </a:solidFill>
-                <a:latin typeface="Segoe UI"/>
-              </a:rPr>
-              <a:t>To make this hierarchy a defensible paper claim we need one experiment that: (1) fixes pool size across sources, (2) fills the real-vs-translated gap, and (3) gives a 2nd real&gt;generated data point on a different, higher-resource language.</a:t>
+              <a:t>Fix pool size</a:t>
+            </a:r>
+          </a:p>
+          <a:p>
+            <a:pPr>
+              <a:lnSpc>
+                <a:spcPct val="104000"/>
+              </a:lnSpc>
+              <a:spcBef>
+                <a:spcPts val="0"/>
+              </a:spcBef>
+              <a:spcAft>
+                <a:spcPts val="1000"/>
+              </a:spcAft>
+            </a:pPr>
+            <a:r>
+              <a:rPr sz="1600" b="1">
+                <a:solidFill>
+                  <a:srgbClr val="EF4444"/>
+                </a:solidFill>
+                <a:latin typeface="Segoe UI"/>
+              </a:rPr>
+              <a:t>•  </a:t>
+            </a:r>
+            <a:r>
+              <a:rPr sz="1600" i="0" b="1">
+                <a:solidFill>
+                  <a:srgbClr val="334155"/>
+                </a:solidFill>
+                <a:latin typeface="Segoe UI"/>
+              </a:rPr>
+              <a:t>Fill real ↔ translated gap</a:t>
+            </a:r>
+          </a:p>
+          <a:p>
+            <a:pPr>
+              <a:lnSpc>
+                <a:spcPct val="104000"/>
+              </a:lnSpc>
+              <a:spcBef>
+                <a:spcPts val="0"/>
+              </a:spcBef>
+              <a:spcAft>
+                <a:spcPts val="1000"/>
+              </a:spcAft>
+            </a:pPr>
+            <a:r>
+              <a:rPr sz="1600" b="1">
+                <a:solidFill>
+                  <a:srgbClr val="EF4444"/>
+                </a:solidFill>
+                <a:latin typeface="Segoe UI"/>
+              </a:rPr>
+              <a:t>•  </a:t>
+            </a:r>
+            <a:r>
+              <a:rPr sz="1600" i="0" b="1">
+                <a:solidFill>
+                  <a:srgbClr val="334155"/>
+                </a:solidFill>
+                <a:latin typeface="Segoe UI"/>
+              </a:rPr>
+              <a:t>2nd real &gt; gen data point</a:t>
             </a:r>
           </a:p>
         </p:txBody>
@@ -7148,13 +7118,13 @@
           <a:p>
             <a:pPr algn="l"/>
             <a:r>
-              <a:rPr sz="2600" b="1" i="0">
+              <a:rPr sz="2700" b="1" i="0">
                 <a:solidFill>
                   <a:srgbClr val="0F172A"/>
                 </a:solidFill>
                 <a:latin typeface="Segoe UI"/>
               </a:rPr>
-              <a:t>rus_restaurant: Size-Matched 3-Way Pool-Source Ablation</a:t>
+              <a:t>Size-Matched 3-Way Pool-Source Ablation</a:t>
             </a:r>
           </a:p>
         </p:txBody>
@@ -7167,8 +7137,8 @@
         </p:nvSpPr>
         <p:spPr>
           <a:xfrm>
-            <a:off x="502920" y="1481328"/>
-            <a:ext cx="11155680" cy="457200"/>
+            <a:off x="502920" y="1463040"/>
+            <a:ext cx="11155680" cy="365760"/>
           </a:xfrm>
           <a:prstGeom prst="rect">
             <a:avLst/>
@@ -7183,13 +7153,13 @@
           <a:p>
             <a:pPr algn="l"/>
             <a:r>
-              <a:rPr sz="1450" b="1" i="0">
+              <a:rPr sz="1400" b="1" i="0">
                 <a:solidFill>
                   <a:srgbClr val="334155"/>
                 </a:solidFill>
                 <a:latin typeface="Segoe UI"/>
               </a:rPr>
-              <a:t>Same teacher (DeepSeek) · same config (xlm-roberta-large) · same gold (1,240) · silver capped at 3,000 — only the pool source varies.</a:t>
+              <a:t>Fixed: teacher = DeepSeek  ·  config = xlm-roberta-large  ·  gold = 1,240  ·  Variable: pool source only</a:t>
             </a:r>
           </a:p>
         </p:txBody>
@@ -7202,16 +7172,16 @@
         </p:nvSpPr>
         <p:spPr>
           <a:xfrm>
-            <a:off x="475488" y="2084831"/>
-            <a:ext cx="3621024" cy="3977639"/>
+            <a:off x="475488" y="1965960"/>
+            <a:ext cx="11567159" cy="420624"/>
           </a:xfrm>
           <a:prstGeom prst="roundRect">
             <a:avLst>
-              <a:gd name="adj" fmla="val 5000"/>
+              <a:gd name="adj" fmla="val 8000"/>
             </a:avLst>
           </a:prstGeom>
           <a:solidFill>
-            <a:srgbClr val="D6F2E4"/>
+            <a:srgbClr val="F1F5F9"/>
           </a:solidFill>
           <a:ln>
             <a:noFill/>
@@ -7248,8 +7218,8 @@
         </p:nvSpPr>
         <p:spPr>
           <a:xfrm>
-            <a:off x="676656" y="2249424"/>
-            <a:ext cx="3246120" cy="411480"/>
+            <a:off x="548640" y="2020824"/>
+            <a:ext cx="1956815" cy="310896"/>
           </a:xfrm>
           <a:prstGeom prst="rect">
             <a:avLst/>
@@ -7262,15 +7232,15 @@
           </a:bodyPr>
           <a:lstStyle/>
           <a:p>
-            <a:pPr algn="l"/>
-            <a:r>
-              <a:rPr sz="1700" b="1" i="0">
-                <a:solidFill>
-                  <a:srgbClr val="047857"/>
-                </a:solidFill>
-                <a:latin typeface="Segoe UI"/>
-              </a:rPr>
-              <a:t>🥇  REAL</a:t>
+            <a:pPr algn="ctr"/>
+            <a:r>
+              <a:rPr sz="1200" b="1" i="0" spc="40">
+                <a:solidFill>
+                  <a:srgbClr val="64748B"/>
+                </a:solidFill>
+                <a:latin typeface="Segoe UI"/>
+              </a:rPr>
+              <a:t>ARM</a:t>
             </a:r>
           </a:p>
         </p:txBody>
@@ -7283,8 +7253,8 @@
         </p:nvSpPr>
         <p:spPr>
           <a:xfrm>
-            <a:off x="676656" y="2688336"/>
-            <a:ext cx="3246120" cy="365760"/>
+            <a:off x="2651760" y="2020824"/>
+            <a:ext cx="4059935" cy="310896"/>
           </a:xfrm>
           <a:prstGeom prst="rect">
             <a:avLst/>
@@ -7297,15 +7267,15 @@
           </a:bodyPr>
           <a:lstStyle/>
           <a:p>
-            <a:pPr algn="l"/>
-            <a:r>
-              <a:rPr sz="1250" b="0" i="1">
-                <a:solidFill>
-                  <a:srgbClr val="047857"/>
-                </a:solidFill>
-                <a:latin typeface="Segoe UI"/>
-              </a:rPr>
-              <a:t>geo-reviews sample</a:t>
+            <a:pPr algn="ctr"/>
+            <a:r>
+              <a:rPr sz="1200" b="1" i="0" spc="40">
+                <a:solidFill>
+                  <a:srgbClr val="64748B"/>
+                </a:solidFill>
+                <a:latin typeface="Segoe UI"/>
+              </a:rPr>
+              <a:t>CONSTRUCTION</a:t>
             </a:r>
           </a:p>
         </p:txBody>
@@ -7318,8 +7288,8 @@
         </p:nvSpPr>
         <p:spPr>
           <a:xfrm>
-            <a:off x="676656" y="3200400"/>
-            <a:ext cx="3200400" cy="256032"/>
+            <a:off x="6858000" y="2020824"/>
+            <a:ext cx="1682496" cy="310896"/>
           </a:xfrm>
           <a:prstGeom prst="rect">
             <a:avLst/>
@@ -7332,9 +7302,9 @@
           </a:bodyPr>
           <a:lstStyle/>
           <a:p>
-            <a:pPr algn="l"/>
-            <a:r>
-              <a:rPr sz="1050" b="1" i="0" spc="40">
+            <a:pPr algn="ctr"/>
+            <a:r>
+              <a:rPr sz="1200" b="1" i="0" spc="40">
                 <a:solidFill>
                   <a:srgbClr val="64748B"/>
                 </a:solidFill>
@@ -7353,8 +7323,8 @@
         </p:nvSpPr>
         <p:spPr>
           <a:xfrm>
-            <a:off x="676656" y="3456432"/>
-            <a:ext cx="3200400" cy="384048"/>
+            <a:off x="8686800" y="2020824"/>
+            <a:ext cx="1591056" cy="310896"/>
           </a:xfrm>
           <a:prstGeom prst="rect">
             <a:avLst/>
@@ -7367,15 +7337,15 @@
           </a:bodyPr>
           <a:lstStyle/>
           <a:p>
-            <a:pPr algn="l"/>
-            <a:r>
-              <a:rPr sz="1350" b="1" i="0">
-                <a:solidFill>
-                  <a:srgbClr val="0F172A"/>
-                </a:solidFill>
-                <a:latin typeface="Segoe UI"/>
-              </a:rPr>
-              <a:t>4,000</a:t>
+            <a:pPr algn="ctr"/>
+            <a:r>
+              <a:rPr sz="1200" b="1" i="0" spc="40">
+                <a:solidFill>
+                  <a:srgbClr val="64748B"/>
+                </a:solidFill>
+                <a:latin typeface="Segoe UI"/>
+              </a:rPr>
+              <a:t>SILVER CAP</a:t>
             </a:r>
           </a:p>
         </p:txBody>
@@ -7388,8 +7358,8 @@
         </p:nvSpPr>
         <p:spPr>
           <a:xfrm>
-            <a:off x="676656" y="3858768"/>
-            <a:ext cx="3200400" cy="256032"/>
+            <a:off x="10424160" y="2020824"/>
+            <a:ext cx="1545336" cy="310896"/>
           </a:xfrm>
           <a:prstGeom prst="rect">
             <a:avLst/>
@@ -7402,154 +7372,14 @@
           </a:bodyPr>
           <a:lstStyle/>
           <a:p>
-            <a:pPr algn="l"/>
-            <a:r>
-              <a:rPr sz="1050" b="1" i="0" spc="40">
+            <a:pPr algn="ctr"/>
+            <a:r>
+              <a:rPr sz="1200" b="1" i="0" spc="40">
                 <a:solidFill>
                   <a:srgbClr val="64748B"/>
                 </a:solidFill>
                 <a:latin typeface="Segoe UI"/>
               </a:rPr>
-              <a:t>CONSTRUCTION</a:t>
-            </a:r>
-          </a:p>
-        </p:txBody>
-      </p:sp>
-      <p:sp>
-        <p:nvSpPr>
-          <p:cNvPr id="11" name="TextBox 10"/>
-          <p:cNvSpPr txBox="1"/>
-          <p:nvPr/>
-        </p:nvSpPr>
-        <p:spPr>
-          <a:xfrm>
-            <a:off x="676656" y="4114800"/>
-            <a:ext cx="3200400" cy="384048"/>
-          </a:xfrm>
-          <a:prstGeom prst="rect">
-            <a:avLst/>
-          </a:prstGeom>
-          <a:noFill/>
-        </p:spPr>
-        <p:txBody>
-          <a:bodyPr wrap="square" lIns="0" rIns="0" tIns="25400" bIns="25400">
-            <a:spAutoFit/>
-          </a:bodyPr>
-          <a:lstStyle/>
-          <a:p>
-            <a:pPr algn="l"/>
-            <a:r>
-              <a:rPr sz="1350" b="1" i="0">
-                <a:solidFill>
-                  <a:srgbClr val="0F172A"/>
-                </a:solidFill>
-                <a:latin typeface="Segoe UI"/>
-              </a:rPr>
-              <a:t>sampled Russian restaurant reviews</a:t>
-            </a:r>
-          </a:p>
-        </p:txBody>
-      </p:sp>
-      <p:sp>
-        <p:nvSpPr>
-          <p:cNvPr id="12" name="TextBox 11"/>
-          <p:cNvSpPr txBox="1"/>
-          <p:nvPr/>
-        </p:nvSpPr>
-        <p:spPr>
-          <a:xfrm>
-            <a:off x="676656" y="4517136"/>
-            <a:ext cx="3200400" cy="256032"/>
-          </a:xfrm>
-          <a:prstGeom prst="rect">
-            <a:avLst/>
-          </a:prstGeom>
-          <a:noFill/>
-        </p:spPr>
-        <p:txBody>
-          <a:bodyPr wrap="square" lIns="0" rIns="0" tIns="25400" bIns="25400">
-            <a:spAutoFit/>
-          </a:bodyPr>
-          <a:lstStyle/>
-          <a:p>
-            <a:pPr algn="l"/>
-            <a:r>
-              <a:rPr sz="1050" b="1" i="0" spc="40">
-                <a:solidFill>
-                  <a:srgbClr val="64748B"/>
-                </a:solidFill>
-                <a:latin typeface="Segoe UI"/>
-              </a:rPr>
-              <a:t>SILVER (CAPPED)</a:t>
-            </a:r>
-          </a:p>
-        </p:txBody>
-      </p:sp>
-      <p:sp>
-        <p:nvSpPr>
-          <p:cNvPr id="13" name="TextBox 12"/>
-          <p:cNvSpPr txBox="1"/>
-          <p:nvPr/>
-        </p:nvSpPr>
-        <p:spPr>
-          <a:xfrm>
-            <a:off x="676656" y="4773168"/>
-            <a:ext cx="3200400" cy="384048"/>
-          </a:xfrm>
-          <a:prstGeom prst="rect">
-            <a:avLst/>
-          </a:prstGeom>
-          <a:noFill/>
-        </p:spPr>
-        <p:txBody>
-          <a:bodyPr wrap="square" lIns="0" rIns="0" tIns="25400" bIns="25400">
-            <a:spAutoFit/>
-          </a:bodyPr>
-          <a:lstStyle/>
-          <a:p>
-            <a:pPr algn="l"/>
-            <a:r>
-              <a:rPr sz="1350" b="1" i="0">
-                <a:solidFill>
-                  <a:srgbClr val="0F172A"/>
-                </a:solidFill>
-                <a:latin typeface="Segoe UI"/>
-              </a:rPr>
-              <a:t>3,000</a:t>
-            </a:r>
-          </a:p>
-        </p:txBody>
-      </p:sp>
-      <p:sp>
-        <p:nvSpPr>
-          <p:cNvPr id="14" name="TextBox 13"/>
-          <p:cNvSpPr txBox="1"/>
-          <p:nvPr/>
-        </p:nvSpPr>
-        <p:spPr>
-          <a:xfrm>
-            <a:off x="676656" y="5175503"/>
-            <a:ext cx="3200400" cy="256032"/>
-          </a:xfrm>
-          <a:prstGeom prst="rect">
-            <a:avLst/>
-          </a:prstGeom>
-          <a:noFill/>
-        </p:spPr>
-        <p:txBody>
-          <a:bodyPr wrap="square" lIns="0" rIns="0" tIns="25400" bIns="25400">
-            <a:spAutoFit/>
-          </a:bodyPr>
-          <a:lstStyle/>
-          <a:p>
-            <a:pPr algn="l"/>
-            <a:r>
-              <a:rPr sz="1050" b="1" i="0" spc="40">
-                <a:solidFill>
-                  <a:srgbClr val="64748B"/>
-                </a:solidFill>
-                <a:latin typeface="Segoe UI"/>
-              </a:rPr>
               <a:t>TRAIN FILE</a:t>
             </a:r>
           </a:p>
@@ -7557,60 +7387,27 @@
       </p:sp>
       <p:sp>
         <p:nvSpPr>
-          <p:cNvPr id="15" name="TextBox 14"/>
-          <p:cNvSpPr txBox="1"/>
-          <p:nvPr/>
-        </p:nvSpPr>
-        <p:spPr>
-          <a:xfrm>
-            <a:off x="676656" y="5431536"/>
-            <a:ext cx="3200400" cy="384048"/>
-          </a:xfrm>
-          <a:prstGeom prst="rect">
-            <a:avLst/>
-          </a:prstGeom>
-          <a:noFill/>
-        </p:spPr>
-        <p:txBody>
-          <a:bodyPr wrap="square" lIns="0" rIns="0" tIns="25400" bIns="25400">
-            <a:spAutoFit/>
-          </a:bodyPr>
-          <a:lstStyle/>
-          <a:p>
-            <a:pPr algn="l"/>
-            <a:r>
-              <a:rPr sz="1350" b="1" i="0">
-                <a:solidFill>
-                  <a:srgbClr val="0F172A"/>
-                </a:solidFill>
-                <a:latin typeface="Segoe UI"/>
-              </a:rPr>
-              <a:t>4,240 rows</a:t>
-            </a:r>
-          </a:p>
-        </p:txBody>
-      </p:sp>
-      <p:sp>
-        <p:nvSpPr>
-          <p:cNvPr id="16" name="Rounded Rectangle 15"/>
+          <p:cNvPr id="11" name="Rounded Rectangle 10"/>
           <p:cNvSpPr/>
           <p:nvPr/>
         </p:nvSpPr>
         <p:spPr>
           <a:xfrm>
-            <a:off x="4279392" y="2084831"/>
-            <a:ext cx="3621024" cy="3977639"/>
+            <a:off x="475488" y="2386584"/>
+            <a:ext cx="11567159" cy="621792"/>
           </a:xfrm>
           <a:prstGeom prst="roundRect">
             <a:avLst>
-              <a:gd name="adj" fmla="val 5000"/>
+              <a:gd name="adj" fmla="val 3000"/>
             </a:avLst>
           </a:prstGeom>
           <a:solidFill>
-            <a:srgbClr val="FEF3C7"/>
+            <a:srgbClr val="FFFFFF"/>
           </a:solidFill>
-          <a:ln>
-            <a:noFill/>
+          <a:ln w="12700">
+            <a:solidFill>
+              <a:srgbClr val="E2E8F0"/>
+            </a:solidFill>
           </a:ln>
           <a:effectLst/>
         </p:spPr>
@@ -7638,276 +7435,136 @@
       </p:sp>
       <p:sp>
         <p:nvSpPr>
-          <p:cNvPr id="17" name="TextBox 16"/>
-          <p:cNvSpPr txBox="1"/>
-          <p:nvPr/>
-        </p:nvSpPr>
-        <p:spPr>
-          <a:xfrm>
-            <a:off x="4480559" y="2249424"/>
-            <a:ext cx="3246120" cy="411480"/>
-          </a:xfrm>
-          <a:prstGeom prst="rect">
-            <a:avLst/>
-          </a:prstGeom>
-          <a:noFill/>
-        </p:spPr>
-        <p:txBody>
-          <a:bodyPr wrap="square" lIns="0" rIns="0" tIns="25400" bIns="25400">
-            <a:spAutoFit/>
-          </a:bodyPr>
-          <a:lstStyle/>
-          <a:p>
-            <a:pPr algn="l"/>
-            <a:r>
-              <a:rPr sz="1700" b="1" i="0">
-                <a:solidFill>
-                  <a:srgbClr val="B45A09"/>
-                </a:solidFill>
-                <a:latin typeface="Segoe UI"/>
-              </a:rPr>
-              <a:t>🥈  TRANSLATED</a:t>
-            </a:r>
-          </a:p>
-        </p:txBody>
-      </p:sp>
-      <p:sp>
-        <p:nvSpPr>
-          <p:cNvPr id="18" name="TextBox 17"/>
-          <p:cNvSpPr txBox="1"/>
-          <p:nvPr/>
-        </p:nvSpPr>
-        <p:spPr>
-          <a:xfrm>
-            <a:off x="4480559" y="2688336"/>
-            <a:ext cx="3246120" cy="365760"/>
-          </a:xfrm>
-          <a:prstGeom prst="rect">
-            <a:avLst/>
-          </a:prstGeom>
-          <a:noFill/>
-        </p:spPr>
-        <p:txBody>
-          <a:bodyPr wrap="square" lIns="0" rIns="0" tIns="25400" bIns="25400">
-            <a:spAutoFit/>
-          </a:bodyPr>
-          <a:lstStyle/>
-          <a:p>
-            <a:pPr algn="l"/>
-            <a:r>
-              <a:rPr sz="1250" b="0" i="1">
-                <a:solidFill>
-                  <a:srgbClr val="B45A09"/>
-                </a:solidFill>
-                <a:latin typeface="Segoe UI"/>
-              </a:rPr>
-              <a:t>Yelp EN → MarianMT en-ru</a:t>
-            </a:r>
-          </a:p>
-        </p:txBody>
-      </p:sp>
-      <p:sp>
-        <p:nvSpPr>
-          <p:cNvPr id="19" name="TextBox 18"/>
-          <p:cNvSpPr txBox="1"/>
-          <p:nvPr/>
-        </p:nvSpPr>
-        <p:spPr>
-          <a:xfrm>
-            <a:off x="4480559" y="3200400"/>
-            <a:ext cx="3200400" cy="256032"/>
-          </a:xfrm>
-          <a:prstGeom prst="rect">
-            <a:avLst/>
-          </a:prstGeom>
-          <a:noFill/>
-        </p:spPr>
-        <p:txBody>
-          <a:bodyPr wrap="square" lIns="0" rIns="0" tIns="25400" bIns="25400">
-            <a:spAutoFit/>
-          </a:bodyPr>
-          <a:lstStyle/>
-          <a:p>
-            <a:pPr algn="l"/>
-            <a:r>
-              <a:rPr sz="1050" b="1" i="0" spc="40">
-                <a:solidFill>
-                  <a:srgbClr val="64748B"/>
-                </a:solidFill>
-                <a:latin typeface="Segoe UI"/>
-              </a:rPr>
-              <a:t>POOL SIZE</a:t>
-            </a:r>
-          </a:p>
-        </p:txBody>
-      </p:sp>
-      <p:sp>
-        <p:nvSpPr>
-          <p:cNvPr id="20" name="TextBox 19"/>
-          <p:cNvSpPr txBox="1"/>
-          <p:nvPr/>
-        </p:nvSpPr>
-        <p:spPr>
-          <a:xfrm>
-            <a:off x="4480559" y="3456432"/>
-            <a:ext cx="3200400" cy="384048"/>
-          </a:xfrm>
-          <a:prstGeom prst="rect">
-            <a:avLst/>
-          </a:prstGeom>
-          <a:noFill/>
-        </p:spPr>
-        <p:txBody>
-          <a:bodyPr wrap="square" lIns="0" rIns="0" tIns="25400" bIns="25400">
-            <a:spAutoFit/>
-          </a:bodyPr>
-          <a:lstStyle/>
-          <a:p>
-            <a:pPr algn="l"/>
-            <a:r>
-              <a:rPr sz="1350" b="1" i="0">
+          <p:cNvPr id="12" name="TextBox 11"/>
+          <p:cNvSpPr txBox="1"/>
+          <p:nvPr/>
+        </p:nvSpPr>
+        <p:spPr>
+          <a:xfrm>
+            <a:off x="548640" y="2386584"/>
+            <a:ext cx="1956815" cy="621792"/>
+          </a:xfrm>
+          <a:prstGeom prst="rect">
+            <a:avLst/>
+          </a:prstGeom>
+          <a:noFill/>
+        </p:spPr>
+        <p:txBody>
+          <a:bodyPr wrap="square" anchor="ctr" lIns="0" rIns="0" tIns="25400" bIns="25400">
+            <a:spAutoFit/>
+          </a:bodyPr>
+          <a:lstStyle/>
+          <a:p>
+            <a:pPr algn="ctr"/>
+            <a:r>
+              <a:rPr sz="1400" b="1" i="0">
                 <a:solidFill>
                   <a:srgbClr val="0F172A"/>
                 </a:solidFill>
                 <a:latin typeface="Segoe UI"/>
               </a:rPr>
-              <a:t>3,466</a:t>
-            </a:r>
-          </a:p>
-        </p:txBody>
-      </p:sp>
-      <p:sp>
-        <p:nvSpPr>
-          <p:cNvPr id="21" name="TextBox 20"/>
-          <p:cNvSpPr txBox="1"/>
-          <p:nvPr/>
-        </p:nvSpPr>
-        <p:spPr>
-          <a:xfrm>
-            <a:off x="4480559" y="3858768"/>
-            <a:ext cx="3200400" cy="256032"/>
-          </a:xfrm>
-          <a:prstGeom prst="rect">
-            <a:avLst/>
-          </a:prstGeom>
-          <a:noFill/>
-        </p:spPr>
-        <p:txBody>
-          <a:bodyPr wrap="square" lIns="0" rIns="0" tIns="25400" bIns="25400">
-            <a:spAutoFit/>
-          </a:bodyPr>
-          <a:lstStyle/>
-          <a:p>
-            <a:pPr algn="l"/>
-            <a:r>
-              <a:rPr sz="1050" b="1" i="0" spc="40">
-                <a:solidFill>
-                  <a:srgbClr val="64748B"/>
-                </a:solidFill>
-                <a:latin typeface="Segoe UI"/>
-              </a:rPr>
-              <a:t>CONSTRUCTION</a:t>
-            </a:r>
-          </a:p>
-        </p:txBody>
-      </p:sp>
-      <p:sp>
-        <p:nvSpPr>
-          <p:cNvPr id="22" name="TextBox 21"/>
-          <p:cNvSpPr txBox="1"/>
-          <p:nvPr/>
-        </p:nvSpPr>
-        <p:spPr>
-          <a:xfrm>
-            <a:off x="4480559" y="4114800"/>
-            <a:ext cx="3200400" cy="384048"/>
-          </a:xfrm>
-          <a:prstGeom prst="rect">
-            <a:avLst/>
-          </a:prstGeom>
-          <a:noFill/>
-        </p:spPr>
-        <p:txBody>
-          <a:bodyPr wrap="square" lIns="0" rIns="0" tIns="25400" bIns="25400">
-            <a:spAutoFit/>
-          </a:bodyPr>
-          <a:lstStyle/>
-          <a:p>
-            <a:pPr algn="l"/>
-            <a:r>
-              <a:rPr sz="1350" b="1" i="0">
-                <a:solidFill>
-                  <a:srgbClr val="0F172A"/>
-                </a:solidFill>
-                <a:latin typeface="Segoe UI"/>
-              </a:rPr>
-              <a:t>English Yelp reviews, machine-translated</a:t>
-            </a:r>
-          </a:p>
-        </p:txBody>
-      </p:sp>
-      <p:sp>
-        <p:nvSpPr>
-          <p:cNvPr id="23" name="TextBox 22"/>
-          <p:cNvSpPr txBox="1"/>
-          <p:nvPr/>
-        </p:nvSpPr>
-        <p:spPr>
-          <a:xfrm>
-            <a:off x="4480559" y="4517136"/>
-            <a:ext cx="3200400" cy="256032"/>
-          </a:xfrm>
-          <a:prstGeom prst="rect">
-            <a:avLst/>
-          </a:prstGeom>
-          <a:noFill/>
-        </p:spPr>
-        <p:txBody>
-          <a:bodyPr wrap="square" lIns="0" rIns="0" tIns="25400" bIns="25400">
-            <a:spAutoFit/>
-          </a:bodyPr>
-          <a:lstStyle/>
-          <a:p>
-            <a:pPr algn="l"/>
-            <a:r>
-              <a:rPr sz="1050" b="1" i="0" spc="40">
-                <a:solidFill>
-                  <a:srgbClr val="64748B"/>
-                </a:solidFill>
-                <a:latin typeface="Segoe UI"/>
-              </a:rPr>
-              <a:t>SILVER (CAPPED)</a:t>
-            </a:r>
-          </a:p>
-        </p:txBody>
-      </p:sp>
-      <p:sp>
-        <p:nvSpPr>
-          <p:cNvPr id="24" name="TextBox 23"/>
-          <p:cNvSpPr txBox="1"/>
-          <p:nvPr/>
-        </p:nvSpPr>
-        <p:spPr>
-          <a:xfrm>
-            <a:off x="4480559" y="4773168"/>
-            <a:ext cx="3200400" cy="384048"/>
-          </a:xfrm>
-          <a:prstGeom prst="rect">
-            <a:avLst/>
-          </a:prstGeom>
-          <a:noFill/>
-        </p:spPr>
-        <p:txBody>
-          <a:bodyPr wrap="square" lIns="0" rIns="0" tIns="25400" bIns="25400">
-            <a:spAutoFit/>
-          </a:bodyPr>
-          <a:lstStyle/>
-          <a:p>
-            <a:pPr algn="l"/>
-            <a:r>
-              <a:rPr sz="1350" b="1" i="0">
-                <a:solidFill>
-                  <a:srgbClr val="0F172A"/>
+              <a:t>🥇 REAL</a:t>
+            </a:r>
+          </a:p>
+        </p:txBody>
+      </p:sp>
+      <p:sp>
+        <p:nvSpPr>
+          <p:cNvPr id="13" name="TextBox 12"/>
+          <p:cNvSpPr txBox="1"/>
+          <p:nvPr/>
+        </p:nvSpPr>
+        <p:spPr>
+          <a:xfrm>
+            <a:off x="2651760" y="2386584"/>
+            <a:ext cx="4059935" cy="621792"/>
+          </a:xfrm>
+          <a:prstGeom prst="rect">
+            <a:avLst/>
+          </a:prstGeom>
+          <a:noFill/>
+        </p:spPr>
+        <p:txBody>
+          <a:bodyPr wrap="square" anchor="ctr" lIns="0" rIns="0" tIns="25400" bIns="25400">
+            <a:spAutoFit/>
+          </a:bodyPr>
+          <a:lstStyle/>
+          <a:p>
+            <a:pPr algn="ctr"/>
+            <a:r>
+              <a:rPr sz="1400" b="0" i="0">
+                <a:solidFill>
+                  <a:srgbClr val="334155"/>
+                </a:solidFill>
+                <a:latin typeface="Segoe UI"/>
+              </a:rPr>
+              <a:t>geo-reviews sample</a:t>
+            </a:r>
+          </a:p>
+        </p:txBody>
+      </p:sp>
+      <p:sp>
+        <p:nvSpPr>
+          <p:cNvPr id="14" name="TextBox 13"/>
+          <p:cNvSpPr txBox="1"/>
+          <p:nvPr/>
+        </p:nvSpPr>
+        <p:spPr>
+          <a:xfrm>
+            <a:off x="6858000" y="2386584"/>
+            <a:ext cx="1682496" cy="621792"/>
+          </a:xfrm>
+          <a:prstGeom prst="rect">
+            <a:avLst/>
+          </a:prstGeom>
+          <a:noFill/>
+        </p:spPr>
+        <p:txBody>
+          <a:bodyPr wrap="square" anchor="ctr" lIns="0" rIns="0" tIns="25400" bIns="25400">
+            <a:spAutoFit/>
+          </a:bodyPr>
+          <a:lstStyle/>
+          <a:p>
+            <a:pPr algn="ctr"/>
+            <a:r>
+              <a:rPr sz="1400" b="0" i="0">
+                <a:solidFill>
+                  <a:srgbClr val="334155"/>
+                </a:solidFill>
+                <a:latin typeface="Segoe UI"/>
+              </a:rPr>
+              <a:t>4,000</a:t>
+            </a:r>
+          </a:p>
+        </p:txBody>
+      </p:sp>
+      <p:sp>
+        <p:nvSpPr>
+          <p:cNvPr id="15" name="TextBox 14"/>
+          <p:cNvSpPr txBox="1"/>
+          <p:nvPr/>
+        </p:nvSpPr>
+        <p:spPr>
+          <a:xfrm>
+            <a:off x="8686800" y="2386584"/>
+            <a:ext cx="1591056" cy="621792"/>
+          </a:xfrm>
+          <a:prstGeom prst="rect">
+            <a:avLst/>
+          </a:prstGeom>
+          <a:noFill/>
+        </p:spPr>
+        <p:txBody>
+          <a:bodyPr wrap="square" anchor="ctr" lIns="0" rIns="0" tIns="25400" bIns="25400">
+            <a:spAutoFit/>
+          </a:bodyPr>
+          <a:lstStyle/>
+          <a:p>
+            <a:pPr algn="ctr"/>
+            <a:r>
+              <a:rPr sz="1400" b="0" i="0">
+                <a:solidFill>
+                  <a:srgbClr val="334155"/>
                 </a:solidFill>
                 <a:latin typeface="Segoe UI"/>
               </a:rPr>
@@ -7918,95 +7575,62 @@
       </p:sp>
       <p:sp>
         <p:nvSpPr>
-          <p:cNvPr id="25" name="TextBox 24"/>
-          <p:cNvSpPr txBox="1"/>
-          <p:nvPr/>
-        </p:nvSpPr>
-        <p:spPr>
-          <a:xfrm>
-            <a:off x="4480559" y="5175503"/>
-            <a:ext cx="3200400" cy="256032"/>
-          </a:xfrm>
-          <a:prstGeom prst="rect">
-            <a:avLst/>
-          </a:prstGeom>
-          <a:noFill/>
-        </p:spPr>
-        <p:txBody>
-          <a:bodyPr wrap="square" lIns="0" rIns="0" tIns="25400" bIns="25400">
-            <a:spAutoFit/>
-          </a:bodyPr>
-          <a:lstStyle/>
-          <a:p>
-            <a:pPr algn="l"/>
-            <a:r>
-              <a:rPr sz="1050" b="1" i="0" spc="40">
-                <a:solidFill>
-                  <a:srgbClr val="64748B"/>
-                </a:solidFill>
-                <a:latin typeface="Segoe UI"/>
-              </a:rPr>
-              <a:t>TRAIN FILE</a:t>
-            </a:r>
-          </a:p>
-        </p:txBody>
-      </p:sp>
-      <p:sp>
-        <p:nvSpPr>
-          <p:cNvPr id="26" name="TextBox 25"/>
-          <p:cNvSpPr txBox="1"/>
-          <p:nvPr/>
-        </p:nvSpPr>
-        <p:spPr>
-          <a:xfrm>
-            <a:off x="4480559" y="5431536"/>
-            <a:ext cx="3200400" cy="384048"/>
-          </a:xfrm>
-          <a:prstGeom prst="rect">
-            <a:avLst/>
-          </a:prstGeom>
-          <a:noFill/>
-        </p:spPr>
-        <p:txBody>
-          <a:bodyPr wrap="square" lIns="0" rIns="0" tIns="25400" bIns="25400">
-            <a:spAutoFit/>
-          </a:bodyPr>
-          <a:lstStyle/>
-          <a:p>
-            <a:pPr algn="l"/>
-            <a:r>
-              <a:rPr sz="1350" b="1" i="0">
-                <a:solidFill>
-                  <a:srgbClr val="0F172A"/>
-                </a:solidFill>
-                <a:latin typeface="Segoe UI"/>
-              </a:rPr>
-              <a:t>4,240 rows</a:t>
-            </a:r>
-          </a:p>
-        </p:txBody>
-      </p:sp>
-      <p:sp>
-        <p:nvSpPr>
-          <p:cNvPr id="27" name="Rounded Rectangle 26"/>
+          <p:cNvPr id="16" name="TextBox 15"/>
+          <p:cNvSpPr txBox="1"/>
+          <p:nvPr/>
+        </p:nvSpPr>
+        <p:spPr>
+          <a:xfrm>
+            <a:off x="10424160" y="2386584"/>
+            <a:ext cx="1545336" cy="621792"/>
+          </a:xfrm>
+          <a:prstGeom prst="rect">
+            <a:avLst/>
+          </a:prstGeom>
+          <a:noFill/>
+        </p:spPr>
+        <p:txBody>
+          <a:bodyPr wrap="square" anchor="ctr" lIns="0" rIns="0" tIns="25400" bIns="25400">
+            <a:spAutoFit/>
+          </a:bodyPr>
+          <a:lstStyle/>
+          <a:p>
+            <a:pPr algn="ctr"/>
+            <a:r>
+              <a:rPr sz="1400" b="0" i="0">
+                <a:solidFill>
+                  <a:srgbClr val="334155"/>
+                </a:solidFill>
+                <a:latin typeface="Segoe UI"/>
+              </a:rPr>
+              <a:t>4,240</a:t>
+            </a:r>
+          </a:p>
+        </p:txBody>
+      </p:sp>
+      <p:sp>
+        <p:nvSpPr>
+          <p:cNvPr id="17" name="Rounded Rectangle 16"/>
           <p:cNvSpPr/>
           <p:nvPr/>
         </p:nvSpPr>
         <p:spPr>
           <a:xfrm>
-            <a:off x="8083296" y="2084831"/>
-            <a:ext cx="3621024" cy="3977639"/>
+            <a:off x="475488" y="3008376"/>
+            <a:ext cx="11567159" cy="621792"/>
           </a:xfrm>
           <a:prstGeom prst="roundRect">
             <a:avLst>
-              <a:gd name="adj" fmla="val 5000"/>
+              <a:gd name="adj" fmla="val 3000"/>
             </a:avLst>
           </a:prstGeom>
           <a:solidFill>
-            <a:srgbClr val="FDE4E4"/>
+            <a:srgbClr val="FFFFFF"/>
           </a:solidFill>
-          <a:ln>
-            <a:noFill/>
+          <a:ln w="12700">
+            <a:solidFill>
+              <a:srgbClr val="E2E8F0"/>
+            </a:solidFill>
           </a:ln>
           <a:effectLst/>
         </p:spPr>
@@ -8034,364 +7658,412 @@
       </p:sp>
       <p:sp>
         <p:nvSpPr>
+          <p:cNvPr id="18" name="TextBox 17"/>
+          <p:cNvSpPr txBox="1"/>
+          <p:nvPr/>
+        </p:nvSpPr>
+        <p:spPr>
+          <a:xfrm>
+            <a:off x="548640" y="3008376"/>
+            <a:ext cx="1956815" cy="621792"/>
+          </a:xfrm>
+          <a:prstGeom prst="rect">
+            <a:avLst/>
+          </a:prstGeom>
+          <a:noFill/>
+        </p:spPr>
+        <p:txBody>
+          <a:bodyPr wrap="square" anchor="ctr" lIns="0" rIns="0" tIns="25400" bIns="25400">
+            <a:spAutoFit/>
+          </a:bodyPr>
+          <a:lstStyle/>
+          <a:p>
+            <a:pPr algn="ctr"/>
+            <a:r>
+              <a:rPr sz="1400" b="1" i="0">
+                <a:solidFill>
+                  <a:srgbClr val="0F172A"/>
+                </a:solidFill>
+                <a:latin typeface="Segoe UI"/>
+              </a:rPr>
+              <a:t>🥈 TRANSLATED</a:t>
+            </a:r>
+          </a:p>
+        </p:txBody>
+      </p:sp>
+      <p:sp>
+        <p:nvSpPr>
+          <p:cNvPr id="19" name="TextBox 18"/>
+          <p:cNvSpPr txBox="1"/>
+          <p:nvPr/>
+        </p:nvSpPr>
+        <p:spPr>
+          <a:xfrm>
+            <a:off x="2651760" y="3008376"/>
+            <a:ext cx="4059935" cy="621792"/>
+          </a:xfrm>
+          <a:prstGeom prst="rect">
+            <a:avLst/>
+          </a:prstGeom>
+          <a:noFill/>
+        </p:spPr>
+        <p:txBody>
+          <a:bodyPr wrap="square" anchor="ctr" lIns="0" rIns="0" tIns="25400" bIns="25400">
+            <a:spAutoFit/>
+          </a:bodyPr>
+          <a:lstStyle/>
+          <a:p>
+            <a:pPr algn="ctr"/>
+            <a:r>
+              <a:rPr sz="1400" b="0" i="0">
+                <a:solidFill>
+                  <a:srgbClr val="334155"/>
+                </a:solidFill>
+                <a:latin typeface="Segoe UI"/>
+              </a:rPr>
+              <a:t>Yelp EN → MarianMT en-ru</a:t>
+            </a:r>
+          </a:p>
+        </p:txBody>
+      </p:sp>
+      <p:sp>
+        <p:nvSpPr>
+          <p:cNvPr id="20" name="TextBox 19"/>
+          <p:cNvSpPr txBox="1"/>
+          <p:nvPr/>
+        </p:nvSpPr>
+        <p:spPr>
+          <a:xfrm>
+            <a:off x="6858000" y="3008376"/>
+            <a:ext cx="1682496" cy="621792"/>
+          </a:xfrm>
+          <a:prstGeom prst="rect">
+            <a:avLst/>
+          </a:prstGeom>
+          <a:noFill/>
+        </p:spPr>
+        <p:txBody>
+          <a:bodyPr wrap="square" anchor="ctr" lIns="0" rIns="0" tIns="25400" bIns="25400">
+            <a:spAutoFit/>
+          </a:bodyPr>
+          <a:lstStyle/>
+          <a:p>
+            <a:pPr algn="ctr"/>
+            <a:r>
+              <a:rPr sz="1400" b="0" i="0">
+                <a:solidFill>
+                  <a:srgbClr val="334155"/>
+                </a:solidFill>
+                <a:latin typeface="Segoe UI"/>
+              </a:rPr>
+              <a:t>3,466</a:t>
+            </a:r>
+          </a:p>
+        </p:txBody>
+      </p:sp>
+      <p:sp>
+        <p:nvSpPr>
+          <p:cNvPr id="21" name="TextBox 20"/>
+          <p:cNvSpPr txBox="1"/>
+          <p:nvPr/>
+        </p:nvSpPr>
+        <p:spPr>
+          <a:xfrm>
+            <a:off x="8686800" y="3008376"/>
+            <a:ext cx="1591056" cy="621792"/>
+          </a:xfrm>
+          <a:prstGeom prst="rect">
+            <a:avLst/>
+          </a:prstGeom>
+          <a:noFill/>
+        </p:spPr>
+        <p:txBody>
+          <a:bodyPr wrap="square" anchor="ctr" lIns="0" rIns="0" tIns="25400" bIns="25400">
+            <a:spAutoFit/>
+          </a:bodyPr>
+          <a:lstStyle/>
+          <a:p>
+            <a:pPr algn="ctr"/>
+            <a:r>
+              <a:rPr sz="1400" b="0" i="0">
+                <a:solidFill>
+                  <a:srgbClr val="334155"/>
+                </a:solidFill>
+                <a:latin typeface="Segoe UI"/>
+              </a:rPr>
+              <a:t>3,000</a:t>
+            </a:r>
+          </a:p>
+        </p:txBody>
+      </p:sp>
+      <p:sp>
+        <p:nvSpPr>
+          <p:cNvPr id="22" name="TextBox 21"/>
+          <p:cNvSpPr txBox="1"/>
+          <p:nvPr/>
+        </p:nvSpPr>
+        <p:spPr>
+          <a:xfrm>
+            <a:off x="10424160" y="3008376"/>
+            <a:ext cx="1545336" cy="621792"/>
+          </a:xfrm>
+          <a:prstGeom prst="rect">
+            <a:avLst/>
+          </a:prstGeom>
+          <a:noFill/>
+        </p:spPr>
+        <p:txBody>
+          <a:bodyPr wrap="square" anchor="ctr" lIns="0" rIns="0" tIns="25400" bIns="25400">
+            <a:spAutoFit/>
+          </a:bodyPr>
+          <a:lstStyle/>
+          <a:p>
+            <a:pPr algn="ctr"/>
+            <a:r>
+              <a:rPr sz="1400" b="0" i="0">
+                <a:solidFill>
+                  <a:srgbClr val="334155"/>
+                </a:solidFill>
+                <a:latin typeface="Segoe UI"/>
+              </a:rPr>
+              <a:t>4,240</a:t>
+            </a:r>
+          </a:p>
+        </p:txBody>
+      </p:sp>
+      <p:sp>
+        <p:nvSpPr>
+          <p:cNvPr id="23" name="Rounded Rectangle 22"/>
+          <p:cNvSpPr/>
+          <p:nvPr/>
+        </p:nvSpPr>
+        <p:spPr>
+          <a:xfrm>
+            <a:off x="475488" y="3630168"/>
+            <a:ext cx="11567159" cy="621792"/>
+          </a:xfrm>
+          <a:prstGeom prst="roundRect">
+            <a:avLst>
+              <a:gd name="adj" fmla="val 3000"/>
+            </a:avLst>
+          </a:prstGeom>
+          <a:solidFill>
+            <a:srgbClr val="FFFFFF"/>
+          </a:solidFill>
+          <a:ln w="12700">
+            <a:solidFill>
+              <a:srgbClr val="E2E8F0"/>
+            </a:solidFill>
+          </a:ln>
+          <a:effectLst/>
+        </p:spPr>
+        <p:style>
+          <a:lnRef idx="1">
+            <a:schemeClr val="accent1"/>
+          </a:lnRef>
+          <a:fillRef idx="3">
+            <a:schemeClr val="accent1"/>
+          </a:fillRef>
+          <a:effectRef idx="2">
+            <a:schemeClr val="accent1"/>
+          </a:effectRef>
+          <a:fontRef idx="minor">
+            <a:schemeClr val="lt1"/>
+          </a:fontRef>
+        </p:style>
+        <p:txBody>
+          <a:bodyPr rtlCol="0" anchor="ctr"/>
+          <a:lstStyle/>
+          <a:p>
+            <a:pPr algn="ctr"/>
+          </a:p>
+        </p:txBody>
+      </p:sp>
+      <p:sp>
+        <p:nvSpPr>
+          <p:cNvPr id="24" name="TextBox 23"/>
+          <p:cNvSpPr txBox="1"/>
+          <p:nvPr/>
+        </p:nvSpPr>
+        <p:spPr>
+          <a:xfrm>
+            <a:off x="548640" y="3630168"/>
+            <a:ext cx="1956815" cy="621792"/>
+          </a:xfrm>
+          <a:prstGeom prst="rect">
+            <a:avLst/>
+          </a:prstGeom>
+          <a:noFill/>
+        </p:spPr>
+        <p:txBody>
+          <a:bodyPr wrap="square" anchor="ctr" lIns="0" rIns="0" tIns="25400" bIns="25400">
+            <a:spAutoFit/>
+          </a:bodyPr>
+          <a:lstStyle/>
+          <a:p>
+            <a:pPr algn="ctr"/>
+            <a:r>
+              <a:rPr sz="1400" b="1" i="0">
+                <a:solidFill>
+                  <a:srgbClr val="0F172A"/>
+                </a:solidFill>
+                <a:latin typeface="Segoe UI"/>
+              </a:rPr>
+              <a:t>🥉 GENERATED</a:t>
+            </a:r>
+          </a:p>
+        </p:txBody>
+      </p:sp>
+      <p:sp>
+        <p:nvSpPr>
+          <p:cNvPr id="25" name="TextBox 24"/>
+          <p:cNvSpPr txBox="1"/>
+          <p:nvPr/>
+        </p:nvSpPr>
+        <p:spPr>
+          <a:xfrm>
+            <a:off x="2651760" y="3630168"/>
+            <a:ext cx="4059935" cy="621792"/>
+          </a:xfrm>
+          <a:prstGeom prst="rect">
+            <a:avLst/>
+          </a:prstGeom>
+          <a:noFill/>
+        </p:spPr>
+        <p:txBody>
+          <a:bodyPr wrap="square" anchor="ctr" lIns="0" rIns="0" tIns="25400" bIns="25400">
+            <a:spAutoFit/>
+          </a:bodyPr>
+          <a:lstStyle/>
+          <a:p>
+            <a:pPr algn="ctr"/>
+            <a:r>
+              <a:rPr sz="1400" b="0" i="0">
+                <a:solidFill>
+                  <a:srgbClr val="334155"/>
+                </a:solidFill>
+                <a:latin typeface="Segoe UI"/>
+              </a:rPr>
+              <a:t>DeepSeek native RU</a:t>
+            </a:r>
+          </a:p>
+        </p:txBody>
+      </p:sp>
+      <p:sp>
+        <p:nvSpPr>
+          <p:cNvPr id="26" name="TextBox 25"/>
+          <p:cNvSpPr txBox="1"/>
+          <p:nvPr/>
+        </p:nvSpPr>
+        <p:spPr>
+          <a:xfrm>
+            <a:off x="6858000" y="3630168"/>
+            <a:ext cx="1682496" cy="621792"/>
+          </a:xfrm>
+          <a:prstGeom prst="rect">
+            <a:avLst/>
+          </a:prstGeom>
+          <a:noFill/>
+        </p:spPr>
+        <p:txBody>
+          <a:bodyPr wrap="square" anchor="ctr" lIns="0" rIns="0" tIns="25400" bIns="25400">
+            <a:spAutoFit/>
+          </a:bodyPr>
+          <a:lstStyle/>
+          <a:p>
+            <a:pPr algn="ctr"/>
+            <a:r>
+              <a:rPr sz="1400" b="0" i="0">
+                <a:solidFill>
+                  <a:srgbClr val="334155"/>
+                </a:solidFill>
+                <a:latin typeface="Segoe UI"/>
+              </a:rPr>
+              <a:t>4,000</a:t>
+            </a:r>
+          </a:p>
+        </p:txBody>
+      </p:sp>
+      <p:sp>
+        <p:nvSpPr>
+          <p:cNvPr id="27" name="TextBox 26"/>
+          <p:cNvSpPr txBox="1"/>
+          <p:nvPr/>
+        </p:nvSpPr>
+        <p:spPr>
+          <a:xfrm>
+            <a:off x="8686800" y="3630168"/>
+            <a:ext cx="1591056" cy="621792"/>
+          </a:xfrm>
+          <a:prstGeom prst="rect">
+            <a:avLst/>
+          </a:prstGeom>
+          <a:noFill/>
+        </p:spPr>
+        <p:txBody>
+          <a:bodyPr wrap="square" anchor="ctr" lIns="0" rIns="0" tIns="25400" bIns="25400">
+            <a:spAutoFit/>
+          </a:bodyPr>
+          <a:lstStyle/>
+          <a:p>
+            <a:pPr algn="ctr"/>
+            <a:r>
+              <a:rPr sz="1400" b="0" i="0">
+                <a:solidFill>
+                  <a:srgbClr val="334155"/>
+                </a:solidFill>
+                <a:latin typeface="Segoe UI"/>
+              </a:rPr>
+              <a:t>3,000</a:t>
+            </a:r>
+          </a:p>
+        </p:txBody>
+      </p:sp>
+      <p:sp>
+        <p:nvSpPr>
           <p:cNvPr id="28" name="TextBox 27"/>
           <p:cNvSpPr txBox="1"/>
           <p:nvPr/>
         </p:nvSpPr>
         <p:spPr>
           <a:xfrm>
-            <a:off x="8284464" y="2249424"/>
-            <a:ext cx="3246120" cy="411480"/>
-          </a:xfrm>
-          <a:prstGeom prst="rect">
-            <a:avLst/>
-          </a:prstGeom>
-          <a:noFill/>
-        </p:spPr>
-        <p:txBody>
-          <a:bodyPr wrap="square" lIns="0" rIns="0" tIns="25400" bIns="25400">
-            <a:spAutoFit/>
-          </a:bodyPr>
-          <a:lstStyle/>
-          <a:p>
-            <a:pPr algn="l"/>
-            <a:r>
-              <a:rPr sz="1700" b="1" i="0">
-                <a:solidFill>
-                  <a:srgbClr val="DC2626"/>
-                </a:solidFill>
-                <a:latin typeface="Segoe UI"/>
-              </a:rPr>
-              <a:t>🥉  GENERATED</a:t>
-            </a:r>
-          </a:p>
-        </p:txBody>
-      </p:sp>
-      <p:sp>
-        <p:nvSpPr>
-          <p:cNvPr id="29" name="TextBox 28"/>
-          <p:cNvSpPr txBox="1"/>
-          <p:nvPr/>
-        </p:nvSpPr>
-        <p:spPr>
-          <a:xfrm>
-            <a:off x="8284464" y="2688336"/>
-            <a:ext cx="3246120" cy="365760"/>
-          </a:xfrm>
-          <a:prstGeom prst="rect">
-            <a:avLst/>
-          </a:prstGeom>
-          <a:noFill/>
-        </p:spPr>
-        <p:txBody>
-          <a:bodyPr wrap="square" lIns="0" rIns="0" tIns="25400" bIns="25400">
-            <a:spAutoFit/>
-          </a:bodyPr>
-          <a:lstStyle/>
-          <a:p>
-            <a:pPr algn="l"/>
-            <a:r>
-              <a:rPr sz="1250" b="0" i="1">
-                <a:solidFill>
-                  <a:srgbClr val="DC2626"/>
-                </a:solidFill>
-                <a:latin typeface="Segoe UI"/>
-              </a:rPr>
-              <a:t>DeepSeek native Russian</a:t>
-            </a:r>
-          </a:p>
-        </p:txBody>
-      </p:sp>
-      <p:sp>
-        <p:nvSpPr>
-          <p:cNvPr id="30" name="TextBox 29"/>
-          <p:cNvSpPr txBox="1"/>
-          <p:nvPr/>
-        </p:nvSpPr>
-        <p:spPr>
-          <a:xfrm>
-            <a:off x="8284464" y="3200400"/>
-            <a:ext cx="3200400" cy="256032"/>
-          </a:xfrm>
-          <a:prstGeom prst="rect">
-            <a:avLst/>
-          </a:prstGeom>
-          <a:noFill/>
-        </p:spPr>
-        <p:txBody>
-          <a:bodyPr wrap="square" lIns="0" rIns="0" tIns="25400" bIns="25400">
-            <a:spAutoFit/>
-          </a:bodyPr>
-          <a:lstStyle/>
-          <a:p>
-            <a:pPr algn="l"/>
-            <a:r>
-              <a:rPr sz="1050" b="1" i="0" spc="40">
-                <a:solidFill>
-                  <a:srgbClr val="64748B"/>
-                </a:solidFill>
-                <a:latin typeface="Segoe UI"/>
-              </a:rPr>
-              <a:t>POOL SIZE</a:t>
-            </a:r>
-          </a:p>
-        </p:txBody>
-      </p:sp>
-      <p:sp>
-        <p:nvSpPr>
-          <p:cNvPr id="31" name="TextBox 30"/>
-          <p:cNvSpPr txBox="1"/>
-          <p:nvPr/>
-        </p:nvSpPr>
-        <p:spPr>
-          <a:xfrm>
-            <a:off x="8284464" y="3456432"/>
-            <a:ext cx="3200400" cy="384048"/>
-          </a:xfrm>
-          <a:prstGeom prst="rect">
-            <a:avLst/>
-          </a:prstGeom>
-          <a:noFill/>
-        </p:spPr>
-        <p:txBody>
-          <a:bodyPr wrap="square" lIns="0" rIns="0" tIns="25400" bIns="25400">
-            <a:spAutoFit/>
-          </a:bodyPr>
-          <a:lstStyle/>
-          <a:p>
-            <a:pPr algn="l"/>
-            <a:r>
-              <a:rPr sz="1350" b="1" i="0">
-                <a:solidFill>
-                  <a:srgbClr val="0F172A"/>
-                </a:solidFill>
-                <a:latin typeface="Segoe UI"/>
-              </a:rPr>
-              <a:t>4,000</a:t>
-            </a:r>
-          </a:p>
-        </p:txBody>
-      </p:sp>
-      <p:sp>
-        <p:nvSpPr>
-          <p:cNvPr id="32" name="TextBox 31"/>
-          <p:cNvSpPr txBox="1"/>
-          <p:nvPr/>
-        </p:nvSpPr>
-        <p:spPr>
-          <a:xfrm>
-            <a:off x="8284464" y="3858768"/>
-            <a:ext cx="3200400" cy="256032"/>
-          </a:xfrm>
-          <a:prstGeom prst="rect">
-            <a:avLst/>
-          </a:prstGeom>
-          <a:noFill/>
-        </p:spPr>
-        <p:txBody>
-          <a:bodyPr wrap="square" lIns="0" rIns="0" tIns="25400" bIns="25400">
-            <a:spAutoFit/>
-          </a:bodyPr>
-          <a:lstStyle/>
-          <a:p>
-            <a:pPr algn="l"/>
-            <a:r>
-              <a:rPr sz="1050" b="1" i="0" spc="40">
-                <a:solidFill>
-                  <a:srgbClr val="64748B"/>
-                </a:solidFill>
-                <a:latin typeface="Segoe UI"/>
-              </a:rPr>
-              <a:t>CONSTRUCTION</a:t>
-            </a:r>
-          </a:p>
-        </p:txBody>
-      </p:sp>
-      <p:sp>
-        <p:nvSpPr>
-          <p:cNvPr id="33" name="TextBox 32"/>
-          <p:cNvSpPr txBox="1"/>
-          <p:nvPr/>
-        </p:nvSpPr>
-        <p:spPr>
-          <a:xfrm>
-            <a:off x="8284464" y="4114800"/>
-            <a:ext cx="3200400" cy="384048"/>
-          </a:xfrm>
-          <a:prstGeom prst="rect">
-            <a:avLst/>
-          </a:prstGeom>
-          <a:noFill/>
-        </p:spPr>
-        <p:txBody>
-          <a:bodyPr wrap="square" lIns="0" rIns="0" tIns="25400" bIns="25400">
-            <a:spAutoFit/>
-          </a:bodyPr>
-          <a:lstStyle/>
-          <a:p>
-            <a:pPr algn="l"/>
-            <a:r>
-              <a:rPr sz="1350" b="1" i="0">
-                <a:solidFill>
-                  <a:srgbClr val="0F172A"/>
-                </a:solidFill>
-                <a:latin typeface="Segoe UI"/>
-              </a:rPr>
-              <a:t>LLM-generated Russian restaurant text</a:t>
-            </a:r>
-          </a:p>
-        </p:txBody>
-      </p:sp>
-      <p:sp>
-        <p:nvSpPr>
-          <p:cNvPr id="34" name="TextBox 33"/>
-          <p:cNvSpPr txBox="1"/>
-          <p:nvPr/>
-        </p:nvSpPr>
-        <p:spPr>
-          <a:xfrm>
-            <a:off x="8284464" y="4517136"/>
-            <a:ext cx="3200400" cy="256032"/>
-          </a:xfrm>
-          <a:prstGeom prst="rect">
-            <a:avLst/>
-          </a:prstGeom>
-          <a:noFill/>
-        </p:spPr>
-        <p:txBody>
-          <a:bodyPr wrap="square" lIns="0" rIns="0" tIns="25400" bIns="25400">
-            <a:spAutoFit/>
-          </a:bodyPr>
-          <a:lstStyle/>
-          <a:p>
-            <a:pPr algn="l"/>
-            <a:r>
-              <a:rPr sz="1050" b="1" i="0" spc="40">
-                <a:solidFill>
-                  <a:srgbClr val="64748B"/>
-                </a:solidFill>
-                <a:latin typeface="Segoe UI"/>
-              </a:rPr>
-              <a:t>SILVER (CAPPED)</a:t>
-            </a:r>
-          </a:p>
-        </p:txBody>
-      </p:sp>
-      <p:sp>
-        <p:nvSpPr>
-          <p:cNvPr id="35" name="TextBox 34"/>
-          <p:cNvSpPr txBox="1"/>
-          <p:nvPr/>
-        </p:nvSpPr>
-        <p:spPr>
-          <a:xfrm>
-            <a:off x="8284464" y="4773168"/>
-            <a:ext cx="3200400" cy="384048"/>
-          </a:xfrm>
-          <a:prstGeom prst="rect">
-            <a:avLst/>
-          </a:prstGeom>
-          <a:noFill/>
-        </p:spPr>
-        <p:txBody>
-          <a:bodyPr wrap="square" lIns="0" rIns="0" tIns="25400" bIns="25400">
-            <a:spAutoFit/>
-          </a:bodyPr>
-          <a:lstStyle/>
-          <a:p>
-            <a:pPr algn="l"/>
-            <a:r>
-              <a:rPr sz="1350" b="1" i="0">
-                <a:solidFill>
-                  <a:srgbClr val="0F172A"/>
-                </a:solidFill>
-                <a:latin typeface="Segoe UI"/>
-              </a:rPr>
-              <a:t>3,000</a:t>
-            </a:r>
-          </a:p>
-        </p:txBody>
-      </p:sp>
-      <p:sp>
-        <p:nvSpPr>
-          <p:cNvPr id="36" name="TextBox 35"/>
-          <p:cNvSpPr txBox="1"/>
-          <p:nvPr/>
-        </p:nvSpPr>
-        <p:spPr>
-          <a:xfrm>
-            <a:off x="8284464" y="5175503"/>
-            <a:ext cx="3200400" cy="256032"/>
-          </a:xfrm>
-          <a:prstGeom prst="rect">
-            <a:avLst/>
-          </a:prstGeom>
-          <a:noFill/>
-        </p:spPr>
-        <p:txBody>
-          <a:bodyPr wrap="square" lIns="0" rIns="0" tIns="25400" bIns="25400">
-            <a:spAutoFit/>
-          </a:bodyPr>
-          <a:lstStyle/>
-          <a:p>
-            <a:pPr algn="l"/>
-            <a:r>
-              <a:rPr sz="1050" b="1" i="0" spc="40">
-                <a:solidFill>
-                  <a:srgbClr val="64748B"/>
-                </a:solidFill>
-                <a:latin typeface="Segoe UI"/>
-              </a:rPr>
-              <a:t>TRAIN FILE</a:t>
-            </a:r>
-          </a:p>
-        </p:txBody>
-      </p:sp>
-      <p:sp>
-        <p:nvSpPr>
-          <p:cNvPr id="37" name="TextBox 36"/>
-          <p:cNvSpPr txBox="1"/>
-          <p:nvPr/>
-        </p:nvSpPr>
-        <p:spPr>
-          <a:xfrm>
-            <a:off x="8284464" y="5431536"/>
-            <a:ext cx="3200400" cy="384048"/>
-          </a:xfrm>
-          <a:prstGeom prst="rect">
-            <a:avLst/>
-          </a:prstGeom>
-          <a:noFill/>
-        </p:spPr>
-        <p:txBody>
-          <a:bodyPr wrap="square" lIns="0" rIns="0" tIns="25400" bIns="25400">
-            <a:spAutoFit/>
-          </a:bodyPr>
-          <a:lstStyle/>
-          <a:p>
-            <a:pPr algn="l"/>
-            <a:r>
-              <a:rPr sz="1350" b="1" i="0">
-                <a:solidFill>
-                  <a:srgbClr val="0F172A"/>
-                </a:solidFill>
-                <a:latin typeface="Segoe UI"/>
-              </a:rPr>
-              <a:t>4,240 rows (pending)</a:t>
-            </a:r>
-          </a:p>
-        </p:txBody>
-      </p:sp>
-      <p:sp>
-        <p:nvSpPr>
-          <p:cNvPr id="38" name="Rounded Rectangle 37"/>
+            <a:off x="10424160" y="3630168"/>
+            <a:ext cx="1545336" cy="621792"/>
+          </a:xfrm>
+          <a:prstGeom prst="rect">
+            <a:avLst/>
+          </a:prstGeom>
+          <a:noFill/>
+        </p:spPr>
+        <p:txBody>
+          <a:bodyPr wrap="square" anchor="ctr" lIns="0" rIns="0" tIns="25400" bIns="25400">
+            <a:spAutoFit/>
+          </a:bodyPr>
+          <a:lstStyle/>
+          <a:p>
+            <a:pPr algn="ctr"/>
+            <a:r>
+              <a:rPr sz="1400" b="0" i="0">
+                <a:solidFill>
+                  <a:srgbClr val="334155"/>
+                </a:solidFill>
+                <a:latin typeface="Segoe UI"/>
+              </a:rPr>
+              <a:t>4,240 (pending)</a:t>
+            </a:r>
+          </a:p>
+        </p:txBody>
+      </p:sp>
+      <p:sp>
+        <p:nvSpPr>
+          <p:cNvPr id="29" name="Rounded Rectangle 28"/>
           <p:cNvSpPr/>
           <p:nvPr/>
         </p:nvSpPr>
         <p:spPr>
           <a:xfrm>
-            <a:off x="475488" y="6199632"/>
-            <a:ext cx="11247120" cy="548640"/>
+            <a:off x="475488" y="4526280"/>
+            <a:ext cx="11247120" cy="594360"/>
           </a:xfrm>
           <a:prstGeom prst="roundRect">
             <a:avLst>
@@ -8430,14 +8102,14 @@
       </p:sp>
       <p:sp>
         <p:nvSpPr>
-          <p:cNvPr id="39" name="TextBox 38"/>
-          <p:cNvSpPr txBox="1"/>
-          <p:nvPr/>
-        </p:nvSpPr>
-        <p:spPr>
-          <a:xfrm>
-            <a:off x="676656" y="6272784"/>
-            <a:ext cx="10881360" cy="384048"/>
+          <p:cNvPr id="30" name="TextBox 29"/>
+          <p:cNvSpPr txBox="1"/>
+          <p:nvPr/>
+        </p:nvSpPr>
+        <p:spPr>
+          <a:xfrm>
+            <a:off x="676656" y="4617720"/>
+            <a:ext cx="10881360" cy="411480"/>
           </a:xfrm>
           <a:prstGeom prst="rect">
             <a:avLst/>
@@ -8452,13 +8124,13 @@
           <a:p>
             <a:pPr algn="l"/>
             <a:r>
-              <a:rPr sz="1350" b="1" i="0">
+              <a:rPr sz="1400" b="1" i="0">
                 <a:solidFill>
                   <a:srgbClr val="1D4ED8"/>
                 </a:solidFill>
                 <a:latin typeface="Segoe UI"/>
               </a:rPr>
-              <a:t>This one experiment closes all 3 gaps: pool-size confound · real-vs-translated link · 2nd real&gt;generated data point</a:t>
+              <a:t>Closes: pool-size confound  ·  real ↔ translated link  ·  2nd real &gt; gen point</a:t>
             </a:r>
           </a:p>
         </p:txBody>
@@ -8554,7 +8226,7 @@
                 </a:solidFill>
                 <a:latin typeface="Segoe UI"/>
               </a:rPr>
-              <a:t>Where the Three Arms Stand Right Now</a:t>
+              <a:t>Where the Three Arms Stand</a:t>
             </a:r>
           </a:p>
         </p:txBody>
@@ -8567,16 +8239,16 @@
         </p:nvSpPr>
         <p:spPr>
           <a:xfrm>
-            <a:off x="475488" y="1572768"/>
-            <a:ext cx="11247120" cy="1078992"/>
+            <a:off x="914400" y="1737360"/>
+            <a:ext cx="9326880" cy="420624"/>
           </a:xfrm>
           <a:prstGeom prst="roundRect">
             <a:avLst>
-              <a:gd name="adj" fmla="val 6000"/>
+              <a:gd name="adj" fmla="val 8000"/>
             </a:avLst>
           </a:prstGeom>
           <a:solidFill>
-            <a:srgbClr val="D6F2E4"/>
+            <a:srgbClr val="F1F5F9"/>
           </a:solidFill>
           <a:ln>
             <a:noFill/>
@@ -8613,54 +8285,161 @@
         </p:nvSpPr>
         <p:spPr>
           <a:xfrm>
-            <a:off x="713232" y="1572768"/>
-            <a:ext cx="2377440" cy="1078992"/>
-          </a:xfrm>
-          <a:prstGeom prst="rect">
-            <a:avLst/>
-          </a:prstGeom>
-          <a:noFill/>
-        </p:spPr>
-        <p:txBody>
-          <a:bodyPr wrap="square" anchor="ctr" lIns="0" rIns="0" tIns="25400" bIns="25400">
-            <a:spAutoFit/>
-          </a:bodyPr>
-          <a:lstStyle/>
-          <a:p>
-            <a:pPr algn="l"/>
-            <a:r>
-              <a:rPr sz="1900" b="1" i="0">
-                <a:solidFill>
-                  <a:srgbClr val="047857"/>
-                </a:solidFill>
-                <a:latin typeface="Consolas"/>
-              </a:rPr>
-              <a:t>REAL</a:t>
-            </a:r>
-          </a:p>
-        </p:txBody>
-      </p:sp>
-      <p:sp>
-        <p:nvSpPr>
-          <p:cNvPr id="6" name="Rounded Rectangle 5"/>
+            <a:off x="987552" y="1792224"/>
+            <a:ext cx="2231136" cy="310896"/>
+          </a:xfrm>
+          <a:prstGeom prst="rect">
+            <a:avLst/>
+          </a:prstGeom>
+          <a:noFill/>
+        </p:spPr>
+        <p:txBody>
+          <a:bodyPr wrap="square" lIns="0" rIns="0" tIns="25400" bIns="25400">
+            <a:spAutoFit/>
+          </a:bodyPr>
+          <a:lstStyle/>
+          <a:p>
+            <a:pPr algn="ctr"/>
+            <a:r>
+              <a:rPr sz="1200" b="1" i="0" spc="40">
+                <a:solidFill>
+                  <a:srgbClr val="64748B"/>
+                </a:solidFill>
+                <a:latin typeface="Segoe UI"/>
+              </a:rPr>
+              <a:t>ARM</a:t>
+            </a:r>
+          </a:p>
+        </p:txBody>
+      </p:sp>
+      <p:sp>
+        <p:nvSpPr>
+          <p:cNvPr id="6" name="TextBox 5"/>
+          <p:cNvSpPr txBox="1"/>
+          <p:nvPr/>
+        </p:nvSpPr>
+        <p:spPr>
+          <a:xfrm>
+            <a:off x="3364992" y="1792224"/>
+            <a:ext cx="2414015" cy="310896"/>
+          </a:xfrm>
+          <a:prstGeom prst="rect">
+            <a:avLst/>
+          </a:prstGeom>
+          <a:noFill/>
+        </p:spPr>
+        <p:txBody>
+          <a:bodyPr wrap="square" lIns="0" rIns="0" tIns="25400" bIns="25400">
+            <a:spAutoFit/>
+          </a:bodyPr>
+          <a:lstStyle/>
+          <a:p>
+            <a:pPr algn="ctr"/>
+            <a:r>
+              <a:rPr sz="1200" b="1" i="0" spc="40">
+                <a:solidFill>
+                  <a:srgbClr val="64748B"/>
+                </a:solidFill>
+                <a:latin typeface="Segoe UI"/>
+              </a:rPr>
+              <a:t>STATUS</a:t>
+            </a:r>
+          </a:p>
+        </p:txBody>
+      </p:sp>
+      <p:sp>
+        <p:nvSpPr>
+          <p:cNvPr id="7" name="TextBox 6"/>
+          <p:cNvSpPr txBox="1"/>
+          <p:nvPr/>
+        </p:nvSpPr>
+        <p:spPr>
+          <a:xfrm>
+            <a:off x="5925312" y="1792224"/>
+            <a:ext cx="2048255" cy="310896"/>
+          </a:xfrm>
+          <a:prstGeom prst="rect">
+            <a:avLst/>
+          </a:prstGeom>
+          <a:noFill/>
+        </p:spPr>
+        <p:txBody>
+          <a:bodyPr wrap="square" lIns="0" rIns="0" tIns="25400" bIns="25400">
+            <a:spAutoFit/>
+          </a:bodyPr>
+          <a:lstStyle/>
+          <a:p>
+            <a:pPr algn="ctr"/>
+            <a:r>
+              <a:rPr sz="1200" b="1" i="0" spc="40">
+                <a:solidFill>
+                  <a:srgbClr val="64748B"/>
+                </a:solidFill>
+                <a:latin typeface="Segoe UI"/>
+              </a:rPr>
+              <a:t>SEEDS</a:t>
+            </a:r>
+          </a:p>
+        </p:txBody>
+      </p:sp>
+      <p:sp>
+        <p:nvSpPr>
+          <p:cNvPr id="8" name="TextBox 7"/>
+          <p:cNvSpPr txBox="1"/>
+          <p:nvPr/>
+        </p:nvSpPr>
+        <p:spPr>
+          <a:xfrm>
+            <a:off x="8119872" y="1792224"/>
+            <a:ext cx="2048255" cy="310896"/>
+          </a:xfrm>
+          <a:prstGeom prst="rect">
+            <a:avLst/>
+          </a:prstGeom>
+          <a:noFill/>
+        </p:spPr>
+        <p:txBody>
+          <a:bodyPr wrap="square" lIns="0" rIns="0" tIns="25400" bIns="25400">
+            <a:spAutoFit/>
+          </a:bodyPr>
+          <a:lstStyle/>
+          <a:p>
+            <a:pPr algn="ctr"/>
+            <a:r>
+              <a:rPr sz="1200" b="1" i="0" spc="40">
+                <a:solidFill>
+                  <a:srgbClr val="64748B"/>
+                </a:solidFill>
+                <a:latin typeface="Segoe UI"/>
+              </a:rPr>
+              <a:t>DEV cF1</a:t>
+            </a:r>
+          </a:p>
+        </p:txBody>
+      </p:sp>
+      <p:sp>
+        <p:nvSpPr>
+          <p:cNvPr id="9" name="Rounded Rectangle 8"/>
           <p:cNvSpPr/>
           <p:nvPr/>
         </p:nvSpPr>
         <p:spPr>
           <a:xfrm>
-            <a:off x="3200400" y="1956816"/>
-            <a:ext cx="1691640" cy="329184"/>
+            <a:off x="914400" y="2157984"/>
+            <a:ext cx="9326880" cy="658368"/>
           </a:xfrm>
           <a:prstGeom prst="roundRect">
             <a:avLst>
-              <a:gd name="adj" fmla="val 50000"/>
+              <a:gd name="adj" fmla="val 3000"/>
             </a:avLst>
           </a:prstGeom>
           <a:solidFill>
-            <a:srgbClr val="10B981"/>
+            <a:srgbClr val="D6F2E4"/>
           </a:solidFill>
-          <a:ln>
-            <a:noFill/>
+          <a:ln w="12700">
+            <a:solidFill>
+              <a:srgbClr val="E2E8F0"/>
+            </a:solidFill>
           </a:ln>
           <a:effectLst/>
         </p:spPr>
@@ -8679,43 +8458,176 @@
           </a:fontRef>
         </p:style>
         <p:txBody>
-          <a:bodyPr rtlCol="0" anchor="ctr" wrap="none" lIns="0" rIns="0" tIns="0" bIns="0"/>
-          <a:lstStyle/>
-          <a:p>
-            <a:pPr algn="ctr"/>
-            <a:r>
-              <a:rPr sz="1100" b="1" spc="80">
-                <a:solidFill>
-                  <a:srgbClr val="FFFFFF"/>
-                </a:solidFill>
-                <a:latin typeface="Segoe UI"/>
-              </a:rPr>
-              <a:t>COMPLETE</a:t>
-            </a:r>
-          </a:p>
-        </p:txBody>
-      </p:sp>
-      <p:sp>
-        <p:nvSpPr>
-          <p:cNvPr id="7" name="Rounded Rectangle 6"/>
+          <a:bodyPr rtlCol="0" anchor="ctr"/>
+          <a:lstStyle/>
+          <a:p>
+            <a:pPr algn="ctr"/>
+          </a:p>
+        </p:txBody>
+      </p:sp>
+      <p:sp>
+        <p:nvSpPr>
+          <p:cNvPr id="10" name="TextBox 9"/>
+          <p:cNvSpPr txBox="1"/>
+          <p:nvPr/>
+        </p:nvSpPr>
+        <p:spPr>
+          <a:xfrm>
+            <a:off x="987552" y="2157984"/>
+            <a:ext cx="2231136" cy="658368"/>
+          </a:xfrm>
+          <a:prstGeom prst="rect">
+            <a:avLst/>
+          </a:prstGeom>
+          <a:noFill/>
+        </p:spPr>
+        <p:txBody>
+          <a:bodyPr wrap="square" anchor="ctr" lIns="0" rIns="0" tIns="25400" bIns="25400">
+            <a:spAutoFit/>
+          </a:bodyPr>
+          <a:lstStyle/>
+          <a:p>
+            <a:pPr algn="ctr"/>
+            <a:r>
+              <a:rPr sz="1550" b="1" i="0">
+                <a:solidFill>
+                  <a:srgbClr val="0F172A"/>
+                </a:solidFill>
+                <a:latin typeface="Segoe UI"/>
+              </a:rPr>
+              <a:t>REAL</a:t>
+            </a:r>
+          </a:p>
+        </p:txBody>
+      </p:sp>
+      <p:sp>
+        <p:nvSpPr>
+          <p:cNvPr id="11" name="TextBox 10"/>
+          <p:cNvSpPr txBox="1"/>
+          <p:nvPr/>
+        </p:nvSpPr>
+        <p:spPr>
+          <a:xfrm>
+            <a:off x="3364992" y="2157984"/>
+            <a:ext cx="2414015" cy="658368"/>
+          </a:xfrm>
+          <a:prstGeom prst="rect">
+            <a:avLst/>
+          </a:prstGeom>
+          <a:noFill/>
+        </p:spPr>
+        <p:txBody>
+          <a:bodyPr wrap="square" anchor="ctr" lIns="0" rIns="0" tIns="25400" bIns="25400">
+            <a:spAutoFit/>
+          </a:bodyPr>
+          <a:lstStyle/>
+          <a:p>
+            <a:pPr algn="ctr"/>
+            <a:r>
+              <a:rPr sz="1550" b="0" i="0">
+                <a:solidFill>
+                  <a:srgbClr val="334155"/>
+                </a:solidFill>
+                <a:latin typeface="Segoe UI"/>
+              </a:rPr>
+              <a:t>✅ COMPLETE</a:t>
+            </a:r>
+          </a:p>
+        </p:txBody>
+      </p:sp>
+      <p:sp>
+        <p:nvSpPr>
+          <p:cNvPr id="12" name="TextBox 11"/>
+          <p:cNvSpPr txBox="1"/>
+          <p:nvPr/>
+        </p:nvSpPr>
+        <p:spPr>
+          <a:xfrm>
+            <a:off x="5925312" y="2157984"/>
+            <a:ext cx="2048255" cy="658368"/>
+          </a:xfrm>
+          <a:prstGeom prst="rect">
+            <a:avLst/>
+          </a:prstGeom>
+          <a:noFill/>
+        </p:spPr>
+        <p:txBody>
+          <a:bodyPr wrap="square" anchor="ctr" lIns="0" rIns="0" tIns="25400" bIns="25400">
+            <a:spAutoFit/>
+          </a:bodyPr>
+          <a:lstStyle/>
+          <a:p>
+            <a:pPr algn="ctr"/>
+            <a:r>
+              <a:rPr sz="1550" b="0" i="0">
+                <a:solidFill>
+                  <a:srgbClr val="334155"/>
+                </a:solidFill>
+                <a:latin typeface="Segoe UI"/>
+              </a:rPr>
+              <a:t>5 / 5</a:t>
+            </a:r>
+          </a:p>
+        </p:txBody>
+      </p:sp>
+      <p:sp>
+        <p:nvSpPr>
+          <p:cNvPr id="13" name="TextBox 12"/>
+          <p:cNvSpPr txBox="1"/>
+          <p:nvPr/>
+        </p:nvSpPr>
+        <p:spPr>
+          <a:xfrm>
+            <a:off x="8119872" y="2157984"/>
+            <a:ext cx="2048255" cy="658368"/>
+          </a:xfrm>
+          <a:prstGeom prst="rect">
+            <a:avLst/>
+          </a:prstGeom>
+          <a:noFill/>
+        </p:spPr>
+        <p:txBody>
+          <a:bodyPr wrap="square" anchor="ctr" lIns="0" rIns="0" tIns="25400" bIns="25400">
+            <a:spAutoFit/>
+          </a:bodyPr>
+          <a:lstStyle/>
+          <a:p>
+            <a:pPr algn="ctr"/>
+            <a:r>
+              <a:rPr sz="1550" b="0" i="0">
+                <a:solidFill>
+                  <a:srgbClr val="334155"/>
+                </a:solidFill>
+                <a:latin typeface="Segoe UI"/>
+              </a:rPr>
+              <a:t>0.5586</a:t>
+            </a:r>
+          </a:p>
+        </p:txBody>
+      </p:sp>
+      <p:sp>
+        <p:nvSpPr>
+          <p:cNvPr id="14" name="Rounded Rectangle 13"/>
           <p:cNvSpPr/>
           <p:nvPr/>
         </p:nvSpPr>
         <p:spPr>
           <a:xfrm>
-            <a:off x="5212080" y="1975104"/>
-            <a:ext cx="4114800" cy="292608"/>
+            <a:off x="914400" y="2816352"/>
+            <a:ext cx="9326880" cy="658368"/>
           </a:xfrm>
           <a:prstGeom prst="roundRect">
             <a:avLst>
-              <a:gd name="adj" fmla="val 50000"/>
+              <a:gd name="adj" fmla="val 3000"/>
             </a:avLst>
           </a:prstGeom>
           <a:solidFill>
             <a:srgbClr val="FFFFFF"/>
           </a:solidFill>
-          <a:ln>
-            <a:noFill/>
+          <a:ln w="12700">
+            <a:solidFill>
+              <a:srgbClr val="E2E8F0"/>
+            </a:solidFill>
           </a:ln>
           <a:effectLst/>
         </p:spPr>
@@ -8743,25 +8655,167 @@
       </p:sp>
       <p:sp>
         <p:nvSpPr>
-          <p:cNvPr id="8" name="Rounded Rectangle 7"/>
+          <p:cNvPr id="15" name="TextBox 14"/>
+          <p:cNvSpPr txBox="1"/>
+          <p:nvPr/>
+        </p:nvSpPr>
+        <p:spPr>
+          <a:xfrm>
+            <a:off x="987552" y="2816352"/>
+            <a:ext cx="2231136" cy="658368"/>
+          </a:xfrm>
+          <a:prstGeom prst="rect">
+            <a:avLst/>
+          </a:prstGeom>
+          <a:noFill/>
+        </p:spPr>
+        <p:txBody>
+          <a:bodyPr wrap="square" anchor="ctr" lIns="0" rIns="0" tIns="25400" bIns="25400">
+            <a:spAutoFit/>
+          </a:bodyPr>
+          <a:lstStyle/>
+          <a:p>
+            <a:pPr algn="ctr"/>
+            <a:r>
+              <a:rPr sz="1550" b="1" i="0">
+                <a:solidFill>
+                  <a:srgbClr val="0F172A"/>
+                </a:solidFill>
+                <a:latin typeface="Segoe UI"/>
+              </a:rPr>
+              <a:t>TRANSLATED</a:t>
+            </a:r>
+          </a:p>
+        </p:txBody>
+      </p:sp>
+      <p:sp>
+        <p:nvSpPr>
+          <p:cNvPr id="16" name="TextBox 15"/>
+          <p:cNvSpPr txBox="1"/>
+          <p:nvPr/>
+        </p:nvSpPr>
+        <p:spPr>
+          <a:xfrm>
+            <a:off x="3364992" y="2816352"/>
+            <a:ext cx="2414015" cy="658368"/>
+          </a:xfrm>
+          <a:prstGeom prst="rect">
+            <a:avLst/>
+          </a:prstGeom>
+          <a:noFill/>
+        </p:spPr>
+        <p:txBody>
+          <a:bodyPr wrap="square" anchor="ctr" lIns="0" rIns="0" tIns="25400" bIns="25400">
+            <a:spAutoFit/>
+          </a:bodyPr>
+          <a:lstStyle/>
+          <a:p>
+            <a:pPr algn="ctr"/>
+            <a:r>
+              <a:rPr sz="1550" b="0" i="0">
+                <a:solidFill>
+                  <a:srgbClr val="334155"/>
+                </a:solidFill>
+                <a:latin typeface="Segoe UI"/>
+              </a:rPr>
+              <a:t>🔄 RUNNING</a:t>
+            </a:r>
+          </a:p>
+        </p:txBody>
+      </p:sp>
+      <p:sp>
+        <p:nvSpPr>
+          <p:cNvPr id="17" name="TextBox 16"/>
+          <p:cNvSpPr txBox="1"/>
+          <p:nvPr/>
+        </p:nvSpPr>
+        <p:spPr>
+          <a:xfrm>
+            <a:off x="5925312" y="2816352"/>
+            <a:ext cx="2048255" cy="658368"/>
+          </a:xfrm>
+          <a:prstGeom prst="rect">
+            <a:avLst/>
+          </a:prstGeom>
+          <a:noFill/>
+        </p:spPr>
+        <p:txBody>
+          <a:bodyPr wrap="square" anchor="ctr" lIns="0" rIns="0" tIns="25400" bIns="25400">
+            <a:spAutoFit/>
+          </a:bodyPr>
+          <a:lstStyle/>
+          <a:p>
+            <a:pPr algn="ctr"/>
+            <a:r>
+              <a:rPr sz="1550" b="0" i="0">
+                <a:solidFill>
+                  <a:srgbClr val="334155"/>
+                </a:solidFill>
+                <a:latin typeface="Segoe UI"/>
+              </a:rPr>
+              <a:t>1 / 5</a:t>
+            </a:r>
+          </a:p>
+        </p:txBody>
+      </p:sp>
+      <p:sp>
+        <p:nvSpPr>
+          <p:cNvPr id="18" name="TextBox 17"/>
+          <p:cNvSpPr txBox="1"/>
+          <p:nvPr/>
+        </p:nvSpPr>
+        <p:spPr>
+          <a:xfrm>
+            <a:off x="8119872" y="2816352"/>
+            <a:ext cx="2048255" cy="658368"/>
+          </a:xfrm>
+          <a:prstGeom prst="rect">
+            <a:avLst/>
+          </a:prstGeom>
+          <a:noFill/>
+        </p:spPr>
+        <p:txBody>
+          <a:bodyPr wrap="square" anchor="ctr" lIns="0" rIns="0" tIns="25400" bIns="25400">
+            <a:spAutoFit/>
+          </a:bodyPr>
+          <a:lstStyle/>
+          <a:p>
+            <a:pPr algn="ctr"/>
+            <a:r>
+              <a:rPr sz="1550" b="0" i="0">
+                <a:solidFill>
+                  <a:srgbClr val="334155"/>
+                </a:solidFill>
+                <a:latin typeface="Segoe UI"/>
+              </a:rPr>
+              <a:t>—</a:t>
+            </a:r>
+          </a:p>
+        </p:txBody>
+      </p:sp>
+      <p:sp>
+        <p:nvSpPr>
+          <p:cNvPr id="19" name="Rounded Rectangle 18"/>
           <p:cNvSpPr/>
           <p:nvPr/>
         </p:nvSpPr>
         <p:spPr>
           <a:xfrm>
-            <a:off x="5212080" y="1975104"/>
-            <a:ext cx="4114800" cy="292608"/>
+            <a:off x="914400" y="3474720"/>
+            <a:ext cx="9326880" cy="658368"/>
           </a:xfrm>
           <a:prstGeom prst="roundRect">
             <a:avLst>
-              <a:gd name="adj" fmla="val 50000"/>
+              <a:gd name="adj" fmla="val 3000"/>
             </a:avLst>
           </a:prstGeom>
           <a:solidFill>
-            <a:srgbClr val="10B981"/>
+            <a:srgbClr val="FFFFFF"/>
           </a:solidFill>
-          <a:ln>
-            <a:noFill/>
+          <a:ln w="12700">
+            <a:solidFill>
+              <a:srgbClr val="E2E8F0"/>
+            </a:solidFill>
           </a:ln>
           <a:effectLst/>
         </p:spPr>
@@ -8789,14 +8843,14 @@
       </p:sp>
       <p:sp>
         <p:nvSpPr>
-          <p:cNvPr id="9" name="TextBox 8"/>
-          <p:cNvSpPr txBox="1"/>
-          <p:nvPr/>
-        </p:nvSpPr>
-        <p:spPr>
-          <a:xfrm>
-            <a:off x="9509760" y="1572768"/>
-            <a:ext cx="2103120" cy="1078992"/>
+          <p:cNvPr id="20" name="TextBox 19"/>
+          <p:cNvSpPr txBox="1"/>
+          <p:nvPr/>
+        </p:nvSpPr>
+        <p:spPr>
+          <a:xfrm>
+            <a:off x="987552" y="3474720"/>
+            <a:ext cx="2231136" cy="658368"/>
           </a:xfrm>
           <a:prstGeom prst="rect">
             <a:avLst/>
@@ -8809,509 +8863,134 @@
           </a:bodyPr>
           <a:lstStyle/>
           <a:p>
-            <a:pPr algn="l"/>
-            <a:r>
-              <a:rPr sz="1150" b="0" i="1">
-                <a:solidFill>
-                  <a:srgbClr val="047857"/>
-                </a:solidFill>
-                <a:latin typeface="Segoe UI"/>
-              </a:rPr>
-              <a:t>5 / 5 seeds trained — ensemble evaluated</a:t>
-            </a:r>
-          </a:p>
-        </p:txBody>
-      </p:sp>
-      <p:sp>
-        <p:nvSpPr>
-          <p:cNvPr id="10" name="Rounded Rectangle 9"/>
+            <a:pPr algn="ctr"/>
+            <a:r>
+              <a:rPr sz="1550" b="1" i="0">
+                <a:solidFill>
+                  <a:srgbClr val="0F172A"/>
+                </a:solidFill>
+                <a:latin typeface="Segoe UI"/>
+              </a:rPr>
+              <a:t>GENERATED</a:t>
+            </a:r>
+          </a:p>
+        </p:txBody>
+      </p:sp>
+      <p:sp>
+        <p:nvSpPr>
+          <p:cNvPr id="21" name="TextBox 20"/>
+          <p:cNvSpPr txBox="1"/>
+          <p:nvPr/>
+        </p:nvSpPr>
+        <p:spPr>
+          <a:xfrm>
+            <a:off x="3364992" y="3474720"/>
+            <a:ext cx="2414015" cy="658368"/>
+          </a:xfrm>
+          <a:prstGeom prst="rect">
+            <a:avLst/>
+          </a:prstGeom>
+          <a:noFill/>
+        </p:spPr>
+        <p:txBody>
+          <a:bodyPr wrap="square" anchor="ctr" lIns="0" rIns="0" tIns="25400" bIns="25400">
+            <a:spAutoFit/>
+          </a:bodyPr>
+          <a:lstStyle/>
+          <a:p>
+            <a:pPr algn="ctr"/>
+            <a:r>
+              <a:rPr sz="1550" b="0" i="0">
+                <a:solidFill>
+                  <a:srgbClr val="334155"/>
+                </a:solidFill>
+                <a:latin typeface="Segoe UI"/>
+              </a:rPr>
+              <a:t>⏳ PENDING</a:t>
+            </a:r>
+          </a:p>
+        </p:txBody>
+      </p:sp>
+      <p:sp>
+        <p:nvSpPr>
+          <p:cNvPr id="22" name="TextBox 21"/>
+          <p:cNvSpPr txBox="1"/>
+          <p:nvPr/>
+        </p:nvSpPr>
+        <p:spPr>
+          <a:xfrm>
+            <a:off x="5925312" y="3474720"/>
+            <a:ext cx="2048255" cy="658368"/>
+          </a:xfrm>
+          <a:prstGeom prst="rect">
+            <a:avLst/>
+          </a:prstGeom>
+          <a:noFill/>
+        </p:spPr>
+        <p:txBody>
+          <a:bodyPr wrap="square" anchor="ctr" lIns="0" rIns="0" tIns="25400" bIns="25400">
+            <a:spAutoFit/>
+          </a:bodyPr>
+          <a:lstStyle/>
+          <a:p>
+            <a:pPr algn="ctr"/>
+            <a:r>
+              <a:rPr sz="1550" b="0" i="0">
+                <a:solidFill>
+                  <a:srgbClr val="334155"/>
+                </a:solidFill>
+                <a:latin typeface="Segoe UI"/>
+              </a:rPr>
+              <a:t>0 / 5</a:t>
+            </a:r>
+          </a:p>
+        </p:txBody>
+      </p:sp>
+      <p:sp>
+        <p:nvSpPr>
+          <p:cNvPr id="23" name="TextBox 22"/>
+          <p:cNvSpPr txBox="1"/>
+          <p:nvPr/>
+        </p:nvSpPr>
+        <p:spPr>
+          <a:xfrm>
+            <a:off x="8119872" y="3474720"/>
+            <a:ext cx="2048255" cy="658368"/>
+          </a:xfrm>
+          <a:prstGeom prst="rect">
+            <a:avLst/>
+          </a:prstGeom>
+          <a:noFill/>
+        </p:spPr>
+        <p:txBody>
+          <a:bodyPr wrap="square" anchor="ctr" lIns="0" rIns="0" tIns="25400" bIns="25400">
+            <a:spAutoFit/>
+          </a:bodyPr>
+          <a:lstStyle/>
+          <a:p>
+            <a:pPr algn="ctr"/>
+            <a:r>
+              <a:rPr sz="1550" b="0" i="0">
+                <a:solidFill>
+                  <a:srgbClr val="334155"/>
+                </a:solidFill>
+                <a:latin typeface="Segoe UI"/>
+              </a:rPr>
+              <a:t>—</a:t>
+            </a:r>
+          </a:p>
+        </p:txBody>
+      </p:sp>
+      <p:sp>
+        <p:nvSpPr>
+          <p:cNvPr id="24" name="Rounded Rectangle 23"/>
           <p:cNvSpPr/>
           <p:nvPr/>
         </p:nvSpPr>
         <p:spPr>
           <a:xfrm>
-            <a:off x="475488" y="2807208"/>
-            <a:ext cx="11247120" cy="1078992"/>
-          </a:xfrm>
-          <a:prstGeom prst="roundRect">
-            <a:avLst>
-              <a:gd name="adj" fmla="val 6000"/>
-            </a:avLst>
-          </a:prstGeom>
-          <a:solidFill>
-            <a:srgbClr val="FEF3C7"/>
-          </a:solidFill>
-          <a:ln>
-            <a:noFill/>
-          </a:ln>
-          <a:effectLst/>
-        </p:spPr>
-        <p:style>
-          <a:lnRef idx="1">
-            <a:schemeClr val="accent1"/>
-          </a:lnRef>
-          <a:fillRef idx="3">
-            <a:schemeClr val="accent1"/>
-          </a:fillRef>
-          <a:effectRef idx="2">
-            <a:schemeClr val="accent1"/>
-          </a:effectRef>
-          <a:fontRef idx="minor">
-            <a:schemeClr val="lt1"/>
-          </a:fontRef>
-        </p:style>
-        <p:txBody>
-          <a:bodyPr rtlCol="0" anchor="ctr"/>
-          <a:lstStyle/>
-          <a:p>
-            <a:pPr algn="ctr"/>
-          </a:p>
-        </p:txBody>
-      </p:sp>
-      <p:sp>
-        <p:nvSpPr>
-          <p:cNvPr id="11" name="TextBox 10"/>
-          <p:cNvSpPr txBox="1"/>
-          <p:nvPr/>
-        </p:nvSpPr>
-        <p:spPr>
-          <a:xfrm>
-            <a:off x="713232" y="2807208"/>
-            <a:ext cx="2377440" cy="1078992"/>
-          </a:xfrm>
-          <a:prstGeom prst="rect">
-            <a:avLst/>
-          </a:prstGeom>
-          <a:noFill/>
-        </p:spPr>
-        <p:txBody>
-          <a:bodyPr wrap="square" anchor="ctr" lIns="0" rIns="0" tIns="25400" bIns="25400">
-            <a:spAutoFit/>
-          </a:bodyPr>
-          <a:lstStyle/>
-          <a:p>
-            <a:pPr algn="l"/>
-            <a:r>
-              <a:rPr sz="1900" b="1" i="0">
-                <a:solidFill>
-                  <a:srgbClr val="B45A09"/>
-                </a:solidFill>
-                <a:latin typeface="Consolas"/>
-              </a:rPr>
-              <a:t>TRANSLATED</a:t>
-            </a:r>
-          </a:p>
-        </p:txBody>
-      </p:sp>
-      <p:sp>
-        <p:nvSpPr>
-          <p:cNvPr id="12" name="Rounded Rectangle 11"/>
-          <p:cNvSpPr/>
-          <p:nvPr/>
-        </p:nvSpPr>
-        <p:spPr>
-          <a:xfrm>
-            <a:off x="3200400" y="3191256"/>
-            <a:ext cx="1691640" cy="329184"/>
-          </a:xfrm>
-          <a:prstGeom prst="roundRect">
-            <a:avLst>
-              <a:gd name="adj" fmla="val 50000"/>
-            </a:avLst>
-          </a:prstGeom>
-          <a:solidFill>
-            <a:srgbClr val="F59E0B"/>
-          </a:solidFill>
-          <a:ln>
-            <a:noFill/>
-          </a:ln>
-          <a:effectLst/>
-        </p:spPr>
-        <p:style>
-          <a:lnRef idx="1">
-            <a:schemeClr val="accent1"/>
-          </a:lnRef>
-          <a:fillRef idx="3">
-            <a:schemeClr val="accent1"/>
-          </a:fillRef>
-          <a:effectRef idx="2">
-            <a:schemeClr val="accent1"/>
-          </a:effectRef>
-          <a:fontRef idx="minor">
-            <a:schemeClr val="lt1"/>
-          </a:fontRef>
-        </p:style>
-        <p:txBody>
-          <a:bodyPr rtlCol="0" anchor="ctr" wrap="none" lIns="0" rIns="0" tIns="0" bIns="0"/>
-          <a:lstStyle/>
-          <a:p>
-            <a:pPr algn="ctr"/>
-            <a:r>
-              <a:rPr sz="1100" b="1" spc="80">
-                <a:solidFill>
-                  <a:srgbClr val="FFFFFF"/>
-                </a:solidFill>
-                <a:latin typeface="Segoe UI"/>
-              </a:rPr>
-              <a:t>RUNNING</a:t>
-            </a:r>
-          </a:p>
-        </p:txBody>
-      </p:sp>
-      <p:sp>
-        <p:nvSpPr>
-          <p:cNvPr id="13" name="Rounded Rectangle 12"/>
-          <p:cNvSpPr/>
-          <p:nvPr/>
-        </p:nvSpPr>
-        <p:spPr>
-          <a:xfrm>
-            <a:off x="5212080" y="3209544"/>
-            <a:ext cx="4114800" cy="292608"/>
-          </a:xfrm>
-          <a:prstGeom prst="roundRect">
-            <a:avLst>
-              <a:gd name="adj" fmla="val 50000"/>
-            </a:avLst>
-          </a:prstGeom>
-          <a:solidFill>
-            <a:srgbClr val="FFFFFF"/>
-          </a:solidFill>
-          <a:ln>
-            <a:noFill/>
-          </a:ln>
-          <a:effectLst/>
-        </p:spPr>
-        <p:style>
-          <a:lnRef idx="1">
-            <a:schemeClr val="accent1"/>
-          </a:lnRef>
-          <a:fillRef idx="3">
-            <a:schemeClr val="accent1"/>
-          </a:fillRef>
-          <a:effectRef idx="2">
-            <a:schemeClr val="accent1"/>
-          </a:effectRef>
-          <a:fontRef idx="minor">
-            <a:schemeClr val="lt1"/>
-          </a:fontRef>
-        </p:style>
-        <p:txBody>
-          <a:bodyPr rtlCol="0" anchor="ctr"/>
-          <a:lstStyle/>
-          <a:p>
-            <a:pPr algn="ctr"/>
-          </a:p>
-        </p:txBody>
-      </p:sp>
-      <p:sp>
-        <p:nvSpPr>
-          <p:cNvPr id="14" name="Rounded Rectangle 13"/>
-          <p:cNvSpPr/>
-          <p:nvPr/>
-        </p:nvSpPr>
-        <p:spPr>
-          <a:xfrm>
-            <a:off x="5212080" y="3209544"/>
-            <a:ext cx="822960" cy="292608"/>
-          </a:xfrm>
-          <a:prstGeom prst="roundRect">
-            <a:avLst>
-              <a:gd name="adj" fmla="val 50000"/>
-            </a:avLst>
-          </a:prstGeom>
-          <a:solidFill>
-            <a:srgbClr val="F59E0B"/>
-          </a:solidFill>
-          <a:ln>
-            <a:noFill/>
-          </a:ln>
-          <a:effectLst/>
-        </p:spPr>
-        <p:style>
-          <a:lnRef idx="1">
-            <a:schemeClr val="accent1"/>
-          </a:lnRef>
-          <a:fillRef idx="3">
-            <a:schemeClr val="accent1"/>
-          </a:fillRef>
-          <a:effectRef idx="2">
-            <a:schemeClr val="accent1"/>
-          </a:effectRef>
-          <a:fontRef idx="minor">
-            <a:schemeClr val="lt1"/>
-          </a:fontRef>
-        </p:style>
-        <p:txBody>
-          <a:bodyPr rtlCol="0" anchor="ctr"/>
-          <a:lstStyle/>
-          <a:p>
-            <a:pPr algn="ctr"/>
-          </a:p>
-        </p:txBody>
-      </p:sp>
-      <p:sp>
-        <p:nvSpPr>
-          <p:cNvPr id="15" name="TextBox 14"/>
-          <p:cNvSpPr txBox="1"/>
-          <p:nvPr/>
-        </p:nvSpPr>
-        <p:spPr>
-          <a:xfrm>
-            <a:off x="9509760" y="2807208"/>
-            <a:ext cx="2103120" cy="1078992"/>
-          </a:xfrm>
-          <a:prstGeom prst="rect">
-            <a:avLst/>
-          </a:prstGeom>
-          <a:noFill/>
-        </p:spPr>
-        <p:txBody>
-          <a:bodyPr wrap="square" anchor="ctr" lIns="0" rIns="0" tIns="25400" bIns="25400">
-            <a:spAutoFit/>
-          </a:bodyPr>
-          <a:lstStyle/>
-          <a:p>
-            <a:pPr algn="l"/>
-            <a:r>
-              <a:rPr sz="1150" b="0" i="1">
-                <a:solidFill>
-                  <a:srgbClr val="B45A09"/>
-                </a:solidFill>
-                <a:latin typeface="Segoe UI"/>
-              </a:rPr>
-              <a:t>1 / 5 seeds complete, seed 2 training now</a:t>
-            </a:r>
-          </a:p>
-        </p:txBody>
-      </p:sp>
-      <p:sp>
-        <p:nvSpPr>
-          <p:cNvPr id="16" name="Rounded Rectangle 15"/>
-          <p:cNvSpPr/>
-          <p:nvPr/>
-        </p:nvSpPr>
-        <p:spPr>
-          <a:xfrm>
-            <a:off x="475488" y="4041648"/>
-            <a:ext cx="11247120" cy="1078992"/>
-          </a:xfrm>
-          <a:prstGeom prst="roundRect">
-            <a:avLst>
-              <a:gd name="adj" fmla="val 6000"/>
-            </a:avLst>
-          </a:prstGeom>
-          <a:solidFill>
-            <a:srgbClr val="FDE4E4"/>
-          </a:solidFill>
-          <a:ln>
-            <a:noFill/>
-          </a:ln>
-          <a:effectLst/>
-        </p:spPr>
-        <p:style>
-          <a:lnRef idx="1">
-            <a:schemeClr val="accent1"/>
-          </a:lnRef>
-          <a:fillRef idx="3">
-            <a:schemeClr val="accent1"/>
-          </a:fillRef>
-          <a:effectRef idx="2">
-            <a:schemeClr val="accent1"/>
-          </a:effectRef>
-          <a:fontRef idx="minor">
-            <a:schemeClr val="lt1"/>
-          </a:fontRef>
-        </p:style>
-        <p:txBody>
-          <a:bodyPr rtlCol="0" anchor="ctr"/>
-          <a:lstStyle/>
-          <a:p>
-            <a:pPr algn="ctr"/>
-          </a:p>
-        </p:txBody>
-      </p:sp>
-      <p:sp>
-        <p:nvSpPr>
-          <p:cNvPr id="17" name="TextBox 16"/>
-          <p:cNvSpPr txBox="1"/>
-          <p:nvPr/>
-        </p:nvSpPr>
-        <p:spPr>
-          <a:xfrm>
-            <a:off x="713232" y="4041648"/>
-            <a:ext cx="2377440" cy="1078992"/>
-          </a:xfrm>
-          <a:prstGeom prst="rect">
-            <a:avLst/>
-          </a:prstGeom>
-          <a:noFill/>
-        </p:spPr>
-        <p:txBody>
-          <a:bodyPr wrap="square" anchor="ctr" lIns="0" rIns="0" tIns="25400" bIns="25400">
-            <a:spAutoFit/>
-          </a:bodyPr>
-          <a:lstStyle/>
-          <a:p>
-            <a:pPr algn="l"/>
-            <a:r>
-              <a:rPr sz="1900" b="1" i="0">
-                <a:solidFill>
-                  <a:srgbClr val="DC2626"/>
-                </a:solidFill>
-                <a:latin typeface="Consolas"/>
-              </a:rPr>
-              <a:t>GENERATED</a:t>
-            </a:r>
-          </a:p>
-        </p:txBody>
-      </p:sp>
-      <p:sp>
-        <p:nvSpPr>
-          <p:cNvPr id="18" name="Rounded Rectangle 17"/>
-          <p:cNvSpPr/>
-          <p:nvPr/>
-        </p:nvSpPr>
-        <p:spPr>
-          <a:xfrm>
-            <a:off x="3200400" y="4425696"/>
-            <a:ext cx="1691640" cy="329184"/>
-          </a:xfrm>
-          <a:prstGeom prst="roundRect">
-            <a:avLst>
-              <a:gd name="adj" fmla="val 50000"/>
-            </a:avLst>
-          </a:prstGeom>
-          <a:solidFill>
-            <a:srgbClr val="EF4444"/>
-          </a:solidFill>
-          <a:ln>
-            <a:noFill/>
-          </a:ln>
-          <a:effectLst/>
-        </p:spPr>
-        <p:style>
-          <a:lnRef idx="1">
-            <a:schemeClr val="accent1"/>
-          </a:lnRef>
-          <a:fillRef idx="3">
-            <a:schemeClr val="accent1"/>
-          </a:fillRef>
-          <a:effectRef idx="2">
-            <a:schemeClr val="accent1"/>
-          </a:effectRef>
-          <a:fontRef idx="minor">
-            <a:schemeClr val="lt1"/>
-          </a:fontRef>
-        </p:style>
-        <p:txBody>
-          <a:bodyPr rtlCol="0" anchor="ctr" wrap="none" lIns="0" rIns="0" tIns="0" bIns="0"/>
-          <a:lstStyle/>
-          <a:p>
-            <a:pPr algn="ctr"/>
-            <a:r>
-              <a:rPr sz="1100" b="1" spc="80">
-                <a:solidFill>
-                  <a:srgbClr val="FFFFFF"/>
-                </a:solidFill>
-                <a:latin typeface="Segoe UI"/>
-              </a:rPr>
-              <a:t>PENDING</a:t>
-            </a:r>
-          </a:p>
-        </p:txBody>
-      </p:sp>
-      <p:sp>
-        <p:nvSpPr>
-          <p:cNvPr id="19" name="Rounded Rectangle 18"/>
-          <p:cNvSpPr/>
-          <p:nvPr/>
-        </p:nvSpPr>
-        <p:spPr>
-          <a:xfrm>
-            <a:off x="5212080" y="4443984"/>
-            <a:ext cx="4114800" cy="292608"/>
-          </a:xfrm>
-          <a:prstGeom prst="roundRect">
-            <a:avLst>
-              <a:gd name="adj" fmla="val 50000"/>
-            </a:avLst>
-          </a:prstGeom>
-          <a:solidFill>
-            <a:srgbClr val="FFFFFF"/>
-          </a:solidFill>
-          <a:ln>
-            <a:noFill/>
-          </a:ln>
-          <a:effectLst/>
-        </p:spPr>
-        <p:style>
-          <a:lnRef idx="1">
-            <a:schemeClr val="accent1"/>
-          </a:lnRef>
-          <a:fillRef idx="3">
-            <a:schemeClr val="accent1"/>
-          </a:fillRef>
-          <a:effectRef idx="2">
-            <a:schemeClr val="accent1"/>
-          </a:effectRef>
-          <a:fontRef idx="minor">
-            <a:schemeClr val="lt1"/>
-          </a:fontRef>
-        </p:style>
-        <p:txBody>
-          <a:bodyPr rtlCol="0" anchor="ctr"/>
-          <a:lstStyle/>
-          <a:p>
-            <a:pPr algn="ctr"/>
-          </a:p>
-        </p:txBody>
-      </p:sp>
-      <p:sp>
-        <p:nvSpPr>
-          <p:cNvPr id="20" name="TextBox 19"/>
-          <p:cNvSpPr txBox="1"/>
-          <p:nvPr/>
-        </p:nvSpPr>
-        <p:spPr>
-          <a:xfrm>
-            <a:off x="9509760" y="4041648"/>
-            <a:ext cx="2103120" cy="1078992"/>
-          </a:xfrm>
-          <a:prstGeom prst="rect">
-            <a:avLst/>
-          </a:prstGeom>
-          <a:noFill/>
-        </p:spPr>
-        <p:txBody>
-          <a:bodyPr wrap="square" anchor="ctr" lIns="0" rIns="0" tIns="25400" bIns="25400">
-            <a:spAutoFit/>
-          </a:bodyPr>
-          <a:lstStyle/>
-          <a:p>
-            <a:pPr algn="l"/>
-            <a:r>
-              <a:rPr sz="1150" b="0" i="1">
-                <a:solidFill>
-                  <a:srgbClr val="DC2626"/>
-                </a:solidFill>
-                <a:latin typeface="Segoe UI"/>
-              </a:rPr>
-              <a:t>not yet started — queued after translated arm</a:t>
-            </a:r>
-          </a:p>
-        </p:txBody>
-      </p:sp>
-      <p:sp>
-        <p:nvSpPr>
-          <p:cNvPr id="21" name="Rounded Rectangle 20"/>
-          <p:cNvSpPr/>
-          <p:nvPr/>
-        </p:nvSpPr>
-        <p:spPr>
-          <a:xfrm>
-            <a:off x="475488" y="5623560"/>
-            <a:ext cx="11247120" cy="822960"/>
+            <a:off x="475488" y="4453127"/>
+            <a:ext cx="11247120" cy="777240"/>
           </a:xfrm>
           <a:prstGeom prst="roundRect">
             <a:avLst>
@@ -9350,14 +9029,14 @@
       </p:sp>
       <p:sp>
         <p:nvSpPr>
-          <p:cNvPr id="22" name="Rectangle 21"/>
+          <p:cNvPr id="25" name="Rectangle 24"/>
           <p:cNvSpPr/>
           <p:nvPr/>
         </p:nvSpPr>
         <p:spPr>
           <a:xfrm>
-            <a:off x="475488" y="5623560"/>
-            <a:ext cx="91440" cy="822960"/>
+            <a:off x="475488" y="4453127"/>
+            <a:ext cx="91440" cy="777240"/>
           </a:xfrm>
           <a:prstGeom prst="rect">
             <a:avLst/>
@@ -9394,13 +9073,13 @@
       </p:sp>
       <p:sp>
         <p:nvSpPr>
-          <p:cNvPr id="23" name="TextBox 22"/>
-          <p:cNvSpPr txBox="1"/>
-          <p:nvPr/>
-        </p:nvSpPr>
-        <p:spPr>
-          <a:xfrm>
-            <a:off x="676656" y="5733288"/>
+          <p:cNvPr id="26" name="TextBox 25"/>
+          <p:cNvSpPr txBox="1"/>
+          <p:nvPr/>
+        </p:nvSpPr>
+        <p:spPr>
+          <a:xfrm>
+            <a:off x="676656" y="4562855"/>
             <a:ext cx="1828800" cy="274320"/>
           </a:xfrm>
           <a:prstGeom prst="rect">
@@ -9429,13 +9108,13 @@
       </p:sp>
       <p:sp>
         <p:nvSpPr>
-          <p:cNvPr id="24" name="TextBox 23"/>
-          <p:cNvSpPr txBox="1"/>
-          <p:nvPr/>
-        </p:nvSpPr>
-        <p:spPr>
-          <a:xfrm>
-            <a:off x="676656" y="6016752"/>
+          <p:cNvPr id="27" name="TextBox 26"/>
+          <p:cNvSpPr txBox="1"/>
+          <p:nvPr/>
+        </p:nvSpPr>
+        <p:spPr>
+          <a:xfrm>
+            <a:off x="676656" y="4818888"/>
             <a:ext cx="10881360" cy="365760"/>
           </a:xfrm>
           <a:prstGeom prst="rect">
@@ -9451,13 +9130,13 @@
           <a:p>
             <a:pPr algn="l"/>
             <a:r>
-              <a:rPr sz="1400" b="1" i="0">
+              <a:rPr sz="1500" b="1" i="0">
                 <a:solidFill>
                   <a:srgbClr val="0F172A"/>
                 </a:solidFill>
                 <a:latin typeface="Segoe UI"/>
               </a:rPr>
-              <a:t>Translated arm → ~2026-07-04  |  Generated arm → ~2026-07-05  |  full 3-way comparison ready shortly after</a:t>
+              <a:t>Translated → ~7/4      Generated → ~7/5</a:t>
             </a:r>
           </a:p>
         </p:txBody>
@@ -9547,13 +9226,13 @@
           <a:p>
             <a:pPr algn="l"/>
             <a:r>
-              <a:rPr sz="2600" b="1" i="0">
+              <a:rPr sz="3000" b="1" i="0">
                 <a:solidFill>
                   <a:srgbClr val="0F172A"/>
                 </a:solidFill>
                 <a:latin typeface="Segoe UI"/>
               </a:rPr>
-              <a:t>Real Arm: 0.5586 dev cF1 (5-seed ensemble, vote=4)</a:t>
+              <a:t>Real Arm: 0.5586 dev cF1</a:t>
             </a:r>
           </a:p>
         </p:txBody>
@@ -9566,8 +9245,8 @@
         </p:nvSpPr>
         <p:spPr>
           <a:xfrm>
-            <a:off x="3931920" y="1828800"/>
-            <a:ext cx="6766560" cy="658368"/>
+            <a:off x="3931920" y="1554480"/>
+            <a:ext cx="6766560" cy="566928"/>
           </a:xfrm>
           <a:prstGeom prst="roundRect">
             <a:avLst>
@@ -9612,8 +9291,8 @@
         </p:nvSpPr>
         <p:spPr>
           <a:xfrm>
-            <a:off x="3931920" y="1828800"/>
-            <a:ext cx="1806671" cy="658368"/>
+            <a:off x="3931920" y="1554480"/>
+            <a:ext cx="1806671" cy="566928"/>
           </a:xfrm>
           <a:prstGeom prst="roundRect">
             <a:avLst>
@@ -9658,8 +9337,8 @@
         </p:nvSpPr>
         <p:spPr>
           <a:xfrm>
-            <a:off x="475488" y="1828800"/>
-            <a:ext cx="3337560" cy="658368"/>
+            <a:off x="475488" y="1554480"/>
+            <a:ext cx="3337560" cy="566928"/>
           </a:xfrm>
           <a:prstGeom prst="rect">
             <a:avLst/>
@@ -9674,7 +9353,7 @@
           <a:p>
             <a:pPr algn="l"/>
             <a:r>
-              <a:rPr sz="1300" b="1" i="0">
+              <a:rPr sz="1250" b="1" i="0">
                 <a:solidFill>
                   <a:srgbClr val="334155"/>
                 </a:solidFill>
@@ -9693,8 +9372,8 @@
         </p:nvSpPr>
         <p:spPr>
           <a:xfrm>
-            <a:off x="5875751" y="1828800"/>
-            <a:ext cx="868680" cy="658368"/>
+            <a:off x="5875751" y="1554480"/>
+            <a:ext cx="868680" cy="566928"/>
           </a:xfrm>
           <a:prstGeom prst="rect">
             <a:avLst/>
@@ -9709,7 +9388,7 @@
           <a:p>
             <a:pPr algn="l"/>
             <a:r>
-              <a:rPr sz="1400" b="1" i="0">
+              <a:rPr sz="1350" b="1" i="0">
                 <a:solidFill>
                   <a:srgbClr val="64748B"/>
                 </a:solidFill>
@@ -9728,8 +9407,8 @@
         </p:nvSpPr>
         <p:spPr>
           <a:xfrm>
-            <a:off x="3931920" y="2807208"/>
-            <a:ext cx="6766560" cy="658368"/>
+            <a:off x="3931920" y="2395728"/>
+            <a:ext cx="6766560" cy="566928"/>
           </a:xfrm>
           <a:prstGeom prst="roundRect">
             <a:avLst>
@@ -9774,8 +9453,8 @@
         </p:nvSpPr>
         <p:spPr>
           <a:xfrm>
-            <a:off x="3931920" y="2807208"/>
-            <a:ext cx="3965204" cy="658368"/>
+            <a:off x="3931920" y="2395728"/>
+            <a:ext cx="3965204" cy="566928"/>
           </a:xfrm>
           <a:prstGeom prst="roundRect">
             <a:avLst>
@@ -9820,8 +9499,8 @@
         </p:nvSpPr>
         <p:spPr>
           <a:xfrm>
-            <a:off x="475488" y="2807208"/>
-            <a:ext cx="3337560" cy="658368"/>
+            <a:off x="475488" y="2395728"/>
+            <a:ext cx="3337560" cy="566928"/>
           </a:xfrm>
           <a:prstGeom prst="rect">
             <a:avLst/>
@@ -9836,7 +9515,7 @@
           <a:p>
             <a:pPr algn="l"/>
             <a:r>
-              <a:rPr sz="1300" b="1" i="0">
+              <a:rPr sz="1250" b="1" i="0">
                 <a:solidFill>
                   <a:srgbClr val="334155"/>
                 </a:solidFill>
@@ -9855,8 +9534,8 @@
         </p:nvSpPr>
         <p:spPr>
           <a:xfrm>
-            <a:off x="8034284" y="2807208"/>
-            <a:ext cx="868680" cy="658368"/>
+            <a:off x="8034284" y="2395728"/>
+            <a:ext cx="868680" cy="566928"/>
           </a:xfrm>
           <a:prstGeom prst="rect">
             <a:avLst/>
@@ -9871,7 +9550,7 @@
           <a:p>
             <a:pPr algn="l"/>
             <a:r>
-              <a:rPr sz="1400" b="1" i="0">
+              <a:rPr sz="1350" b="1" i="0">
                 <a:solidFill>
                   <a:srgbClr val="047857"/>
                 </a:solidFill>
@@ -9890,8 +9569,8 @@
         </p:nvSpPr>
         <p:spPr>
           <a:xfrm>
-            <a:off x="3931920" y="3785615"/>
-            <a:ext cx="6766560" cy="658368"/>
+            <a:off x="3931920" y="3236976"/>
+            <a:ext cx="6766560" cy="566928"/>
           </a:xfrm>
           <a:prstGeom prst="roundRect">
             <a:avLst>
@@ -9936,8 +9615,8 @@
         </p:nvSpPr>
         <p:spPr>
           <a:xfrm>
-            <a:off x="3931920" y="3785615"/>
-            <a:ext cx="5095219" cy="658368"/>
+            <a:off x="3931920" y="3236976"/>
+            <a:ext cx="5095219" cy="566928"/>
           </a:xfrm>
           <a:prstGeom prst="roundRect">
             <a:avLst>
@@ -9982,8 +9661,8 @@
         </p:nvSpPr>
         <p:spPr>
           <a:xfrm>
-            <a:off x="475488" y="3785615"/>
-            <a:ext cx="3337560" cy="658368"/>
+            <a:off x="475488" y="3236976"/>
+            <a:ext cx="3337560" cy="566928"/>
           </a:xfrm>
           <a:prstGeom prst="rect">
             <a:avLst/>
@@ -9998,13 +9677,13 @@
           <a:p>
             <a:pPr algn="l"/>
             <a:r>
-              <a:rPr sz="1300" b="1" i="0">
+              <a:rPr sz="1250" b="1" i="0">
                 <a:solidFill>
                   <a:srgbClr val="334155"/>
                 </a:solidFill>
                 <a:latin typeface="Segoe UI"/>
               </a:rPr>
-              <a:t>DeepSeek-KD, unmatched full pool (submitted)</a:t>
+              <a:t>DeepSeek-KD, unmatched pool (submitted)</a:t>
             </a:r>
           </a:p>
         </p:txBody>
@@ -10017,8 +9696,8 @@
         </p:nvSpPr>
         <p:spPr>
           <a:xfrm>
-            <a:off x="9164299" y="3785615"/>
-            <a:ext cx="868680" cy="658368"/>
+            <a:off x="9164299" y="3236976"/>
+            <a:ext cx="868680" cy="566928"/>
           </a:xfrm>
           <a:prstGeom prst="rect">
             <a:avLst/>
@@ -10033,7 +9712,7 @@
           <a:p>
             <a:pPr algn="l"/>
             <a:r>
-              <a:rPr sz="1400" b="1" i="0">
+              <a:rPr sz="1350" b="1" i="0">
                 <a:solidFill>
                   <a:srgbClr val="1D4ED8"/>
                 </a:solidFill>
@@ -10052,16 +9731,16 @@
         </p:nvSpPr>
         <p:spPr>
           <a:xfrm>
-            <a:off x="475488" y="4251960"/>
-            <a:ext cx="11247120" cy="1051560"/>
+            <a:off x="475488" y="4069080"/>
+            <a:ext cx="11247120" cy="420624"/>
           </a:xfrm>
           <a:prstGeom prst="roundRect">
             <a:avLst>
-              <a:gd name="adj" fmla="val 7000"/>
+              <a:gd name="adj" fmla="val 8000"/>
             </a:avLst>
           </a:prstGeom>
           <a:solidFill>
-            <a:srgbClr val="FEF3C7"/>
+            <a:srgbClr val="F1F5F9"/>
           </a:solidFill>
           <a:ln>
             <a:noFill/>
@@ -10092,23 +9771,132 @@
       </p:sp>
       <p:sp>
         <p:nvSpPr>
-          <p:cNvPr id="17" name="Rectangle 16"/>
+          <p:cNvPr id="17" name="TextBox 16"/>
+          <p:cNvSpPr txBox="1"/>
+          <p:nvPr/>
+        </p:nvSpPr>
+        <p:spPr>
+          <a:xfrm>
+            <a:off x="548640" y="4123944"/>
+            <a:ext cx="4242816" cy="310896"/>
+          </a:xfrm>
+          <a:prstGeom prst="rect">
+            <a:avLst/>
+          </a:prstGeom>
+          <a:noFill/>
+        </p:spPr>
+        <p:txBody>
+          <a:bodyPr wrap="square" lIns="0" rIns="0" tIns="25400" bIns="25400">
+            <a:spAutoFit/>
+          </a:bodyPr>
+          <a:lstStyle/>
+          <a:p>
+            <a:pPr algn="ctr"/>
+            <a:r>
+              <a:rPr sz="1200" b="1" i="0" spc="40">
+                <a:solidFill>
+                  <a:srgbClr val="64748B"/>
+                </a:solidFill>
+                <a:latin typeface="Segoe UI"/>
+              </a:rPr>
+              <a:t>COMPARISON</a:t>
+            </a:r>
+          </a:p>
+        </p:txBody>
+      </p:sp>
+      <p:sp>
+        <p:nvSpPr>
+          <p:cNvPr id="18" name="TextBox 17"/>
+          <p:cNvSpPr txBox="1"/>
+          <p:nvPr/>
+        </p:nvSpPr>
+        <p:spPr>
+          <a:xfrm>
+            <a:off x="4937760" y="4123944"/>
+            <a:ext cx="1499616" cy="310896"/>
+          </a:xfrm>
+          <a:prstGeom prst="rect">
+            <a:avLst/>
+          </a:prstGeom>
+          <a:noFill/>
+        </p:spPr>
+        <p:txBody>
+          <a:bodyPr wrap="square" lIns="0" rIns="0" tIns="25400" bIns="25400">
+            <a:spAutoFit/>
+          </a:bodyPr>
+          <a:lstStyle/>
+          <a:p>
+            <a:pPr algn="ctr"/>
+            <a:r>
+              <a:rPr sz="1200" b="1" i="0" spc="40">
+                <a:solidFill>
+                  <a:srgbClr val="64748B"/>
+                </a:solidFill>
+                <a:latin typeface="Segoe UI"/>
+              </a:rPr>
+              <a:t>Δ</a:t>
+            </a:r>
+          </a:p>
+        </p:txBody>
+      </p:sp>
+      <p:sp>
+        <p:nvSpPr>
+          <p:cNvPr id="19" name="TextBox 18"/>
+          <p:cNvSpPr txBox="1"/>
+          <p:nvPr/>
+        </p:nvSpPr>
+        <p:spPr>
+          <a:xfrm>
+            <a:off x="6583680" y="4123944"/>
+            <a:ext cx="5065776" cy="310896"/>
+          </a:xfrm>
+          <a:prstGeom prst="rect">
+            <a:avLst/>
+          </a:prstGeom>
+          <a:noFill/>
+        </p:spPr>
+        <p:txBody>
+          <a:bodyPr wrap="square" lIns="0" rIns="0" tIns="25400" bIns="25400">
+            <a:spAutoFit/>
+          </a:bodyPr>
+          <a:lstStyle/>
+          <a:p>
+            <a:pPr algn="ctr"/>
+            <a:r>
+              <a:rPr sz="1200" b="1" i="0" spc="40">
+                <a:solidFill>
+                  <a:srgbClr val="64748B"/>
+                </a:solidFill>
+                <a:latin typeface="Segoe UI"/>
+              </a:rPr>
+              <a:t>READ</a:t>
+            </a:r>
+          </a:p>
+        </p:txBody>
+      </p:sp>
+      <p:sp>
+        <p:nvSpPr>
+          <p:cNvPr id="20" name="Rounded Rectangle 19"/>
           <p:cNvSpPr/>
           <p:nvPr/>
         </p:nvSpPr>
         <p:spPr>
           <a:xfrm>
-            <a:off x="475488" y="4251960"/>
-            <a:ext cx="91440" cy="1051560"/>
-          </a:xfrm>
-          <a:prstGeom prst="rect">
-            <a:avLst/>
+            <a:off x="475488" y="4489704"/>
+            <a:ext cx="11247120" cy="566928"/>
+          </a:xfrm>
+          <a:prstGeom prst="roundRect">
+            <a:avLst>
+              <a:gd name="adj" fmla="val 3000"/>
+            </a:avLst>
           </a:prstGeom>
           <a:solidFill>
-            <a:srgbClr val="F59E0B"/>
+            <a:srgbClr val="FFFFFF"/>
           </a:solidFill>
-          <a:ln>
-            <a:noFill/>
+          <a:ln w="12700">
+            <a:solidFill>
+              <a:srgbClr val="E2E8F0"/>
+            </a:solidFill>
           </a:ln>
           <a:effectLst/>
         </p:spPr>
@@ -10136,95 +9924,132 @@
       </p:sp>
       <p:sp>
         <p:nvSpPr>
-          <p:cNvPr id="18" name="TextBox 17"/>
-          <p:cNvSpPr txBox="1"/>
-          <p:nvPr/>
-        </p:nvSpPr>
-        <p:spPr>
-          <a:xfrm>
-            <a:off x="676656" y="4370832"/>
-            <a:ext cx="2743200" cy="292608"/>
-          </a:xfrm>
-          <a:prstGeom prst="rect">
-            <a:avLst/>
-          </a:prstGeom>
-          <a:noFill/>
-        </p:spPr>
-        <p:txBody>
-          <a:bodyPr wrap="square" lIns="0" rIns="0" tIns="25400" bIns="25400">
-            <a:spAutoFit/>
-          </a:bodyPr>
-          <a:lstStyle/>
-          <a:p>
-            <a:pPr algn="l"/>
-            <a:r>
-              <a:rPr sz="1200" b="1" i="0" spc="100">
-                <a:solidFill>
-                  <a:srgbClr val="B45A09"/>
-                </a:solidFill>
-                <a:latin typeface="Segoe UI"/>
-              </a:rPr>
-              <a:t>Read carefully</a:t>
-            </a:r>
-          </a:p>
-        </p:txBody>
-      </p:sp>
-      <p:sp>
-        <p:nvSpPr>
-          <p:cNvPr id="19" name="TextBox 18"/>
-          <p:cNvSpPr txBox="1"/>
-          <p:nvPr/>
-        </p:nvSpPr>
-        <p:spPr>
-          <a:xfrm>
-            <a:off x="676656" y="4663440"/>
-            <a:ext cx="10881360" cy="594360"/>
-          </a:xfrm>
-          <a:prstGeom prst="rect">
-            <a:avLst/>
-          </a:prstGeom>
-          <a:noFill/>
-        </p:spPr>
-        <p:txBody>
-          <a:bodyPr wrap="square" lIns="0" rIns="0" tIns="25400" bIns="25400">
-            <a:spAutoFit/>
-          </a:bodyPr>
-          <a:lstStyle/>
-          <a:p>
-            <a:pPr algn="l"/>
-            <a:r>
-              <a:rPr sz="1350" b="0" i="0">
+          <p:cNvPr id="21" name="TextBox 20"/>
+          <p:cNvSpPr txBox="1"/>
+          <p:nvPr/>
+        </p:nvSpPr>
+        <p:spPr>
+          <a:xfrm>
+            <a:off x="548640" y="4489704"/>
+            <a:ext cx="4242816" cy="566928"/>
+          </a:xfrm>
+          <a:prstGeom prst="rect">
+            <a:avLst/>
+          </a:prstGeom>
+          <a:noFill/>
+        </p:spPr>
+        <p:txBody>
+          <a:bodyPr wrap="square" anchor="ctr" lIns="0" rIns="0" tIns="25400" bIns="25400">
+            <a:spAutoFit/>
+          </a:bodyPr>
+          <a:lstStyle/>
+          <a:p>
+            <a:pPr algn="ctr"/>
+            <a:r>
+              <a:rPr sz="1300" b="1" i="0">
+                <a:solidFill>
+                  <a:srgbClr val="0F172A"/>
+                </a:solidFill>
+                <a:latin typeface="Segoe UI"/>
+              </a:rPr>
+              <a:t>real capped(3k) vs uncapped(submitted)</a:t>
+            </a:r>
+          </a:p>
+        </p:txBody>
+      </p:sp>
+      <p:sp>
+        <p:nvSpPr>
+          <p:cNvPr id="22" name="TextBox 21"/>
+          <p:cNvSpPr txBox="1"/>
+          <p:nvPr/>
+        </p:nvSpPr>
+        <p:spPr>
+          <a:xfrm>
+            <a:off x="4937760" y="4489704"/>
+            <a:ext cx="1499616" cy="566928"/>
+          </a:xfrm>
+          <a:prstGeom prst="rect">
+            <a:avLst/>
+          </a:prstGeom>
+          <a:noFill/>
+        </p:spPr>
+        <p:txBody>
+          <a:bodyPr wrap="square" anchor="ctr" lIns="0" rIns="0" tIns="25400" bIns="25400">
+            <a:spAutoFit/>
+          </a:bodyPr>
+          <a:lstStyle/>
+          <a:p>
+            <a:pPr algn="ctr"/>
+            <a:r>
+              <a:rPr sz="1300" b="0" i="0">
                 <a:solidFill>
                   <a:srgbClr val="334155"/>
                 </a:solidFill>
                 <a:latin typeface="Segoe UI"/>
               </a:rPr>
-              <a:t>Capping silver to 3,000 (for size-matching) costs ~1.7 pp vs. the uncapped submitted pool (0.5586 vs 0.5753) — volume matters, echoing the ukr §5.29.1 finding. This is a within-arm cost, not the source comparison itself.</a:t>
-            </a:r>
-          </a:p>
-        </p:txBody>
-      </p:sp>
-      <p:sp>
-        <p:nvSpPr>
-          <p:cNvPr id="20" name="Rounded Rectangle 19"/>
+              <a:t>−1.7 pp</a:t>
+            </a:r>
+          </a:p>
+        </p:txBody>
+      </p:sp>
+      <p:sp>
+        <p:nvSpPr>
+          <p:cNvPr id="23" name="TextBox 22"/>
+          <p:cNvSpPr txBox="1"/>
+          <p:nvPr/>
+        </p:nvSpPr>
+        <p:spPr>
+          <a:xfrm>
+            <a:off x="6583680" y="4489704"/>
+            <a:ext cx="5065776" cy="566928"/>
+          </a:xfrm>
+          <a:prstGeom prst="rect">
+            <a:avLst/>
+          </a:prstGeom>
+          <a:noFill/>
+        </p:spPr>
+        <p:txBody>
+          <a:bodyPr wrap="square" anchor="ctr" lIns="0" rIns="0" tIns="25400" bIns="25400">
+            <a:spAutoFit/>
+          </a:bodyPr>
+          <a:lstStyle/>
+          <a:p>
+            <a:pPr algn="ctr"/>
+            <a:r>
+              <a:rPr sz="1300" b="0" i="0">
+                <a:solidFill>
+                  <a:srgbClr val="334155"/>
+                </a:solidFill>
+                <a:latin typeface="Segoe UI"/>
+              </a:rPr>
+              <a:t>cap costs volume</a:t>
+            </a:r>
+          </a:p>
+        </p:txBody>
+      </p:sp>
+      <p:sp>
+        <p:nvSpPr>
+          <p:cNvPr id="24" name="Rounded Rectangle 23"/>
           <p:cNvSpPr/>
           <p:nvPr/>
         </p:nvSpPr>
         <p:spPr>
           <a:xfrm>
-            <a:off x="475488" y="5440680"/>
-            <a:ext cx="11247120" cy="960120"/>
+            <a:off x="475488" y="5056632"/>
+            <a:ext cx="11247120" cy="566928"/>
           </a:xfrm>
           <a:prstGeom prst="roundRect">
             <a:avLst>
-              <a:gd name="adj" fmla="val 7000"/>
+              <a:gd name="adj" fmla="val 3000"/>
             </a:avLst>
           </a:prstGeom>
           <a:solidFill>
-            <a:srgbClr val="FDE4E4"/>
+            <a:srgbClr val="FFFFFF"/>
           </a:solidFill>
-          <a:ln>
-            <a:noFill/>
+          <a:ln w="12700">
+            <a:solidFill>
+              <a:srgbClr val="E2E8F0"/>
+            </a:solidFill>
           </a:ln>
           <a:effectLst/>
         </p:spPr>
@@ -10252,23 +10077,132 @@
       </p:sp>
       <p:sp>
         <p:nvSpPr>
-          <p:cNvPr id="21" name="Rectangle 20"/>
+          <p:cNvPr id="25" name="TextBox 24"/>
+          <p:cNvSpPr txBox="1"/>
+          <p:nvPr/>
+        </p:nvSpPr>
+        <p:spPr>
+          <a:xfrm>
+            <a:off x="548640" y="5056632"/>
+            <a:ext cx="4242816" cy="566928"/>
+          </a:xfrm>
+          <a:prstGeom prst="rect">
+            <a:avLst/>
+          </a:prstGeom>
+          <a:noFill/>
+        </p:spPr>
+        <p:txBody>
+          <a:bodyPr wrap="square" anchor="ctr" lIns="0" rIns="0" tIns="25400" bIns="25400">
+            <a:spAutoFit/>
+          </a:bodyPr>
+          <a:lstStyle/>
+          <a:p>
+            <a:pPr algn="ctr"/>
+            <a:r>
+              <a:rPr sz="1300" b="1" i="0">
+                <a:solidFill>
+                  <a:srgbClr val="0F172A"/>
+                </a:solidFill>
+                <a:latin typeface="Segoe UI"/>
+              </a:rPr>
+              <a:t>real vs no-KD baseline</a:t>
+            </a:r>
+          </a:p>
+        </p:txBody>
+      </p:sp>
+      <p:sp>
+        <p:nvSpPr>
+          <p:cNvPr id="26" name="TextBox 25"/>
+          <p:cNvSpPr txBox="1"/>
+          <p:nvPr/>
+        </p:nvSpPr>
+        <p:spPr>
+          <a:xfrm>
+            <a:off x="4937760" y="5056632"/>
+            <a:ext cx="1499616" cy="566928"/>
+          </a:xfrm>
+          <a:prstGeom prst="rect">
+            <a:avLst/>
+          </a:prstGeom>
+          <a:noFill/>
+        </p:spPr>
+        <p:txBody>
+          <a:bodyPr wrap="square" anchor="ctr" lIns="0" rIns="0" tIns="25400" bIns="25400">
+            <a:spAutoFit/>
+          </a:bodyPr>
+          <a:lstStyle/>
+          <a:p>
+            <a:pPr algn="ctr"/>
+            <a:r>
+              <a:rPr sz="1300" b="0" i="0">
+                <a:solidFill>
+                  <a:srgbClr val="334155"/>
+                </a:solidFill>
+                <a:latin typeface="Segoe UI"/>
+              </a:rPr>
+              <a:t>+3.2 pp</a:t>
+            </a:r>
+          </a:p>
+        </p:txBody>
+      </p:sp>
+      <p:sp>
+        <p:nvSpPr>
+          <p:cNvPr id="27" name="TextBox 26"/>
+          <p:cNvSpPr txBox="1"/>
+          <p:nvPr/>
+        </p:nvSpPr>
+        <p:spPr>
+          <a:xfrm>
+            <a:off x="6583680" y="5056632"/>
+            <a:ext cx="5065776" cy="566928"/>
+          </a:xfrm>
+          <a:prstGeom prst="rect">
+            <a:avLst/>
+          </a:prstGeom>
+          <a:noFill/>
+        </p:spPr>
+        <p:txBody>
+          <a:bodyPr wrap="square" anchor="ctr" lIns="0" rIns="0" tIns="25400" bIns="25400">
+            <a:spAutoFit/>
+          </a:bodyPr>
+          <a:lstStyle/>
+          <a:p>
+            <a:pPr algn="ctr"/>
+            <a:r>
+              <a:rPr sz="1300" b="0" i="0">
+                <a:solidFill>
+                  <a:srgbClr val="334155"/>
+                </a:solidFill>
+                <a:latin typeface="Segoe UI"/>
+              </a:rPr>
+              <a:t>KD still positive</a:t>
+            </a:r>
+          </a:p>
+        </p:txBody>
+      </p:sp>
+      <p:sp>
+        <p:nvSpPr>
+          <p:cNvPr id="28" name="Rounded Rectangle 27"/>
           <p:cNvSpPr/>
           <p:nvPr/>
         </p:nvSpPr>
         <p:spPr>
           <a:xfrm>
-            <a:off x="475488" y="5440680"/>
-            <a:ext cx="91440" cy="960120"/>
-          </a:xfrm>
-          <a:prstGeom prst="rect">
-            <a:avLst/>
+            <a:off x="475488" y="5623560"/>
+            <a:ext cx="11247120" cy="566928"/>
+          </a:xfrm>
+          <a:prstGeom prst="roundRect">
+            <a:avLst>
+              <a:gd name="adj" fmla="val 3000"/>
+            </a:avLst>
           </a:prstGeom>
           <a:solidFill>
-            <a:srgbClr val="EF4444"/>
+            <a:srgbClr val="FFFFFF"/>
           </a:solidFill>
-          <a:ln>
-            <a:noFill/>
+          <a:ln w="12700">
+            <a:solidFill>
+              <a:srgbClr val="E2E8F0"/>
+            </a:solidFill>
           </a:ln>
           <a:effectLst/>
         </p:spPr>
@@ -10296,70 +10230,105 @@
       </p:sp>
       <p:sp>
         <p:nvSpPr>
-          <p:cNvPr id="22" name="TextBox 21"/>
-          <p:cNvSpPr txBox="1"/>
-          <p:nvPr/>
-        </p:nvSpPr>
-        <p:spPr>
-          <a:xfrm>
-            <a:off x="676656" y="5559552"/>
-            <a:ext cx="3200400" cy="292608"/>
-          </a:xfrm>
-          <a:prstGeom prst="rect">
-            <a:avLst/>
-          </a:prstGeom>
-          <a:noFill/>
-        </p:spPr>
-        <p:txBody>
-          <a:bodyPr wrap="square" lIns="0" rIns="0" tIns="25400" bIns="25400">
-            <a:spAutoFit/>
-          </a:bodyPr>
-          <a:lstStyle/>
-          <a:p>
-            <a:pPr algn="l"/>
-            <a:r>
-              <a:rPr sz="1200" b="1" i="0" spc="100">
-                <a:solidFill>
-                  <a:srgbClr val="DC2626"/>
-                </a:solidFill>
-                <a:latin typeface="Segoe UI"/>
-              </a:rPr>
-              <a:t>Not yet conclusive</a:t>
-            </a:r>
-          </a:p>
-        </p:txBody>
-      </p:sp>
-      <p:sp>
-        <p:nvSpPr>
-          <p:cNvPr id="23" name="TextBox 22"/>
-          <p:cNvSpPr txBox="1"/>
-          <p:nvPr/>
-        </p:nvSpPr>
-        <p:spPr>
-          <a:xfrm>
-            <a:off x="676656" y="5852160"/>
-            <a:ext cx="10881360" cy="502920"/>
-          </a:xfrm>
-          <a:prstGeom prst="rect">
-            <a:avLst/>
-          </a:prstGeom>
-          <a:noFill/>
-        </p:spPr>
-        <p:txBody>
-          <a:bodyPr wrap="square" lIns="0" rIns="0" tIns="25400" bIns="25400">
-            <a:spAutoFit/>
-          </a:bodyPr>
-          <a:lstStyle/>
-          <a:p>
-            <a:pPr algn="l"/>
-            <a:r>
-              <a:rPr sz="1350" b="1" i="0">
+          <p:cNvPr id="29" name="TextBox 28"/>
+          <p:cNvSpPr txBox="1"/>
+          <p:nvPr/>
+        </p:nvSpPr>
+        <p:spPr>
+          <a:xfrm>
+            <a:off x="548640" y="5623560"/>
+            <a:ext cx="4242816" cy="566928"/>
+          </a:xfrm>
+          <a:prstGeom prst="rect">
+            <a:avLst/>
+          </a:prstGeom>
+          <a:noFill/>
+        </p:spPr>
+        <p:txBody>
+          <a:bodyPr wrap="square" anchor="ctr" lIns="0" rIns="0" tIns="25400" bIns="25400">
+            <a:spAutoFit/>
+          </a:bodyPr>
+          <a:lstStyle/>
+          <a:p>
+            <a:pPr algn="ctr"/>
+            <a:r>
+              <a:rPr sz="1300" b="1" i="0">
                 <a:solidFill>
                   <a:srgbClr val="0F172A"/>
                 </a:solidFill>
                 <a:latin typeface="Segoe UI"/>
               </a:rPr>
-              <a:t>The real-vs-translated-vs-generated comparison needs all three arms. Do not draw the hierarchy conclusion from this single number — translated and generated results pending.</a:t>
+              <a:t>real vs translated vs generated</a:t>
+            </a:r>
+          </a:p>
+        </p:txBody>
+      </p:sp>
+      <p:sp>
+        <p:nvSpPr>
+          <p:cNvPr id="30" name="TextBox 29"/>
+          <p:cNvSpPr txBox="1"/>
+          <p:nvPr/>
+        </p:nvSpPr>
+        <p:spPr>
+          <a:xfrm>
+            <a:off x="4937760" y="5623560"/>
+            <a:ext cx="1499616" cy="566928"/>
+          </a:xfrm>
+          <a:prstGeom prst="rect">
+            <a:avLst/>
+          </a:prstGeom>
+          <a:noFill/>
+        </p:spPr>
+        <p:txBody>
+          <a:bodyPr wrap="square" anchor="ctr" lIns="0" rIns="0" tIns="25400" bIns="25400">
+            <a:spAutoFit/>
+          </a:bodyPr>
+          <a:lstStyle/>
+          <a:p>
+            <a:pPr algn="ctr"/>
+            <a:r>
+              <a:rPr sz="1300" b="0" i="0">
+                <a:solidFill>
+                  <a:srgbClr val="334155"/>
+                </a:solidFill>
+                <a:latin typeface="Segoe UI"/>
+              </a:rPr>
+              <a:t>n/a</a:t>
+            </a:r>
+          </a:p>
+        </p:txBody>
+      </p:sp>
+      <p:sp>
+        <p:nvSpPr>
+          <p:cNvPr id="31" name="TextBox 30"/>
+          <p:cNvSpPr txBox="1"/>
+          <p:nvPr/>
+        </p:nvSpPr>
+        <p:spPr>
+          <a:xfrm>
+            <a:off x="6583680" y="5623560"/>
+            <a:ext cx="5065776" cy="566928"/>
+          </a:xfrm>
+          <a:prstGeom prst="rect">
+            <a:avLst/>
+          </a:prstGeom>
+          <a:noFill/>
+        </p:spPr>
+        <p:txBody>
+          <a:bodyPr wrap="square" anchor="ctr" lIns="0" rIns="0" tIns="25400" bIns="25400">
+            <a:spAutoFit/>
+          </a:bodyPr>
+          <a:lstStyle/>
+          <a:p>
+            <a:pPr algn="ctr"/>
+            <a:r>
+              <a:rPr sz="1300" b="0" i="0">
+                <a:solidFill>
+                  <a:srgbClr val="334155"/>
+                </a:solidFill>
+                <a:latin typeface="Segoe UI"/>
+              </a:rPr>
+              <a:t>3 arms not yet complete</a:t>
             </a:r>
           </a:p>
         </p:txBody>
@@ -10455,7 +10424,7 @@
                 </a:solidFill>
                 <a:latin typeface="Segoe UI"/>
               </a:rPr>
-              <a:t>What a Complete 3-Way Comparison Will Settle</a:t>
+              <a:t>Remaining Work</a:t>
             </a:r>
           </a:p>
         </p:txBody>
@@ -10468,16 +10437,16 @@
         </p:nvSpPr>
         <p:spPr>
           <a:xfrm>
-            <a:off x="475488" y="1508760"/>
-            <a:ext cx="5440680" cy="3017520"/>
+            <a:off x="475488" y="1554480"/>
+            <a:ext cx="11247120" cy="420624"/>
           </a:xfrm>
           <a:prstGeom prst="roundRect">
             <a:avLst>
-              <a:gd name="adj" fmla="val 6000"/>
+              <a:gd name="adj" fmla="val 8000"/>
             </a:avLst>
           </a:prstGeom>
           <a:solidFill>
-            <a:srgbClr val="D6F2E4"/>
+            <a:srgbClr val="F1F5F9"/>
           </a:solidFill>
           <a:ln>
             <a:noFill/>
@@ -10514,8 +10483,8 @@
         </p:nvSpPr>
         <p:spPr>
           <a:xfrm>
-            <a:off x="685800" y="1691640"/>
-            <a:ext cx="5029200" cy="411480"/>
+            <a:off x="548640" y="1609344"/>
+            <a:ext cx="4791456" cy="310896"/>
           </a:xfrm>
           <a:prstGeom prst="rect">
             <a:avLst/>
@@ -10528,6 +10497,570 @@
           </a:bodyPr>
           <a:lstStyle/>
           <a:p>
+            <a:pPr algn="ctr"/>
+            <a:r>
+              <a:rPr sz="1200" b="1" i="0" spc="40">
+                <a:solidFill>
+                  <a:srgbClr val="64748B"/>
+                </a:solidFill>
+                <a:latin typeface="Segoe UI"/>
+              </a:rPr>
+              <a:t>TODO</a:t>
+            </a:r>
+          </a:p>
+        </p:txBody>
+      </p:sp>
+      <p:sp>
+        <p:nvSpPr>
+          <p:cNvPr id="6" name="TextBox 5"/>
+          <p:cNvSpPr txBox="1"/>
+          <p:nvPr/>
+        </p:nvSpPr>
+        <p:spPr>
+          <a:xfrm>
+            <a:off x="5486400" y="1609344"/>
+            <a:ext cx="2962656" cy="310896"/>
+          </a:xfrm>
+          <a:prstGeom prst="rect">
+            <a:avLst/>
+          </a:prstGeom>
+          <a:noFill/>
+        </p:spPr>
+        <p:txBody>
+          <a:bodyPr wrap="square" lIns="0" rIns="0" tIns="25400" bIns="25400">
+            <a:spAutoFit/>
+          </a:bodyPr>
+          <a:lstStyle/>
+          <a:p>
+            <a:pPr algn="ctr"/>
+            <a:r>
+              <a:rPr sz="1200" b="1" i="0" spc="40">
+                <a:solidFill>
+                  <a:srgbClr val="64748B"/>
+                </a:solidFill>
+                <a:latin typeface="Segoe UI"/>
+              </a:rPr>
+              <a:t>STATUS</a:t>
+            </a:r>
+          </a:p>
+        </p:txBody>
+      </p:sp>
+      <p:sp>
+        <p:nvSpPr>
+          <p:cNvPr id="7" name="TextBox 6"/>
+          <p:cNvSpPr txBox="1"/>
+          <p:nvPr/>
+        </p:nvSpPr>
+        <p:spPr>
+          <a:xfrm>
+            <a:off x="8595360" y="1609344"/>
+            <a:ext cx="3054096" cy="310896"/>
+          </a:xfrm>
+          <a:prstGeom prst="rect">
+            <a:avLst/>
+          </a:prstGeom>
+          <a:noFill/>
+        </p:spPr>
+        <p:txBody>
+          <a:bodyPr wrap="square" lIns="0" rIns="0" tIns="25400" bIns="25400">
+            <a:spAutoFit/>
+          </a:bodyPr>
+          <a:lstStyle/>
+          <a:p>
+            <a:pPr algn="ctr"/>
+            <a:r>
+              <a:rPr sz="1200" b="1" i="0" spc="40">
+                <a:solidFill>
+                  <a:srgbClr val="64748B"/>
+                </a:solidFill>
+                <a:latin typeface="Segoe UI"/>
+              </a:rPr>
+              <a:t>ETA</a:t>
+            </a:r>
+          </a:p>
+        </p:txBody>
+      </p:sp>
+      <p:sp>
+        <p:nvSpPr>
+          <p:cNvPr id="8" name="Rounded Rectangle 7"/>
+          <p:cNvSpPr/>
+          <p:nvPr/>
+        </p:nvSpPr>
+        <p:spPr>
+          <a:xfrm>
+            <a:off x="475488" y="1975104"/>
+            <a:ext cx="11247120" cy="594360"/>
+          </a:xfrm>
+          <a:prstGeom prst="roundRect">
+            <a:avLst>
+              <a:gd name="adj" fmla="val 3000"/>
+            </a:avLst>
+          </a:prstGeom>
+          <a:solidFill>
+            <a:srgbClr val="FFFFFF"/>
+          </a:solidFill>
+          <a:ln w="12700">
+            <a:solidFill>
+              <a:srgbClr val="E2E8F0"/>
+            </a:solidFill>
+          </a:ln>
+          <a:effectLst/>
+        </p:spPr>
+        <p:style>
+          <a:lnRef idx="1">
+            <a:schemeClr val="accent1"/>
+          </a:lnRef>
+          <a:fillRef idx="3">
+            <a:schemeClr val="accent1"/>
+          </a:fillRef>
+          <a:effectRef idx="2">
+            <a:schemeClr val="accent1"/>
+          </a:effectRef>
+          <a:fontRef idx="minor">
+            <a:schemeClr val="lt1"/>
+          </a:fontRef>
+        </p:style>
+        <p:txBody>
+          <a:bodyPr rtlCol="0" anchor="ctr"/>
+          <a:lstStyle/>
+          <a:p>
+            <a:pPr algn="ctr"/>
+          </a:p>
+        </p:txBody>
+      </p:sp>
+      <p:sp>
+        <p:nvSpPr>
+          <p:cNvPr id="9" name="TextBox 8"/>
+          <p:cNvSpPr txBox="1"/>
+          <p:nvPr/>
+        </p:nvSpPr>
+        <p:spPr>
+          <a:xfrm>
+            <a:off x="548640" y="1975104"/>
+            <a:ext cx="4791456" cy="594360"/>
+          </a:xfrm>
+          <a:prstGeom prst="rect">
+            <a:avLst/>
+          </a:prstGeom>
+          <a:noFill/>
+        </p:spPr>
+        <p:txBody>
+          <a:bodyPr wrap="square" anchor="ctr" lIns="0" rIns="0" tIns="25400" bIns="25400">
+            <a:spAutoFit/>
+          </a:bodyPr>
+          <a:lstStyle/>
+          <a:p>
+            <a:pPr algn="ctr"/>
+            <a:r>
+              <a:rPr sz="1450" b="1" i="0">
+                <a:solidFill>
+                  <a:srgbClr val="0F172A"/>
+                </a:solidFill>
+                <a:latin typeface="Segoe UI"/>
+              </a:rPr>
+              <a:t>Translated arm: seeds 3–5</a:t>
+            </a:r>
+          </a:p>
+        </p:txBody>
+      </p:sp>
+      <p:sp>
+        <p:nvSpPr>
+          <p:cNvPr id="10" name="TextBox 9"/>
+          <p:cNvSpPr txBox="1"/>
+          <p:nvPr/>
+        </p:nvSpPr>
+        <p:spPr>
+          <a:xfrm>
+            <a:off x="5486400" y="1975104"/>
+            <a:ext cx="2962656" cy="594360"/>
+          </a:xfrm>
+          <a:prstGeom prst="rect">
+            <a:avLst/>
+          </a:prstGeom>
+          <a:noFill/>
+        </p:spPr>
+        <p:txBody>
+          <a:bodyPr wrap="square" anchor="ctr" lIns="0" rIns="0" tIns="25400" bIns="25400">
+            <a:spAutoFit/>
+          </a:bodyPr>
+          <a:lstStyle/>
+          <a:p>
+            <a:pPr algn="ctr"/>
+            <a:r>
+              <a:rPr sz="1450" b="0" i="0">
+                <a:solidFill>
+                  <a:srgbClr val="334155"/>
+                </a:solidFill>
+                <a:latin typeface="Segoe UI"/>
+              </a:rPr>
+              <a:t>running</a:t>
+            </a:r>
+          </a:p>
+        </p:txBody>
+      </p:sp>
+      <p:sp>
+        <p:nvSpPr>
+          <p:cNvPr id="11" name="TextBox 10"/>
+          <p:cNvSpPr txBox="1"/>
+          <p:nvPr/>
+        </p:nvSpPr>
+        <p:spPr>
+          <a:xfrm>
+            <a:off x="8595360" y="1975104"/>
+            <a:ext cx="3054096" cy="594360"/>
+          </a:xfrm>
+          <a:prstGeom prst="rect">
+            <a:avLst/>
+          </a:prstGeom>
+          <a:noFill/>
+        </p:spPr>
+        <p:txBody>
+          <a:bodyPr wrap="square" anchor="ctr" lIns="0" rIns="0" tIns="25400" bIns="25400">
+            <a:spAutoFit/>
+          </a:bodyPr>
+          <a:lstStyle/>
+          <a:p>
+            <a:pPr algn="ctr"/>
+            <a:r>
+              <a:rPr sz="1450" b="0" i="0">
+                <a:solidFill>
+                  <a:srgbClr val="334155"/>
+                </a:solidFill>
+                <a:latin typeface="Segoe UI"/>
+              </a:rPr>
+              <a:t>~7/4</a:t>
+            </a:r>
+          </a:p>
+        </p:txBody>
+      </p:sp>
+      <p:sp>
+        <p:nvSpPr>
+          <p:cNvPr id="12" name="Rounded Rectangle 11"/>
+          <p:cNvSpPr/>
+          <p:nvPr/>
+        </p:nvSpPr>
+        <p:spPr>
+          <a:xfrm>
+            <a:off x="475488" y="2569464"/>
+            <a:ext cx="11247120" cy="594360"/>
+          </a:xfrm>
+          <a:prstGeom prst="roundRect">
+            <a:avLst>
+              <a:gd name="adj" fmla="val 3000"/>
+            </a:avLst>
+          </a:prstGeom>
+          <a:solidFill>
+            <a:srgbClr val="FFFFFF"/>
+          </a:solidFill>
+          <a:ln w="12700">
+            <a:solidFill>
+              <a:srgbClr val="E2E8F0"/>
+            </a:solidFill>
+          </a:ln>
+          <a:effectLst/>
+        </p:spPr>
+        <p:style>
+          <a:lnRef idx="1">
+            <a:schemeClr val="accent1"/>
+          </a:lnRef>
+          <a:fillRef idx="3">
+            <a:schemeClr val="accent1"/>
+          </a:fillRef>
+          <a:effectRef idx="2">
+            <a:schemeClr val="accent1"/>
+          </a:effectRef>
+          <a:fontRef idx="minor">
+            <a:schemeClr val="lt1"/>
+          </a:fontRef>
+        </p:style>
+        <p:txBody>
+          <a:bodyPr rtlCol="0" anchor="ctr"/>
+          <a:lstStyle/>
+          <a:p>
+            <a:pPr algn="ctr"/>
+          </a:p>
+        </p:txBody>
+      </p:sp>
+      <p:sp>
+        <p:nvSpPr>
+          <p:cNvPr id="13" name="TextBox 12"/>
+          <p:cNvSpPr txBox="1"/>
+          <p:nvPr/>
+        </p:nvSpPr>
+        <p:spPr>
+          <a:xfrm>
+            <a:off x="548640" y="2569464"/>
+            <a:ext cx="4791456" cy="594360"/>
+          </a:xfrm>
+          <a:prstGeom prst="rect">
+            <a:avLst/>
+          </a:prstGeom>
+          <a:noFill/>
+        </p:spPr>
+        <p:txBody>
+          <a:bodyPr wrap="square" anchor="ctr" lIns="0" rIns="0" tIns="25400" bIns="25400">
+            <a:spAutoFit/>
+          </a:bodyPr>
+          <a:lstStyle/>
+          <a:p>
+            <a:pPr algn="ctr"/>
+            <a:r>
+              <a:rPr sz="1450" b="1" i="0">
+                <a:solidFill>
+                  <a:srgbClr val="0F172A"/>
+                </a:solidFill>
+                <a:latin typeface="Segoe UI"/>
+              </a:rPr>
+              <a:t>Generated arm: 5 seeds</a:t>
+            </a:r>
+          </a:p>
+        </p:txBody>
+      </p:sp>
+      <p:sp>
+        <p:nvSpPr>
+          <p:cNvPr id="14" name="TextBox 13"/>
+          <p:cNvSpPr txBox="1"/>
+          <p:nvPr/>
+        </p:nvSpPr>
+        <p:spPr>
+          <a:xfrm>
+            <a:off x="5486400" y="2569464"/>
+            <a:ext cx="2962656" cy="594360"/>
+          </a:xfrm>
+          <a:prstGeom prst="rect">
+            <a:avLst/>
+          </a:prstGeom>
+          <a:noFill/>
+        </p:spPr>
+        <p:txBody>
+          <a:bodyPr wrap="square" anchor="ctr" lIns="0" rIns="0" tIns="25400" bIns="25400">
+            <a:spAutoFit/>
+          </a:bodyPr>
+          <a:lstStyle/>
+          <a:p>
+            <a:pPr algn="ctr"/>
+            <a:r>
+              <a:rPr sz="1450" b="0" i="0">
+                <a:solidFill>
+                  <a:srgbClr val="334155"/>
+                </a:solidFill>
+                <a:latin typeface="Segoe UI"/>
+              </a:rPr>
+              <a:t>queued</a:t>
+            </a:r>
+          </a:p>
+        </p:txBody>
+      </p:sp>
+      <p:sp>
+        <p:nvSpPr>
+          <p:cNvPr id="15" name="TextBox 14"/>
+          <p:cNvSpPr txBox="1"/>
+          <p:nvPr/>
+        </p:nvSpPr>
+        <p:spPr>
+          <a:xfrm>
+            <a:off x="8595360" y="2569464"/>
+            <a:ext cx="3054096" cy="594360"/>
+          </a:xfrm>
+          <a:prstGeom prst="rect">
+            <a:avLst/>
+          </a:prstGeom>
+          <a:noFill/>
+        </p:spPr>
+        <p:txBody>
+          <a:bodyPr wrap="square" anchor="ctr" lIns="0" rIns="0" tIns="25400" bIns="25400">
+            <a:spAutoFit/>
+          </a:bodyPr>
+          <a:lstStyle/>
+          <a:p>
+            <a:pPr algn="ctr"/>
+            <a:r>
+              <a:rPr sz="1450" b="0" i="0">
+                <a:solidFill>
+                  <a:srgbClr val="334155"/>
+                </a:solidFill>
+                <a:latin typeface="Segoe UI"/>
+              </a:rPr>
+              <a:t>~7/5</a:t>
+            </a:r>
+          </a:p>
+        </p:txBody>
+      </p:sp>
+      <p:sp>
+        <p:nvSpPr>
+          <p:cNvPr id="16" name="Rounded Rectangle 15"/>
+          <p:cNvSpPr/>
+          <p:nvPr/>
+        </p:nvSpPr>
+        <p:spPr>
+          <a:xfrm>
+            <a:off x="475488" y="3163824"/>
+            <a:ext cx="11247120" cy="594360"/>
+          </a:xfrm>
+          <a:prstGeom prst="roundRect">
+            <a:avLst>
+              <a:gd name="adj" fmla="val 3000"/>
+            </a:avLst>
+          </a:prstGeom>
+          <a:solidFill>
+            <a:srgbClr val="FFFFFF"/>
+          </a:solidFill>
+          <a:ln w="12700">
+            <a:solidFill>
+              <a:srgbClr val="E2E8F0"/>
+            </a:solidFill>
+          </a:ln>
+          <a:effectLst/>
+        </p:spPr>
+        <p:style>
+          <a:lnRef idx="1">
+            <a:schemeClr val="accent1"/>
+          </a:lnRef>
+          <a:fillRef idx="3">
+            <a:schemeClr val="accent1"/>
+          </a:fillRef>
+          <a:effectRef idx="2">
+            <a:schemeClr val="accent1"/>
+          </a:effectRef>
+          <a:fontRef idx="minor">
+            <a:schemeClr val="lt1"/>
+          </a:fontRef>
+        </p:style>
+        <p:txBody>
+          <a:bodyPr rtlCol="0" anchor="ctr"/>
+          <a:lstStyle/>
+          <a:p>
+            <a:pPr algn="ctr"/>
+          </a:p>
+        </p:txBody>
+      </p:sp>
+      <p:sp>
+        <p:nvSpPr>
+          <p:cNvPr id="17" name="TextBox 16"/>
+          <p:cNvSpPr txBox="1"/>
+          <p:nvPr/>
+        </p:nvSpPr>
+        <p:spPr>
+          <a:xfrm>
+            <a:off x="548640" y="3163824"/>
+            <a:ext cx="4791456" cy="594360"/>
+          </a:xfrm>
+          <a:prstGeom prst="rect">
+            <a:avLst/>
+          </a:prstGeom>
+          <a:noFill/>
+        </p:spPr>
+        <p:txBody>
+          <a:bodyPr wrap="square" anchor="ctr" lIns="0" rIns="0" tIns="25400" bIns="25400">
+            <a:spAutoFit/>
+          </a:bodyPr>
+          <a:lstStyle/>
+          <a:p>
+            <a:pPr algn="ctr"/>
+            <a:r>
+              <a:rPr sz="1450" b="1" i="0">
+                <a:solidFill>
+                  <a:srgbClr val="0F172A"/>
+                </a:solidFill>
+                <a:latin typeface="Segoe UI"/>
+              </a:rPr>
+              <a:t>Update §5.29 + registry.yaml</a:t>
+            </a:r>
+          </a:p>
+        </p:txBody>
+      </p:sp>
+      <p:sp>
+        <p:nvSpPr>
+          <p:cNvPr id="18" name="TextBox 17"/>
+          <p:cNvSpPr txBox="1"/>
+          <p:nvPr/>
+        </p:nvSpPr>
+        <p:spPr>
+          <a:xfrm>
+            <a:off x="5486400" y="3163824"/>
+            <a:ext cx="2962656" cy="594360"/>
+          </a:xfrm>
+          <a:prstGeom prst="rect">
+            <a:avLst/>
+          </a:prstGeom>
+          <a:noFill/>
+        </p:spPr>
+        <p:txBody>
+          <a:bodyPr wrap="square" anchor="ctr" lIns="0" rIns="0" tIns="25400" bIns="25400">
+            <a:spAutoFit/>
+          </a:bodyPr>
+          <a:lstStyle/>
+          <a:p>
+            <a:pPr algn="ctr"/>
+            <a:r>
+              <a:rPr sz="1450" b="0" i="0">
+                <a:solidFill>
+                  <a:srgbClr val="334155"/>
+                </a:solidFill>
+                <a:latin typeface="Segoe UI"/>
+              </a:rPr>
+              <a:t>pending</a:t>
+            </a:r>
+          </a:p>
+        </p:txBody>
+      </p:sp>
+      <p:sp>
+        <p:nvSpPr>
+          <p:cNvPr id="19" name="TextBox 18"/>
+          <p:cNvSpPr txBox="1"/>
+          <p:nvPr/>
+        </p:nvSpPr>
+        <p:spPr>
+          <a:xfrm>
+            <a:off x="8595360" y="3163824"/>
+            <a:ext cx="3054096" cy="594360"/>
+          </a:xfrm>
+          <a:prstGeom prst="rect">
+            <a:avLst/>
+          </a:prstGeom>
+          <a:noFill/>
+        </p:spPr>
+        <p:txBody>
+          <a:bodyPr wrap="square" anchor="ctr" lIns="0" rIns="0" tIns="25400" bIns="25400">
+            <a:spAutoFit/>
+          </a:bodyPr>
+          <a:lstStyle/>
+          <a:p>
+            <a:pPr algn="ctr"/>
+            <a:r>
+              <a:rPr sz="1450" b="0" i="0">
+                <a:solidFill>
+                  <a:srgbClr val="334155"/>
+                </a:solidFill>
+                <a:latin typeface="Segoe UI"/>
+              </a:rPr>
+              <a:t>after all 3 done</a:t>
+            </a:r>
+          </a:p>
+        </p:txBody>
+      </p:sp>
+      <p:sp>
+        <p:nvSpPr>
+          <p:cNvPr id="20" name="TextBox 19"/>
+          <p:cNvSpPr txBox="1"/>
+          <p:nvPr/>
+        </p:nvSpPr>
+        <p:spPr>
+          <a:xfrm>
+            <a:off x="502920" y="4078224"/>
+            <a:ext cx="10972800" cy="411480"/>
+          </a:xfrm>
+          <a:prstGeom prst="rect">
+            <a:avLst/>
+          </a:prstGeom>
+          <a:noFill/>
+        </p:spPr>
+        <p:txBody>
+          <a:bodyPr wrap="square" lIns="0" rIns="0" tIns="25400" bIns="25400">
+            <a:spAutoFit/>
+          </a:bodyPr>
+          <a:lstStyle/>
+          <a:p>
             <a:pPr algn="l"/>
             <a:r>
               <a:rPr sz="1600" b="1" i="0">
@@ -10543,14 +11076,14 @@
       </p:sp>
       <p:sp>
         <p:nvSpPr>
-          <p:cNvPr id="6" name="TextBox 5"/>
-          <p:cNvSpPr txBox="1"/>
-          <p:nvPr/>
-        </p:nvSpPr>
-        <p:spPr>
-          <a:xfrm>
-            <a:off x="685800" y="2194560"/>
-            <a:ext cx="5029200" cy="2743200"/>
+          <p:cNvPr id="21" name="TextBox 20"/>
+          <p:cNvSpPr txBox="1"/>
+          <p:nvPr/>
+        </p:nvSpPr>
+        <p:spPr>
+          <a:xfrm>
+            <a:off x="502920" y="4535424"/>
+            <a:ext cx="10972800" cy="2743200"/>
           </a:xfrm>
           <a:prstGeom prst="rect">
             <a:avLst/>
@@ -10571,11 +11104,11 @@
                 <a:spcPts val="0"/>
               </a:spcBef>
               <a:spcAft>
-                <a:spcPts val="1200"/>
+                <a:spcPts val="800"/>
               </a:spcAft>
             </a:pPr>
             <a:r>
-              <a:rPr sz="1350" b="1">
+              <a:rPr sz="1600" b="1">
                 <a:solidFill>
                   <a:srgbClr val="10B981"/>
                 </a:solidFill>
@@ -10584,31 +11117,13 @@
               <a:t>•  </a:t>
             </a:r>
             <a:r>
-              <a:rPr sz="1350" i="0" b="0">
+              <a:rPr sz="1600" i="0" b="1">
                 <a:solidFill>
                   <a:srgbClr val="334155"/>
                 </a:solidFill>
                 <a:latin typeface="Segoe UI"/>
               </a:rPr>
-              <a:t>Confirms or refutes </a:t>
-            </a:r>
-            <a:r>
-              <a:rPr sz="1350" i="0" b="1">
-                <a:solidFill>
-                  <a:srgbClr val="1D4ED8"/>
-                </a:solidFill>
-                <a:latin typeface="Consolas"/>
-              </a:rPr>
-              <a:t>Real &gt; Translated &gt; Generated</a:t>
-            </a:r>
-            <a:r>
-              <a:rPr sz="1350" i="0" b="0">
-                <a:solidFill>
-                  <a:srgbClr val="334155"/>
-                </a:solidFill>
-                <a:latin typeface="Segoe UI"/>
-              </a:rPr>
-              <a:t> with pool size held constant</a:t>
+              <a:t>Real &gt; Translated &gt; Generated: confirm / refute</a:t>
             </a:r>
           </a:p>
           <a:p>
@@ -10620,11 +11135,11 @@
                 <a:spcPts val="0"/>
               </a:spcBef>
               <a:spcAft>
-                <a:spcPts val="1200"/>
+                <a:spcPts val="800"/>
               </a:spcAft>
             </a:pPr>
             <a:r>
-              <a:rPr sz="1350" b="1">
+              <a:rPr sz="1600" b="1">
                 <a:solidFill>
                   <a:srgbClr val="10B981"/>
                 </a:solidFill>
@@ -10633,13 +11148,13 @@
               <a:t>•  </a:t>
             </a:r>
             <a:r>
-              <a:rPr sz="1350" i="0" b="0">
+              <a:rPr sz="1600" i="0" b="1">
                 <a:solidFill>
                   <a:srgbClr val="334155"/>
                 </a:solidFill>
                 <a:latin typeface="Segoe UI"/>
               </a:rPr>
-              <a:t>First-ever direct real-vs-translated data point (the missing middle link)</a:t>
+              <a:t>1st real vs translated link</a:t>
             </a:r>
           </a:p>
           <a:p>
@@ -10651,11 +11166,11 @@
                 <a:spcPts val="0"/>
               </a:spcBef>
               <a:spcAft>
-                <a:spcPts val="1200"/>
+                <a:spcPts val="800"/>
               </a:spcAft>
             </a:pPr>
             <a:r>
-              <a:rPr sz="1350" b="1">
+              <a:rPr sz="1600" b="1">
                 <a:solidFill>
                   <a:srgbClr val="10B981"/>
                 </a:solidFill>
@@ -10664,264 +11179,31 @@
               <a:t>•  </a:t>
             </a:r>
             <a:r>
-              <a:rPr sz="1350" i="0" b="0">
+              <a:rPr sz="1600" i="0" b="1">
                 <a:solidFill>
                   <a:srgbClr val="334155"/>
                 </a:solidFill>
                 <a:latin typeface="Segoe UI"/>
               </a:rPr>
-              <a:t>2nd real&gt;generated data point (after zho_restaurant) — needed to claim generalization</a:t>
-            </a:r>
-          </a:p>
-        </p:txBody>
-      </p:sp>
-      <p:sp>
-        <p:nvSpPr>
-          <p:cNvPr id="7" name="Rounded Rectangle 6"/>
+              <a:t>2nd real &gt; gen data point</a:t>
+            </a:r>
+          </a:p>
+        </p:txBody>
+      </p:sp>
+      <p:sp>
+        <p:nvSpPr>
+          <p:cNvPr id="22" name="Rounded Rectangle 21"/>
           <p:cNvSpPr/>
           <p:nvPr/>
         </p:nvSpPr>
         <p:spPr>
           <a:xfrm>
-            <a:off x="6263640" y="1508760"/>
-            <a:ext cx="5440680" cy="3017520"/>
+            <a:off x="475488" y="5806440"/>
+            <a:ext cx="11247120" cy="685800"/>
           </a:xfrm>
           <a:prstGeom prst="roundRect">
             <a:avLst>
-              <a:gd name="adj" fmla="val 6000"/>
-            </a:avLst>
-          </a:prstGeom>
-          <a:solidFill>
-            <a:srgbClr val="DEEAFB"/>
-          </a:solidFill>
-          <a:ln>
-            <a:noFill/>
-          </a:ln>
-          <a:effectLst/>
-        </p:spPr>
-        <p:style>
-          <a:lnRef idx="1">
-            <a:schemeClr val="accent1"/>
-          </a:lnRef>
-          <a:fillRef idx="3">
-            <a:schemeClr val="accent1"/>
-          </a:fillRef>
-          <a:effectRef idx="2">
-            <a:schemeClr val="accent1"/>
-          </a:effectRef>
-          <a:fontRef idx="minor">
-            <a:schemeClr val="lt1"/>
-          </a:fontRef>
-        </p:style>
-        <p:txBody>
-          <a:bodyPr rtlCol="0" anchor="ctr"/>
-          <a:lstStyle/>
-          <a:p>
-            <a:pPr algn="ctr"/>
-          </a:p>
-        </p:txBody>
-      </p:sp>
-      <p:sp>
-        <p:nvSpPr>
-          <p:cNvPr id="8" name="TextBox 7"/>
-          <p:cNvSpPr txBox="1"/>
-          <p:nvPr/>
-        </p:nvSpPr>
-        <p:spPr>
-          <a:xfrm>
-            <a:off x="6473952" y="1691640"/>
-            <a:ext cx="5029200" cy="411480"/>
-          </a:xfrm>
-          <a:prstGeom prst="rect">
-            <a:avLst/>
-          </a:prstGeom>
-          <a:noFill/>
-        </p:spPr>
-        <p:txBody>
-          <a:bodyPr wrap="square" lIns="0" rIns="0" tIns="25400" bIns="25400">
-            <a:spAutoFit/>
-          </a:bodyPr>
-          <a:lstStyle/>
-          <a:p>
-            <a:pPr algn="l"/>
-            <a:r>
-              <a:rPr sz="1600" b="1" i="0">
-                <a:solidFill>
-                  <a:srgbClr val="1D4ED8"/>
-                </a:solidFill>
-                <a:latin typeface="Segoe UI"/>
-              </a:rPr>
-              <a:t>Remaining work</a:t>
-            </a:r>
-          </a:p>
-        </p:txBody>
-      </p:sp>
-      <p:sp>
-        <p:nvSpPr>
-          <p:cNvPr id="9" name="TextBox 8"/>
-          <p:cNvSpPr txBox="1"/>
-          <p:nvPr/>
-        </p:nvSpPr>
-        <p:spPr>
-          <a:xfrm>
-            <a:off x="6473952" y="2194560"/>
-            <a:ext cx="5029200" cy="2743200"/>
-          </a:xfrm>
-          <a:prstGeom prst="rect">
-            <a:avLst/>
-          </a:prstGeom>
-          <a:noFill/>
-        </p:spPr>
-        <p:txBody>
-          <a:bodyPr wrap="square" lIns="0" rIns="0" tIns="0" bIns="0">
-            <a:spAutoFit/>
-          </a:bodyPr>
-          <a:lstStyle/>
-          <a:p>
-            <a:pPr>
-              <a:lnSpc>
-                <a:spcPct val="104000"/>
-              </a:lnSpc>
-              <a:spcBef>
-                <a:spcPts val="0"/>
-              </a:spcBef>
-              <a:spcAft>
-                <a:spcPts val="1200"/>
-              </a:spcAft>
-            </a:pPr>
-            <a:r>
-              <a:rPr sz="1350" b="1">
-                <a:solidFill>
-                  <a:srgbClr val="3B82F6"/>
-                </a:solidFill>
-                <a:latin typeface="Segoe UI"/>
-              </a:rPr>
-              <a:t>•  </a:t>
-            </a:r>
-            <a:r>
-              <a:rPr sz="1350" i="0" b="0">
-                <a:solidFill>
-                  <a:srgbClr val="334155"/>
-                </a:solidFill>
-                <a:latin typeface="Segoe UI"/>
-              </a:rPr>
-              <a:t>Translated arm: seeds 3–5 to finish (~2026-07-04)</a:t>
-            </a:r>
-          </a:p>
-          <a:p>
-            <a:pPr>
-              <a:lnSpc>
-                <a:spcPct val="104000"/>
-              </a:lnSpc>
-              <a:spcBef>
-                <a:spcPts val="0"/>
-              </a:spcBef>
-              <a:spcAft>
-                <a:spcPts val="1200"/>
-              </a:spcAft>
-            </a:pPr>
-            <a:r>
-              <a:rPr sz="1350" b="1">
-                <a:solidFill>
-                  <a:srgbClr val="3B82F6"/>
-                </a:solidFill>
-                <a:latin typeface="Segoe UI"/>
-              </a:rPr>
-              <a:t>•  </a:t>
-            </a:r>
-            <a:r>
-              <a:rPr sz="1350" i="0" b="0">
-                <a:solidFill>
-                  <a:srgbClr val="334155"/>
-                </a:solidFill>
-                <a:latin typeface="Segoe UI"/>
-              </a:rPr>
-              <a:t>Generated arm: full 5-seed run queued next (~2026-07-05)</a:t>
-            </a:r>
-          </a:p>
-          <a:p>
-            <a:pPr>
-              <a:lnSpc>
-                <a:spcPct val="104000"/>
-              </a:lnSpc>
-              <a:spcBef>
-                <a:spcPts val="0"/>
-              </a:spcBef>
-              <a:spcAft>
-                <a:spcPts val="1200"/>
-              </a:spcAft>
-            </a:pPr>
-            <a:r>
-              <a:rPr sz="1350" b="1">
-                <a:solidFill>
-                  <a:srgbClr val="3B82F6"/>
-                </a:solidFill>
-                <a:latin typeface="Segoe UI"/>
-              </a:rPr>
-              <a:t>•  </a:t>
-            </a:r>
-            <a:r>
-              <a:rPr sz="1350" i="0" b="0">
-                <a:solidFill>
-                  <a:srgbClr val="334155"/>
-                </a:solidFill>
-                <a:latin typeface="Segoe UI"/>
-              </a:rPr>
-              <a:t>On completion: update </a:t>
-            </a:r>
-            <a:r>
-              <a:rPr sz="1350" i="0" b="1">
-                <a:solidFill>
-                  <a:srgbClr val="1D4ED8"/>
-                </a:solidFill>
-                <a:latin typeface="Consolas"/>
-              </a:rPr>
-              <a:t>docs/EXPERIMENTS.md §5.29</a:t>
-            </a:r>
-            <a:r>
-              <a:rPr sz="1350" i="0" b="0">
-                <a:solidFill>
-                  <a:srgbClr val="334155"/>
-                </a:solidFill>
-                <a:latin typeface="Segoe UI"/>
-              </a:rPr>
-              <a:t>, set </a:t>
-            </a:r>
-            <a:r>
-              <a:rPr sz="1350" i="0" b="1">
-                <a:solidFill>
-                  <a:srgbClr val="1D4ED8"/>
-                </a:solidFill>
-                <a:latin typeface="Consolas"/>
-              </a:rPr>
-              <a:t>registry.yaml</a:t>
-            </a:r>
-            <a:r>
-              <a:rPr sz="1350" i="0" b="0">
-                <a:solidFill>
-                  <a:srgbClr val="334155"/>
-                </a:solidFill>
-                <a:latin typeface="Segoe UI"/>
-              </a:rPr>
-              <a:t> status/result, decide zho_restaurant-style submission switch if the real arm wins</a:t>
-            </a:r>
-          </a:p>
-        </p:txBody>
-      </p:sp>
-      <p:sp>
-        <p:nvSpPr>
-          <p:cNvPr id="10" name="Rounded Rectangle 9"/>
-          <p:cNvSpPr/>
-          <p:nvPr/>
-        </p:nvSpPr>
-        <p:spPr>
-          <a:xfrm>
-            <a:off x="475488" y="4754880"/>
-            <a:ext cx="11247120" cy="1463040"/>
-          </a:xfrm>
-          <a:prstGeom prst="roundRect">
-            <a:avLst>
-              <a:gd name="adj" fmla="val 6000"/>
+              <a:gd name="adj" fmla="val 8000"/>
             </a:avLst>
           </a:prstGeom>
           <a:solidFill>
@@ -10956,14 +11238,14 @@
       </p:sp>
       <p:sp>
         <p:nvSpPr>
-          <p:cNvPr id="11" name="Rectangle 10"/>
+          <p:cNvPr id="23" name="Rectangle 22"/>
           <p:cNvSpPr/>
           <p:nvPr/>
         </p:nvSpPr>
         <p:spPr>
           <a:xfrm>
-            <a:off x="475488" y="4754880"/>
-            <a:ext cx="118872" cy="1463040"/>
+            <a:off x="475488" y="5806440"/>
+            <a:ext cx="91440" cy="685800"/>
           </a:xfrm>
           <a:prstGeom prst="rect">
             <a:avLst/>
@@ -11000,14 +11282,14 @@
       </p:sp>
       <p:sp>
         <p:nvSpPr>
-          <p:cNvPr id="12" name="TextBox 11"/>
-          <p:cNvSpPr txBox="1"/>
-          <p:nvPr/>
-        </p:nvSpPr>
-        <p:spPr>
-          <a:xfrm>
-            <a:off x="749808" y="4901184"/>
-            <a:ext cx="10789920" cy="320040"/>
+          <p:cNvPr id="24" name="TextBox 23"/>
+          <p:cNvSpPr txBox="1"/>
+          <p:nvPr/>
+        </p:nvSpPr>
+        <p:spPr>
+          <a:xfrm>
+            <a:off x="713232" y="5971032"/>
+            <a:ext cx="10698480" cy="384048"/>
           </a:xfrm>
           <a:prstGeom prst="rect">
             <a:avLst/>
@@ -11022,48 +11304,13 @@
           <a:p>
             <a:pPr algn="l"/>
             <a:r>
-              <a:rPr sz="1300" b="1" i="0" spc="100">
-                <a:solidFill>
-                  <a:srgbClr val="1E293B"/>
-                </a:solidFill>
-                <a:latin typeface="Segoe UI"/>
-              </a:rPr>
-              <a:t>Why it matters for the paper</a:t>
-            </a:r>
-          </a:p>
-        </p:txBody>
-      </p:sp>
-      <p:sp>
-        <p:nvSpPr>
-          <p:cNvPr id="13" name="TextBox 12"/>
-          <p:cNvSpPr txBox="1"/>
-          <p:nvPr/>
-        </p:nvSpPr>
-        <p:spPr>
-          <a:xfrm>
-            <a:off x="749808" y="5257800"/>
-            <a:ext cx="10789920" cy="868680"/>
-          </a:xfrm>
-          <a:prstGeom prst="rect">
-            <a:avLst/>
-          </a:prstGeom>
-          <a:noFill/>
-        </p:spPr>
-        <p:txBody>
-          <a:bodyPr wrap="square" lIns="0" rIns="0" tIns="25400" bIns="25400">
-            <a:spAutoFit/>
-          </a:bodyPr>
-          <a:lstStyle/>
-          <a:p>
-            <a:pPr algn="l"/>
-            <a:r>
-              <a:rPr sz="1500" b="0" i="0">
-                <a:solidFill>
-                  <a:srgbClr val="334155"/>
-                </a:solidFill>
-                <a:latin typeface="Segoe UI"/>
-              </a:rPr>
-              <a:t>Every prior pool-source result had n=1 and/or a size confound — not defensible under review. This is the single ablation that turns “Real &gt; Translated &gt; Generated” from an observation into a controlled, citable claim.</a:t>
+              <a:rPr sz="1500" b="1" i="0">
+                <a:solidFill>
+                  <a:srgbClr val="0F172A"/>
+                </a:solidFill>
+                <a:latin typeface="Segoe UI"/>
+              </a:rPr>
+              <a:t>n=1 + size confound → publishable claim</a:t>
             </a:r>
           </a:p>
         </p:txBody>
@@ -11153,13 +11400,13 @@
           <a:p>
             <a:pPr algn="l"/>
             <a:r>
-              <a:rPr sz="3000" b="1" i="0">
+              <a:rPr sz="3200" b="1" i="0">
                 <a:solidFill>
                   <a:srgbClr val="0F172A"/>
                 </a:solidFill>
                 <a:latin typeface="Segoe UI"/>
               </a:rPr>
-              <a:t>In Progress: The Ablation That Makes the Pool-Source Claim Real</a:t>
+              <a:t>In Progress</a:t>
             </a:r>
           </a:p>
         </p:txBody>
@@ -11173,7 +11420,7 @@
         <p:spPr>
           <a:xfrm>
             <a:off x="475488" y="1600200"/>
-            <a:ext cx="11247120" cy="786384"/>
+            <a:ext cx="11247120" cy="420624"/>
           </a:xfrm>
           <a:prstGeom prst="roundRect">
             <a:avLst>
@@ -11181,7 +11428,7 @@
             </a:avLst>
           </a:prstGeom>
           <a:solidFill>
-            <a:srgbClr val="D6F2E4"/>
+            <a:srgbClr val="F1F5F9"/>
           </a:solidFill>
           <a:ln>
             <a:noFill/>
@@ -11212,23 +11459,132 @@
       </p:sp>
       <p:sp>
         <p:nvSpPr>
-          <p:cNvPr id="5" name="Rectangle 4"/>
+          <p:cNvPr id="5" name="TextBox 4"/>
+          <p:cNvSpPr txBox="1"/>
+          <p:nvPr/>
+        </p:nvSpPr>
+        <p:spPr>
+          <a:xfrm>
+            <a:off x="548640" y="1655064"/>
+            <a:ext cx="2231136" cy="310896"/>
+          </a:xfrm>
+          <a:prstGeom prst="rect">
+            <a:avLst/>
+          </a:prstGeom>
+          <a:noFill/>
+        </p:spPr>
+        <p:txBody>
+          <a:bodyPr wrap="square" lIns="0" rIns="0" tIns="25400" bIns="25400">
+            <a:spAutoFit/>
+          </a:bodyPr>
+          <a:lstStyle/>
+          <a:p>
+            <a:pPr algn="ctr"/>
+            <a:r>
+              <a:rPr sz="1200" b="1" i="0" spc="40">
+                <a:solidFill>
+                  <a:srgbClr val="64748B"/>
+                </a:solidFill>
+                <a:latin typeface="Segoe UI"/>
+              </a:rPr>
+              <a:t>ARM</a:t>
+            </a:r>
+          </a:p>
+        </p:txBody>
+      </p:sp>
+      <p:sp>
+        <p:nvSpPr>
+          <p:cNvPr id="6" name="TextBox 5"/>
+          <p:cNvSpPr txBox="1"/>
+          <p:nvPr/>
+        </p:nvSpPr>
+        <p:spPr>
+          <a:xfrm>
+            <a:off x="2926080" y="1655064"/>
+            <a:ext cx="2962656" cy="310896"/>
+          </a:xfrm>
+          <a:prstGeom prst="rect">
+            <a:avLst/>
+          </a:prstGeom>
+          <a:noFill/>
+        </p:spPr>
+        <p:txBody>
+          <a:bodyPr wrap="square" lIns="0" rIns="0" tIns="25400" bIns="25400">
+            <a:spAutoFit/>
+          </a:bodyPr>
+          <a:lstStyle/>
+          <a:p>
+            <a:pPr algn="ctr"/>
+            <a:r>
+              <a:rPr sz="1200" b="1" i="0" spc="40">
+                <a:solidFill>
+                  <a:srgbClr val="64748B"/>
+                </a:solidFill>
+                <a:latin typeface="Segoe UI"/>
+              </a:rPr>
+              <a:t>STATUS</a:t>
+            </a:r>
+          </a:p>
+        </p:txBody>
+      </p:sp>
+      <p:sp>
+        <p:nvSpPr>
+          <p:cNvPr id="7" name="TextBox 6"/>
+          <p:cNvSpPr txBox="1"/>
+          <p:nvPr/>
+        </p:nvSpPr>
+        <p:spPr>
+          <a:xfrm>
+            <a:off x="6035040" y="1655064"/>
+            <a:ext cx="5614416" cy="310896"/>
+          </a:xfrm>
+          <a:prstGeom prst="rect">
+            <a:avLst/>
+          </a:prstGeom>
+          <a:noFill/>
+        </p:spPr>
+        <p:txBody>
+          <a:bodyPr wrap="square" lIns="0" rIns="0" tIns="25400" bIns="25400">
+            <a:spAutoFit/>
+          </a:bodyPr>
+          <a:lstStyle/>
+          <a:p>
+            <a:pPr algn="ctr"/>
+            <a:r>
+              <a:rPr sz="1200" b="1" i="0" spc="40">
+                <a:solidFill>
+                  <a:srgbClr val="64748B"/>
+                </a:solidFill>
+                <a:latin typeface="Segoe UI"/>
+              </a:rPr>
+              <a:t>NOTE</a:t>
+            </a:r>
+          </a:p>
+        </p:txBody>
+      </p:sp>
+      <p:sp>
+        <p:nvSpPr>
+          <p:cNvPr id="8" name="Rounded Rectangle 7"/>
           <p:cNvSpPr/>
           <p:nvPr/>
         </p:nvSpPr>
         <p:spPr>
           <a:xfrm>
-            <a:off x="475488" y="1600200"/>
-            <a:ext cx="91440" cy="786384"/>
-          </a:xfrm>
-          <a:prstGeom prst="rect">
-            <a:avLst/>
+            <a:off x="475488" y="2020824"/>
+            <a:ext cx="11247120" cy="621792"/>
+          </a:xfrm>
+          <a:prstGeom prst="roundRect">
+            <a:avLst>
+              <a:gd name="adj" fmla="val 3000"/>
+            </a:avLst>
           </a:prstGeom>
           <a:solidFill>
-            <a:srgbClr val="10B981"/>
+            <a:srgbClr val="FFFFFF"/>
           </a:solidFill>
-          <a:ln>
-            <a:noFill/>
+          <a:ln w="12700">
+            <a:solidFill>
+              <a:srgbClr val="E2E8F0"/>
+            </a:solidFill>
           </a:ln>
           <a:effectLst/>
         </p:spPr>
@@ -11256,14 +11612,14 @@
       </p:sp>
       <p:sp>
         <p:nvSpPr>
-          <p:cNvPr id="6" name="TextBox 5"/>
-          <p:cNvSpPr txBox="1"/>
-          <p:nvPr/>
-        </p:nvSpPr>
-        <p:spPr>
-          <a:xfrm>
-            <a:off x="713232" y="1600200"/>
-            <a:ext cx="10881360" cy="786384"/>
+          <p:cNvPr id="9" name="TextBox 8"/>
+          <p:cNvSpPr txBox="1"/>
+          <p:nvPr/>
+        </p:nvSpPr>
+        <p:spPr>
+          <a:xfrm>
+            <a:off x="548640" y="2020824"/>
+            <a:ext cx="2231136" cy="621792"/>
           </a:xfrm>
           <a:prstGeom prst="rect">
             <a:avLst/>
@@ -11276,40 +11632,112 @@
           </a:bodyPr>
           <a:lstStyle/>
           <a:p>
-            <a:pPr algn="l"/>
-            <a:r>
-              <a:rPr sz="1400" b="0" i="0">
+            <a:pPr algn="ctr"/>
+            <a:r>
+              <a:rPr sz="1500" b="1" i="0">
+                <a:solidFill>
+                  <a:srgbClr val="0F172A"/>
+                </a:solidFill>
+                <a:latin typeface="Segoe UI"/>
+              </a:rPr>
+              <a:t>Real</a:t>
+            </a:r>
+          </a:p>
+        </p:txBody>
+      </p:sp>
+      <p:sp>
+        <p:nvSpPr>
+          <p:cNvPr id="10" name="TextBox 9"/>
+          <p:cNvSpPr txBox="1"/>
+          <p:nvPr/>
+        </p:nvSpPr>
+        <p:spPr>
+          <a:xfrm>
+            <a:off x="2926080" y="2020824"/>
+            <a:ext cx="2962656" cy="621792"/>
+          </a:xfrm>
+          <a:prstGeom prst="rect">
+            <a:avLst/>
+          </a:prstGeom>
+          <a:noFill/>
+        </p:spPr>
+        <p:txBody>
+          <a:bodyPr wrap="square" anchor="ctr" lIns="0" rIns="0" tIns="25400" bIns="25400">
+            <a:spAutoFit/>
+          </a:bodyPr>
+          <a:lstStyle/>
+          <a:p>
+            <a:pPr algn="ctr"/>
+            <a:r>
+              <a:rPr sz="1500" b="0" i="0">
                 <a:solidFill>
                   <a:srgbClr val="334155"/>
                 </a:solidFill>
                 <a:latin typeface="Segoe UI"/>
               </a:rPr>
-              <a:t>Real arm complete: 0.5586 dev cF1 (5-seed ensemble, vote=4) — a valid KD gain over the 0.5267 no-KD baseline.</a:t>
-            </a:r>
-          </a:p>
-        </p:txBody>
-      </p:sp>
-      <p:sp>
-        <p:nvSpPr>
-          <p:cNvPr id="7" name="Rounded Rectangle 6"/>
+              <a:t>0.5586 (+3.2pp vs base)</a:t>
+            </a:r>
+          </a:p>
+        </p:txBody>
+      </p:sp>
+      <p:sp>
+        <p:nvSpPr>
+          <p:cNvPr id="11" name="TextBox 10"/>
+          <p:cNvSpPr txBox="1"/>
+          <p:nvPr/>
+        </p:nvSpPr>
+        <p:spPr>
+          <a:xfrm>
+            <a:off x="6035040" y="2020824"/>
+            <a:ext cx="5614416" cy="621792"/>
+          </a:xfrm>
+          <a:prstGeom prst="rect">
+            <a:avLst/>
+          </a:prstGeom>
+          <a:noFill/>
+        </p:spPr>
+        <p:txBody>
+          <a:bodyPr wrap="square" anchor="ctr" lIns="0" rIns="0" tIns="25400" bIns="25400">
+            <a:spAutoFit/>
+          </a:bodyPr>
+          <a:lstStyle/>
+          <a:p>
+            <a:pPr algn="ctr"/>
+            <a:r>
+              <a:rPr sz="1500" b="0" i="0">
+                <a:solidFill>
+                  <a:srgbClr val="334155"/>
+                </a:solidFill>
+                <a:latin typeface="Segoe UI"/>
+              </a:rPr>
+              <a:t>complete</a:t>
+            </a:r>
+          </a:p>
+        </p:txBody>
+      </p:sp>
+      <p:sp>
+        <p:nvSpPr>
+          <p:cNvPr id="12" name="Rounded Rectangle 11"/>
           <p:cNvSpPr/>
           <p:nvPr/>
         </p:nvSpPr>
         <p:spPr>
           <a:xfrm>
-            <a:off x="475488" y="2496312"/>
-            <a:ext cx="11247120" cy="786384"/>
+            <a:off x="475488" y="2642616"/>
+            <a:ext cx="11247120" cy="621792"/>
           </a:xfrm>
           <a:prstGeom prst="roundRect">
             <a:avLst>
-              <a:gd name="adj" fmla="val 8000"/>
+              <a:gd name="adj" fmla="val 3000"/>
             </a:avLst>
           </a:prstGeom>
           <a:solidFill>
-            <a:srgbClr val="FEF3C7"/>
+            <a:srgbClr val="FFFFFF"/>
           </a:solidFill>
-          <a:ln>
-            <a:noFill/>
+          <a:ln w="12700">
+            <a:solidFill>
+              <a:srgbClr val="E2E8F0"/>
+            </a:solidFill>
           </a:ln>
           <a:effectLst/>
         </p:spPr>
@@ -11337,23 +11765,132 @@
       </p:sp>
       <p:sp>
         <p:nvSpPr>
-          <p:cNvPr id="8" name="Rectangle 7"/>
+          <p:cNvPr id="13" name="TextBox 12"/>
+          <p:cNvSpPr txBox="1"/>
+          <p:nvPr/>
+        </p:nvSpPr>
+        <p:spPr>
+          <a:xfrm>
+            <a:off x="548640" y="2642616"/>
+            <a:ext cx="2231136" cy="621792"/>
+          </a:xfrm>
+          <a:prstGeom prst="rect">
+            <a:avLst/>
+          </a:prstGeom>
+          <a:noFill/>
+        </p:spPr>
+        <p:txBody>
+          <a:bodyPr wrap="square" anchor="ctr" lIns="0" rIns="0" tIns="25400" bIns="25400">
+            <a:spAutoFit/>
+          </a:bodyPr>
+          <a:lstStyle/>
+          <a:p>
+            <a:pPr algn="ctr"/>
+            <a:r>
+              <a:rPr sz="1500" b="1" i="0">
+                <a:solidFill>
+                  <a:srgbClr val="0F172A"/>
+                </a:solidFill>
+                <a:latin typeface="Segoe UI"/>
+              </a:rPr>
+              <a:t>Translated</a:t>
+            </a:r>
+          </a:p>
+        </p:txBody>
+      </p:sp>
+      <p:sp>
+        <p:nvSpPr>
+          <p:cNvPr id="14" name="TextBox 13"/>
+          <p:cNvSpPr txBox="1"/>
+          <p:nvPr/>
+        </p:nvSpPr>
+        <p:spPr>
+          <a:xfrm>
+            <a:off x="2926080" y="2642616"/>
+            <a:ext cx="2962656" cy="621792"/>
+          </a:xfrm>
+          <a:prstGeom prst="rect">
+            <a:avLst/>
+          </a:prstGeom>
+          <a:noFill/>
+        </p:spPr>
+        <p:txBody>
+          <a:bodyPr wrap="square" anchor="ctr" lIns="0" rIns="0" tIns="25400" bIns="25400">
+            <a:spAutoFit/>
+          </a:bodyPr>
+          <a:lstStyle/>
+          <a:p>
+            <a:pPr algn="ctr"/>
+            <a:r>
+              <a:rPr sz="1500" b="0" i="0">
+                <a:solidFill>
+                  <a:srgbClr val="334155"/>
+                </a:solidFill>
+                <a:latin typeface="Segoe UI"/>
+              </a:rPr>
+              <a:t>1 / 5 seeds</a:t>
+            </a:r>
+          </a:p>
+        </p:txBody>
+      </p:sp>
+      <p:sp>
+        <p:nvSpPr>
+          <p:cNvPr id="15" name="TextBox 14"/>
+          <p:cNvSpPr txBox="1"/>
+          <p:nvPr/>
+        </p:nvSpPr>
+        <p:spPr>
+          <a:xfrm>
+            <a:off x="6035040" y="2642616"/>
+            <a:ext cx="5614416" cy="621792"/>
+          </a:xfrm>
+          <a:prstGeom prst="rect">
+            <a:avLst/>
+          </a:prstGeom>
+          <a:noFill/>
+        </p:spPr>
+        <p:txBody>
+          <a:bodyPr wrap="square" anchor="ctr" lIns="0" rIns="0" tIns="25400" bIns="25400">
+            <a:spAutoFit/>
+          </a:bodyPr>
+          <a:lstStyle/>
+          <a:p>
+            <a:pPr algn="ctr"/>
+            <a:r>
+              <a:rPr sz="1500" b="0" i="0">
+                <a:solidFill>
+                  <a:srgbClr val="334155"/>
+                </a:solidFill>
+                <a:latin typeface="Segoe UI"/>
+              </a:rPr>
+              <a:t>running</a:t>
+            </a:r>
+          </a:p>
+        </p:txBody>
+      </p:sp>
+      <p:sp>
+        <p:nvSpPr>
+          <p:cNvPr id="16" name="Rounded Rectangle 15"/>
           <p:cNvSpPr/>
           <p:nvPr/>
         </p:nvSpPr>
         <p:spPr>
           <a:xfrm>
-            <a:off x="475488" y="2496312"/>
-            <a:ext cx="91440" cy="786384"/>
-          </a:xfrm>
-          <a:prstGeom prst="rect">
-            <a:avLst/>
+            <a:off x="475488" y="3264408"/>
+            <a:ext cx="11247120" cy="621792"/>
+          </a:xfrm>
+          <a:prstGeom prst="roundRect">
+            <a:avLst>
+              <a:gd name="adj" fmla="val 3000"/>
+            </a:avLst>
           </a:prstGeom>
           <a:solidFill>
-            <a:srgbClr val="F59E0B"/>
+            <a:srgbClr val="FFFFFF"/>
           </a:solidFill>
-          <a:ln>
-            <a:noFill/>
+          <a:ln w="12700">
+            <a:solidFill>
+              <a:srgbClr val="E2E8F0"/>
+            </a:solidFill>
           </a:ln>
           <a:effectLst/>
         </p:spPr>
@@ -11381,14 +11918,14 @@
       </p:sp>
       <p:sp>
         <p:nvSpPr>
-          <p:cNvPr id="9" name="TextBox 8"/>
-          <p:cNvSpPr txBox="1"/>
-          <p:nvPr/>
-        </p:nvSpPr>
-        <p:spPr>
-          <a:xfrm>
-            <a:off x="713232" y="2496312"/>
-            <a:ext cx="10881360" cy="786384"/>
+          <p:cNvPr id="17" name="TextBox 16"/>
+          <p:cNvSpPr txBox="1"/>
+          <p:nvPr/>
+        </p:nvSpPr>
+        <p:spPr>
+          <a:xfrm>
+            <a:off x="548640" y="3264408"/>
+            <a:ext cx="2231136" cy="621792"/>
           </a:xfrm>
           <a:prstGeom prst="rect">
             <a:avLst/>
@@ -11401,40 +11938,112 @@
           </a:bodyPr>
           <a:lstStyle/>
           <a:p>
-            <a:pPr algn="l"/>
-            <a:r>
-              <a:rPr sz="1400" b="0" i="0">
+            <a:pPr algn="ctr"/>
+            <a:r>
+              <a:rPr sz="1500" b="1" i="0">
+                <a:solidFill>
+                  <a:srgbClr val="0F172A"/>
+                </a:solidFill>
+                <a:latin typeface="Segoe UI"/>
+              </a:rPr>
+              <a:t>Generated</a:t>
+            </a:r>
+          </a:p>
+        </p:txBody>
+      </p:sp>
+      <p:sp>
+        <p:nvSpPr>
+          <p:cNvPr id="18" name="TextBox 17"/>
+          <p:cNvSpPr txBox="1"/>
+          <p:nvPr/>
+        </p:nvSpPr>
+        <p:spPr>
+          <a:xfrm>
+            <a:off x="2926080" y="3264408"/>
+            <a:ext cx="2962656" cy="621792"/>
+          </a:xfrm>
+          <a:prstGeom prst="rect">
+            <a:avLst/>
+          </a:prstGeom>
+          <a:noFill/>
+        </p:spPr>
+        <p:txBody>
+          <a:bodyPr wrap="square" anchor="ctr" lIns="0" rIns="0" tIns="25400" bIns="25400">
+            <a:spAutoFit/>
+          </a:bodyPr>
+          <a:lstStyle/>
+          <a:p>
+            <a:pPr algn="ctr"/>
+            <a:r>
+              <a:rPr sz="1500" b="0" i="0">
                 <a:solidFill>
                   <a:srgbClr val="334155"/>
                 </a:solidFill>
                 <a:latin typeface="Segoe UI"/>
               </a:rPr>
-              <a:t>Translated arm running (1/5 seeds); generated arm queued next — both needed before comparing sources.</a:t>
-            </a:r>
-          </a:p>
-        </p:txBody>
-      </p:sp>
-      <p:sp>
-        <p:nvSpPr>
-          <p:cNvPr id="10" name="Rounded Rectangle 9"/>
+              <a:t>not started</a:t>
+            </a:r>
+          </a:p>
+        </p:txBody>
+      </p:sp>
+      <p:sp>
+        <p:nvSpPr>
+          <p:cNvPr id="19" name="TextBox 18"/>
+          <p:cNvSpPr txBox="1"/>
+          <p:nvPr/>
+        </p:nvSpPr>
+        <p:spPr>
+          <a:xfrm>
+            <a:off x="6035040" y="3264408"/>
+            <a:ext cx="5614416" cy="621792"/>
+          </a:xfrm>
+          <a:prstGeom prst="rect">
+            <a:avLst/>
+          </a:prstGeom>
+          <a:noFill/>
+        </p:spPr>
+        <p:txBody>
+          <a:bodyPr wrap="square" anchor="ctr" lIns="0" rIns="0" tIns="25400" bIns="25400">
+            <a:spAutoFit/>
+          </a:bodyPr>
+          <a:lstStyle/>
+          <a:p>
+            <a:pPr algn="ctr"/>
+            <a:r>
+              <a:rPr sz="1500" b="0" i="0">
+                <a:solidFill>
+                  <a:srgbClr val="334155"/>
+                </a:solidFill>
+                <a:latin typeface="Segoe UI"/>
+              </a:rPr>
+              <a:t>queued</a:t>
+            </a:r>
+          </a:p>
+        </p:txBody>
+      </p:sp>
+      <p:sp>
+        <p:nvSpPr>
+          <p:cNvPr id="20" name="Rounded Rectangle 19"/>
           <p:cNvSpPr/>
           <p:nvPr/>
         </p:nvSpPr>
         <p:spPr>
           <a:xfrm>
-            <a:off x="475488" y="3392424"/>
-            <a:ext cx="11247120" cy="786384"/>
+            <a:off x="475488" y="3886200"/>
+            <a:ext cx="11247120" cy="621792"/>
           </a:xfrm>
           <a:prstGeom prst="roundRect">
             <a:avLst>
-              <a:gd name="adj" fmla="val 8000"/>
+              <a:gd name="adj" fmla="val 3000"/>
             </a:avLst>
           </a:prstGeom>
           <a:solidFill>
-            <a:srgbClr val="DEEAFB"/>
+            <a:srgbClr val="FFFFFF"/>
           </a:solidFill>
-          <a:ln>
-            <a:noFill/>
+          <a:ln w="12700">
+            <a:solidFill>
+              <a:srgbClr val="E2E8F0"/>
+            </a:solidFill>
           </a:ln>
           <a:effectLst/>
         </p:spPr>
@@ -11462,218 +12071,119 @@
       </p:sp>
       <p:sp>
         <p:nvSpPr>
-          <p:cNvPr id="11" name="Rectangle 10"/>
+          <p:cNvPr id="21" name="TextBox 20"/>
+          <p:cNvSpPr txBox="1"/>
+          <p:nvPr/>
+        </p:nvSpPr>
+        <p:spPr>
+          <a:xfrm>
+            <a:off x="548640" y="3886200"/>
+            <a:ext cx="2231136" cy="621792"/>
+          </a:xfrm>
+          <a:prstGeom prst="rect">
+            <a:avLst/>
+          </a:prstGeom>
+          <a:noFill/>
+        </p:spPr>
+        <p:txBody>
+          <a:bodyPr wrap="square" anchor="ctr" lIns="0" rIns="0" tIns="25400" bIns="25400">
+            <a:spAutoFit/>
+          </a:bodyPr>
+          <a:lstStyle/>
+          <a:p>
+            <a:pPr algn="ctr"/>
+            <a:r>
+              <a:rPr sz="1500" b="1" i="0">
+                <a:solidFill>
+                  <a:srgbClr val="0F172A"/>
+                </a:solidFill>
+                <a:latin typeface="Segoe UI"/>
+              </a:rPr>
+              <a:t>Caveat</a:t>
+            </a:r>
+          </a:p>
+        </p:txBody>
+      </p:sp>
+      <p:sp>
+        <p:nvSpPr>
+          <p:cNvPr id="22" name="TextBox 21"/>
+          <p:cNvSpPr txBox="1"/>
+          <p:nvPr/>
+        </p:nvSpPr>
+        <p:spPr>
+          <a:xfrm>
+            <a:off x="2926080" y="3886200"/>
+            <a:ext cx="2962656" cy="621792"/>
+          </a:xfrm>
+          <a:prstGeom prst="rect">
+            <a:avLst/>
+          </a:prstGeom>
+          <a:noFill/>
+        </p:spPr>
+        <p:txBody>
+          <a:bodyPr wrap="square" anchor="ctr" lIns="0" rIns="0" tIns="25400" bIns="25400">
+            <a:spAutoFit/>
+          </a:bodyPr>
+          <a:lstStyle/>
+          <a:p>
+            <a:pPr algn="ctr"/>
+            <a:r>
+              <a:rPr sz="1500" b="0" i="0">
+                <a:solidFill>
+                  <a:srgbClr val="334155"/>
+                </a:solidFill>
+                <a:latin typeface="Segoe UI"/>
+              </a:rPr>
+              <a:t>−1.7pp cap cost</a:t>
+            </a:r>
+          </a:p>
+        </p:txBody>
+      </p:sp>
+      <p:sp>
+        <p:nvSpPr>
+          <p:cNvPr id="23" name="TextBox 22"/>
+          <p:cNvSpPr txBox="1"/>
+          <p:nvPr/>
+        </p:nvSpPr>
+        <p:spPr>
+          <a:xfrm>
+            <a:off x="6035040" y="3886200"/>
+            <a:ext cx="5614416" cy="621792"/>
+          </a:xfrm>
+          <a:prstGeom prst="rect">
+            <a:avLst/>
+          </a:prstGeom>
+          <a:noFill/>
+        </p:spPr>
+        <p:txBody>
+          <a:bodyPr wrap="square" anchor="ctr" lIns="0" rIns="0" tIns="25400" bIns="25400">
+            <a:spAutoFit/>
+          </a:bodyPr>
+          <a:lstStyle/>
+          <a:p>
+            <a:pPr algn="ctr"/>
+            <a:r>
+              <a:rPr sz="1500" b="0" i="0">
+                <a:solidFill>
+                  <a:srgbClr val="334155"/>
+                </a:solidFill>
+                <a:latin typeface="Segoe UI"/>
+              </a:rPr>
+              <a:t>net into final read</a:t>
+            </a:r>
+          </a:p>
+        </p:txBody>
+      </p:sp>
+      <p:sp>
+        <p:nvSpPr>
+          <p:cNvPr id="24" name="Rounded Rectangle 23"/>
           <p:cNvSpPr/>
           <p:nvPr/>
         </p:nvSpPr>
         <p:spPr>
           <a:xfrm>
-            <a:off x="475488" y="3392424"/>
-            <a:ext cx="91440" cy="786384"/>
-          </a:xfrm>
-          <a:prstGeom prst="rect">
-            <a:avLst/>
-          </a:prstGeom>
-          <a:solidFill>
-            <a:srgbClr val="3B82F6"/>
-          </a:solidFill>
-          <a:ln>
-            <a:noFill/>
-          </a:ln>
-          <a:effectLst/>
-        </p:spPr>
-        <p:style>
-          <a:lnRef idx="1">
-            <a:schemeClr val="accent1"/>
-          </a:lnRef>
-          <a:fillRef idx="3">
-            <a:schemeClr val="accent1"/>
-          </a:fillRef>
-          <a:effectRef idx="2">
-            <a:schemeClr val="accent1"/>
-          </a:effectRef>
-          <a:fontRef idx="minor">
-            <a:schemeClr val="lt1"/>
-          </a:fontRef>
-        </p:style>
-        <p:txBody>
-          <a:bodyPr rtlCol="0" anchor="ctr"/>
-          <a:lstStyle/>
-          <a:p>
-            <a:pPr algn="ctr"/>
-          </a:p>
-        </p:txBody>
-      </p:sp>
-      <p:sp>
-        <p:nvSpPr>
-          <p:cNvPr id="12" name="TextBox 11"/>
-          <p:cNvSpPr txBox="1"/>
-          <p:nvPr/>
-        </p:nvSpPr>
-        <p:spPr>
-          <a:xfrm>
-            <a:off x="713232" y="3392424"/>
-            <a:ext cx="10881360" cy="786384"/>
-          </a:xfrm>
-          <a:prstGeom prst="rect">
-            <a:avLst/>
-          </a:prstGeom>
-          <a:noFill/>
-        </p:spPr>
-        <p:txBody>
-          <a:bodyPr wrap="square" anchor="ctr" lIns="0" rIns="0" tIns="25400" bIns="25400">
-            <a:spAutoFit/>
-          </a:bodyPr>
-          <a:lstStyle/>
-          <a:p>
-            <a:pPr algn="l"/>
-            <a:r>
-              <a:rPr sz="1400" b="0" i="0">
-                <a:solidFill>
-                  <a:srgbClr val="334155"/>
-                </a:solidFill>
-                <a:latin typeface="Segoe UI"/>
-              </a:rPr>
-              <a:t>Design controls for the two confounds that undermined earlier evidence: pool size and gold amount.</a:t>
-            </a:r>
-          </a:p>
-        </p:txBody>
-      </p:sp>
-      <p:sp>
-        <p:nvSpPr>
-          <p:cNvPr id="13" name="Rounded Rectangle 12"/>
-          <p:cNvSpPr/>
-          <p:nvPr/>
-        </p:nvSpPr>
-        <p:spPr>
-          <a:xfrm>
-            <a:off x="475488" y="4288536"/>
-            <a:ext cx="11247120" cy="786384"/>
-          </a:xfrm>
-          <a:prstGeom prst="roundRect">
-            <a:avLst>
-              <a:gd name="adj" fmla="val 8000"/>
-            </a:avLst>
-          </a:prstGeom>
-          <a:solidFill>
-            <a:srgbClr val="FDE4E4"/>
-          </a:solidFill>
-          <a:ln>
-            <a:noFill/>
-          </a:ln>
-          <a:effectLst/>
-        </p:spPr>
-        <p:style>
-          <a:lnRef idx="1">
-            <a:schemeClr val="accent1"/>
-          </a:lnRef>
-          <a:fillRef idx="3">
-            <a:schemeClr val="accent1"/>
-          </a:fillRef>
-          <a:effectRef idx="2">
-            <a:schemeClr val="accent1"/>
-          </a:effectRef>
-          <a:fontRef idx="minor">
-            <a:schemeClr val="lt1"/>
-          </a:fontRef>
-        </p:style>
-        <p:txBody>
-          <a:bodyPr rtlCol="0" anchor="ctr"/>
-          <a:lstStyle/>
-          <a:p>
-            <a:pPr algn="ctr"/>
-          </a:p>
-        </p:txBody>
-      </p:sp>
-      <p:sp>
-        <p:nvSpPr>
-          <p:cNvPr id="14" name="Rectangle 13"/>
-          <p:cNvSpPr/>
-          <p:nvPr/>
-        </p:nvSpPr>
-        <p:spPr>
-          <a:xfrm>
-            <a:off x="475488" y="4288536"/>
-            <a:ext cx="91440" cy="786384"/>
-          </a:xfrm>
-          <a:prstGeom prst="rect">
-            <a:avLst/>
-          </a:prstGeom>
-          <a:solidFill>
-            <a:srgbClr val="EF4444"/>
-          </a:solidFill>
-          <a:ln>
-            <a:noFill/>
-          </a:ln>
-          <a:effectLst/>
-        </p:spPr>
-        <p:style>
-          <a:lnRef idx="1">
-            <a:schemeClr val="accent1"/>
-          </a:lnRef>
-          <a:fillRef idx="3">
-            <a:schemeClr val="accent1"/>
-          </a:fillRef>
-          <a:effectRef idx="2">
-            <a:schemeClr val="accent1"/>
-          </a:effectRef>
-          <a:fontRef idx="minor">
-            <a:schemeClr val="lt1"/>
-          </a:fontRef>
-        </p:style>
-        <p:txBody>
-          <a:bodyPr rtlCol="0" anchor="ctr"/>
-          <a:lstStyle/>
-          <a:p>
-            <a:pPr algn="ctr"/>
-          </a:p>
-        </p:txBody>
-      </p:sp>
-      <p:sp>
-        <p:nvSpPr>
-          <p:cNvPr id="15" name="TextBox 14"/>
-          <p:cNvSpPr txBox="1"/>
-          <p:nvPr/>
-        </p:nvSpPr>
-        <p:spPr>
-          <a:xfrm>
-            <a:off x="713232" y="4288536"/>
-            <a:ext cx="10881360" cy="786384"/>
-          </a:xfrm>
-          <a:prstGeom prst="rect">
-            <a:avLst/>
-          </a:prstGeom>
-          <a:noFill/>
-        </p:spPr>
-        <p:txBody>
-          <a:bodyPr wrap="square" anchor="ctr" lIns="0" rIns="0" tIns="25400" bIns="25400">
-            <a:spAutoFit/>
-          </a:bodyPr>
-          <a:lstStyle/>
-          <a:p>
-            <a:pPr algn="l"/>
-            <a:r>
-              <a:rPr sz="1400" b="0" i="0">
-                <a:solidFill>
-                  <a:srgbClr val="334155"/>
-                </a:solidFill>
-                <a:latin typeface="Segoe UI"/>
-              </a:rPr>
-              <a:t>Caution: capping silver for size-matching already costs ~1.7 pp vs. the uncapped submission — interpret the eventual source comparison net of that cost.</a:t>
-            </a:r>
-          </a:p>
-        </p:txBody>
-      </p:sp>
-      <p:sp>
-        <p:nvSpPr>
-          <p:cNvPr id="16" name="Rounded Rectangle 15"/>
-          <p:cNvSpPr/>
-          <p:nvPr/>
-        </p:nvSpPr>
-        <p:spPr>
-          <a:xfrm>
-            <a:off x="475488" y="5440680"/>
-            <a:ext cx="11247120" cy="960120"/>
+            <a:off x="475488" y="5394960"/>
+            <a:ext cx="11247120" cy="914400"/>
           </a:xfrm>
           <a:prstGeom prst="roundRect">
             <a:avLst>
@@ -11712,13 +12222,13 @@
       </p:sp>
       <p:sp>
         <p:nvSpPr>
-          <p:cNvPr id="17" name="TextBox 16"/>
-          <p:cNvSpPr txBox="1"/>
-          <p:nvPr/>
-        </p:nvSpPr>
-        <p:spPr>
-          <a:xfrm>
-            <a:off x="713232" y="5715000"/>
+          <p:cNvPr id="25" name="TextBox 24"/>
+          <p:cNvSpPr txBox="1"/>
+          <p:nvPr/>
+        </p:nvSpPr>
+        <p:spPr>
+          <a:xfrm>
+            <a:off x="713232" y="5650992"/>
             <a:ext cx="10881360" cy="457200"/>
           </a:xfrm>
           <a:prstGeom prst="rect">
@@ -11734,13 +12244,13 @@
           <a:p>
             <a:pPr algn="ctr"/>
             <a:r>
-              <a:rPr sz="1700" b="1" i="0">
+              <a:rPr sz="1800" b="1" i="0">
                 <a:solidFill>
                   <a:srgbClr val="0F172A"/>
                 </a:solidFill>
                 <a:latin typeface="Segoe UI"/>
               </a:rPr>
-              <a:t>Full real vs. translated vs. generated results — next group meeting.</a:t>
+              <a:t>Full 3-way results — next group meeting</a:t>
             </a:r>
           </a:p>
         </p:txBody>

--- a/docs/KD_pool_source_ablation_20260703.pptx
+++ b/docs/KD_pool_source_ablation_20260703.pptx
@@ -3283,6 +3283,41 @@
           </a:p>
         </p:txBody>
       </p:sp>
+      <p:sp>
+        <p:nvSpPr>
+          <p:cNvPr id="7" name="TextBox 6"/>
+          <p:cNvSpPr txBox="1"/>
+          <p:nvPr/>
+        </p:nvSpPr>
+        <p:spPr>
+          <a:xfrm>
+            <a:off x="73152" y="18288"/>
+            <a:ext cx="12042648" cy="274320"/>
+          </a:xfrm>
+          <a:prstGeom prst="rect">
+            <a:avLst/>
+          </a:prstGeom>
+          <a:noFill/>
+        </p:spPr>
+        <p:txBody>
+          <a:bodyPr wrap="none" lIns="36576" rIns="36576" tIns="0" bIns="0" anchor="ctr">
+            <a:spAutoFit/>
+          </a:bodyPr>
+          <a:lstStyle/>
+          <a:p>
+            <a:pPr algn="ctr"/>
+            <a:r>
+              <a:rPr sz="1000" b="1">
+                <a:solidFill>
+                  <a:srgbClr val="B91C1C"/>
+                </a:solidFill>
+                <a:latin typeface="Aptos"/>
+              </a:rPr>
+              <a:t>HISTORICAL DECK — superseded by the locked 2026-07-18 evidence; do not cite cross-split SOTA or universal KD claims</a:t>
+            </a:r>
+          </a:p>
+        </p:txBody>
+      </p:sp>
     </p:spTree>
   </p:cSld>
   <p:clrMapOvr>
@@ -6049,6 +6084,41 @@
           </a:p>
         </p:txBody>
       </p:sp>
+      <p:sp>
+        <p:nvSpPr>
+          <p:cNvPr id="77" name="TextBox 76"/>
+          <p:cNvSpPr txBox="1"/>
+          <p:nvPr/>
+        </p:nvSpPr>
+        <p:spPr>
+          <a:xfrm>
+            <a:off x="73152" y="18288"/>
+            <a:ext cx="12042648" cy="274320"/>
+          </a:xfrm>
+          <a:prstGeom prst="rect">
+            <a:avLst/>
+          </a:prstGeom>
+          <a:noFill/>
+        </p:spPr>
+        <p:txBody>
+          <a:bodyPr wrap="none" lIns="36576" rIns="36576" tIns="0" bIns="0" anchor="ctr">
+            <a:spAutoFit/>
+          </a:bodyPr>
+          <a:lstStyle/>
+          <a:p>
+            <a:pPr algn="ctr"/>
+            <a:r>
+              <a:rPr sz="1000" b="1">
+                <a:solidFill>
+                  <a:srgbClr val="B91C1C"/>
+                </a:solidFill>
+                <a:latin typeface="Aptos"/>
+              </a:rPr>
+              <a:t>HISTORICAL DECK — superseded by the locked 2026-07-18 evidence; do not cite cross-split SOTA or universal KD claims</a:t>
+            </a:r>
+          </a:p>
+        </p:txBody>
+      </p:sp>
     </p:spTree>
   </p:cSld>
   <p:clrMapOvr>
@@ -7271,6 +7341,41 @@
           </a:p>
         </p:txBody>
       </p:sp>
+      <p:sp>
+        <p:nvSpPr>
+          <p:cNvPr id="34" name="TextBox 33"/>
+          <p:cNvSpPr txBox="1"/>
+          <p:nvPr/>
+        </p:nvSpPr>
+        <p:spPr>
+          <a:xfrm>
+            <a:off x="73152" y="18288"/>
+            <a:ext cx="12042648" cy="274320"/>
+          </a:xfrm>
+          <a:prstGeom prst="rect">
+            <a:avLst/>
+          </a:prstGeom>
+          <a:noFill/>
+        </p:spPr>
+        <p:txBody>
+          <a:bodyPr wrap="none" lIns="36576" rIns="36576" tIns="0" bIns="0" anchor="ctr">
+            <a:spAutoFit/>
+          </a:bodyPr>
+          <a:lstStyle/>
+          <a:p>
+            <a:pPr algn="ctr"/>
+            <a:r>
+              <a:rPr sz="1000" b="1">
+                <a:solidFill>
+                  <a:srgbClr val="B91C1C"/>
+                </a:solidFill>
+                <a:latin typeface="Aptos"/>
+              </a:rPr>
+              <a:t>HISTORICAL DECK — superseded by the locked 2026-07-18 evidence; do not cite cross-split SOTA or universal KD claims</a:t>
+            </a:r>
+          </a:p>
+        </p:txBody>
+      </p:sp>
     </p:spTree>
   </p:cSld>
   <p:clrMapOvr>
@@ -8126,6 +8231,41 @@
                 <a:latin typeface="Segoe UI"/>
               </a:rPr>
               <a:t>1,240 gold + 3,000 silver = 4,240</a:t>
+            </a:r>
+          </a:p>
+        </p:txBody>
+      </p:sp>
+      <p:sp>
+        <p:nvSpPr>
+          <p:cNvPr id="24" name="TextBox 23"/>
+          <p:cNvSpPr txBox="1"/>
+          <p:nvPr/>
+        </p:nvSpPr>
+        <p:spPr>
+          <a:xfrm>
+            <a:off x="73152" y="18288"/>
+            <a:ext cx="12042648" cy="274320"/>
+          </a:xfrm>
+          <a:prstGeom prst="rect">
+            <a:avLst/>
+          </a:prstGeom>
+          <a:noFill/>
+        </p:spPr>
+        <p:txBody>
+          <a:bodyPr wrap="none" lIns="36576" rIns="36576" tIns="0" bIns="0" anchor="ctr">
+            <a:spAutoFit/>
+          </a:bodyPr>
+          <a:lstStyle/>
+          <a:p>
+            <a:pPr algn="ctr"/>
+            <a:r>
+              <a:rPr sz="1000" b="1">
+                <a:solidFill>
+                  <a:srgbClr val="B91C1C"/>
+                </a:solidFill>
+                <a:latin typeface="Aptos"/>
+              </a:rPr>
+              <a:t>HISTORICAL DECK — superseded by the locked 2026-07-18 evidence; do not cite cross-split SOTA or universal KD claims</a:t>
             </a:r>
           </a:p>
         </p:txBody>
